--- a/Fase 1/Evidencias Grupales/Presentación Proyecto.pptx
+++ b/Fase 1/Evidencias Grupales/Presentación Proyecto.pptx
@@ -4,30 +4,33 @@
   <p:sldMasterIdLst>
     <p:sldMasterId id="2147483648" r:id="rId1"/>
   </p:sldMasterIdLst>
+  <p:notesMasterIdLst>
+    <p:notesMasterId r:id="rId23"/>
+  </p:notesMasterIdLst>
   <p:sldIdLst>
-    <p:sldId id="256" r:id="rId7"/>
-    <p:sldId id="257" r:id="rId9"/>
-    <p:sldId id="258" r:id="rId10"/>
-    <p:sldId id="259" r:id="rId11"/>
-    <p:sldId id="260" r:id="rId12"/>
-    <p:sldId id="261" r:id="rId13"/>
-    <p:sldId id="262" r:id="rId14"/>
-    <p:sldId id="263" r:id="rId15"/>
-    <p:sldId id="264" r:id="rId16"/>
-    <p:sldId id="265" r:id="rId17"/>
-    <p:sldId id="266" r:id="rId18"/>
-    <p:sldId id="267" r:id="rId19"/>
-    <p:sldId id="268" r:id="rId20"/>
-    <p:sldId id="269" r:id="rId21"/>
-    <p:sldId id="270" r:id="rId22"/>
-    <p:sldId id="271" r:id="rId23"/>
-    <p:sldId id="272" r:id="rId24"/>
-    <p:sldId id="273" r:id="rId25"/>
-    <p:sldId id="274" r:id="rId26"/>
-    <p:sldId id="275" r:id="rId27"/>
-    <p:sldId id="276" r:id="rId28"/>
+    <p:sldId id="256" r:id="rId2"/>
+    <p:sldId id="257" r:id="rId3"/>
+    <p:sldId id="258" r:id="rId4"/>
+    <p:sldId id="259" r:id="rId5"/>
+    <p:sldId id="260" r:id="rId6"/>
+    <p:sldId id="261" r:id="rId7"/>
+    <p:sldId id="262" r:id="rId8"/>
+    <p:sldId id="263" r:id="rId9"/>
+    <p:sldId id="264" r:id="rId10"/>
+    <p:sldId id="265" r:id="rId11"/>
+    <p:sldId id="266" r:id="rId12"/>
+    <p:sldId id="267" r:id="rId13"/>
+    <p:sldId id="268" r:id="rId14"/>
+    <p:sldId id="269" r:id="rId15"/>
+    <p:sldId id="270" r:id="rId16"/>
+    <p:sldId id="271" r:id="rId17"/>
+    <p:sldId id="272" r:id="rId18"/>
+    <p:sldId id="273" r:id="rId19"/>
+    <p:sldId id="274" r:id="rId20"/>
+    <p:sldId id="275" r:id="rId21"/>
+    <p:sldId id="276" r:id="rId22"/>
   </p:sldIdLst>
-  <p:sldSz cx="12191695" cy="6858000" type="screen4x3"/>
+  <p:sldSz cx="12192000" cy="6858000"/>
   <p:notesSz cx="6858000" cy="9144000"/>
   <p:defaultTextStyle>
     <a:defPPr>
@@ -124,11 +127,27 @@
       </a:defRPr>
     </a:lvl9pPr>
   </p:defaultTextStyle>
+  <p:extLst>
+    <p:ext uri="{EFAFB233-063F-42B5-8137-9DF3F51BA10A}">
+      <p15:sldGuideLst xmlns:p15="http://schemas.microsoft.com/office/powerpoint/2012/main">
+        <p15:guide id="1" orient="horz" pos="2160">
+          <p15:clr>
+            <a:srgbClr val="A4A3A4"/>
+          </p15:clr>
+        </p15:guide>
+        <p15:guide id="2" pos="2880">
+          <p15:clr>
+            <a:srgbClr val="A4A3A4"/>
+          </p15:clr>
+        </p15:guide>
+      </p15:sldGuideLst>
+    </p:ext>
+  </p:extLst>
 </p:presentation>
 </file>
 
 <file path=ppt/notesMasters/notesMaster1.xml><?xml version="1.0" encoding="utf-8"?>
-<p:notesMaster xmlns:a="http://schemas.openxmlformats.org/drawingml/2006/main" xmlns:p="http://schemas.openxmlformats.org/presentationml/2006/main" xmlns:r="http://schemas.openxmlformats.org/officeDocument/2006/relationships">
+<p:notesMaster xmlns:a="http://schemas.openxmlformats.org/drawingml/2006/main" xmlns:r="http://schemas.openxmlformats.org/officeDocument/2006/relationships" xmlns:p="http://schemas.openxmlformats.org/presentationml/2006/main">
   <p:cSld>
     <p:bg>
       <p:bgRef idx="1001">
@@ -149,241 +168,16 @@
           <a:chExt cx="0" cy="0"/>
         </a:xfrm>
       </p:grpSpPr>
-      <p:sp>
-        <p:nvSpPr>
-          <p:cNvPr id="2" name="Header Placeholder 1"/>
-          <p:cNvSpPr>
-            <a:spLocks noGrp="1"/>
-          </p:cNvSpPr>
-          <p:nvPr>
-            <p:ph type="hdr" sz="quarter"/>
-          </p:nvPr>
-        </p:nvSpPr>
-        <p:spPr>
-          <a:xfrm>
-            <a:off x="0" y="0"/>
-            <a:ext cx="2971800" cy="457200"/>
-          </a:xfrm>
-          <a:prstGeom prst="rect">
-            <a:avLst/>
-          </a:prstGeom>
-        </p:spPr>
-        <p:txBody>
-          <a:bodyPr vert="horz" lIns="91440" tIns="45720" rIns="91440" bIns="45720" rtlCol="0"/>
-          <a:lstStyle>
-            <a:lvl1pPr algn="l">
-              <a:defRPr sz="1200"/>
-            </a:lvl1pPr>
-          </a:lstStyle>
-          <a:p>
-            <a:endParaRPr lang="en-US"/>
-          </a:p>
-        </p:txBody>
-      </p:sp>
-      <p:sp>
-        <p:nvSpPr>
-          <p:cNvPr id="3" name="Date Placeholder 2"/>
-          <p:cNvSpPr>
-            <a:spLocks noGrp="1"/>
-          </p:cNvSpPr>
-          <p:nvPr>
-            <p:ph type="dt" idx="1"/>
-          </p:nvPr>
-        </p:nvSpPr>
-        <p:spPr>
-          <a:xfrm>
-            <a:off x="3884613" y="0"/>
-            <a:ext cx="2971800" cy="457200"/>
-          </a:xfrm>
-          <a:prstGeom prst="rect">
-            <a:avLst/>
-          </a:prstGeom>
-        </p:spPr>
-        <p:txBody>
-          <a:bodyPr vert="horz" lIns="91440" tIns="45720" rIns="91440" bIns="45720" rtlCol="0"/>
-          <a:lstStyle>
-            <a:lvl1pPr algn="r">
-              <a:defRPr sz="1200"/>
-            </a:lvl1pPr>
-          </a:lstStyle>
-          <a:p>
-            <a:fld id="{0F89C1C7-3DCD-1040-A9CF-14679D8B5DDD}" type="datetimeFigureOut">
-              <a:rPr lang="en-US" smtClean="0"/>
-              <a:t>10/17/16</a:t>
-            </a:fld>
-            <a:endParaRPr lang="en-US"/>
-          </a:p>
-        </p:txBody>
-      </p:sp>
-      <p:sp>
-        <p:nvSpPr>
-          <p:cNvPr id="4" name="Slide Image Placeholder 3"/>
-          <p:cNvSpPr>
-            <a:spLocks noGrp="1" noRot="1" noChangeAspect="1"/>
-          </p:cNvSpPr>
-          <p:nvPr>
-            <p:ph type="sldImg" idx="2"/>
-          </p:nvPr>
-        </p:nvSpPr>
-        <p:spPr>
-          <a:xfrm>
-            <a:off x="1143000" y="685800"/>
-            <a:ext cx="4572000" cy="3429000"/>
-          </a:xfrm>
-          <a:prstGeom prst="rect">
-            <a:avLst/>
-          </a:prstGeom>
-          <a:noFill/>
-          <a:ln w="12700">
-            <a:solidFill>
-              <a:prstClr val="black"/>
-            </a:solidFill>
-          </a:ln>
-        </p:spPr>
-        <p:txBody>
-          <a:bodyPr vert="horz" lIns="91440" tIns="45720" rIns="91440" bIns="45720" rtlCol="0" anchor="ctr"/>
-          <a:lstStyle/>
-          <a:p>
-            <a:endParaRPr lang="en-US"/>
-          </a:p>
-        </p:txBody>
-      </p:sp>
-      <p:sp>
-        <p:nvSpPr>
-          <p:cNvPr id="5" name="Notes Placeholder 4"/>
-          <p:cNvSpPr>
-            <a:spLocks noGrp="1"/>
-          </p:cNvSpPr>
-          <p:nvPr>
-            <p:ph type="body" sz="quarter" idx="3"/>
-          </p:nvPr>
-        </p:nvSpPr>
-        <p:spPr>
-          <a:xfrm>
-            <a:off x="685800" y="4343400"/>
-            <a:ext cx="5486400" cy="4114800"/>
-          </a:xfrm>
-          <a:prstGeom prst="rect">
-            <a:avLst/>
-          </a:prstGeom>
-        </p:spPr>
-        <p:txBody>
-          <a:bodyPr vert="horz" lIns="91440" tIns="45720" rIns="91440" bIns="45720" rtlCol="0"/>
-          <a:lstStyle/>
-          <a:p>
-            <a:pPr lvl="0"/>
-            <a:r>
-              <a:rPr lang="en-US" smtClean="0"/>
-              <a:t>Click to edit Master text styles</a:t>
-            </a:r>
-          </a:p>
-          <a:p>
-            <a:pPr lvl="1"/>
-            <a:r>
-              <a:rPr lang="en-US" smtClean="0"/>
-              <a:t>Second level</a:t>
-            </a:r>
-          </a:p>
-          <a:p>
-            <a:pPr lvl="2"/>
-            <a:r>
-              <a:rPr lang="en-US" smtClean="0"/>
-              <a:t>Third level</a:t>
-            </a:r>
-          </a:p>
-          <a:p>
-            <a:pPr lvl="3"/>
-            <a:r>
-              <a:rPr lang="en-US" smtClean="0"/>
-              <a:t>Fourth level</a:t>
-            </a:r>
-          </a:p>
-          <a:p>
-            <a:pPr lvl="4"/>
-            <a:r>
-              <a:rPr lang="en-US" smtClean="0"/>
-              <a:t>Fifth level</a:t>
-            </a:r>
-            <a:endParaRPr lang="en-US"/>
-          </a:p>
-        </p:txBody>
-      </p:sp>
-      <p:sp>
-        <p:nvSpPr>
-          <p:cNvPr id="6" name="Footer Placeholder 5"/>
-          <p:cNvSpPr>
-            <a:spLocks noGrp="1"/>
-          </p:cNvSpPr>
-          <p:nvPr>
-            <p:ph type="ftr" sz="quarter" idx="4"/>
-          </p:nvPr>
-        </p:nvSpPr>
-        <p:spPr>
-          <a:xfrm>
-            <a:off x="0" y="8685213"/>
-            <a:ext cx="2971800" cy="457200"/>
-          </a:xfrm>
-          <a:prstGeom prst="rect">
-            <a:avLst/>
-          </a:prstGeom>
-        </p:spPr>
-        <p:txBody>
-          <a:bodyPr vert="horz" lIns="91440" tIns="45720" rIns="91440" bIns="45720" rtlCol="0" anchor="b"/>
-          <a:lstStyle>
-            <a:lvl1pPr algn="l">
-              <a:defRPr sz="1200"/>
-            </a:lvl1pPr>
-          </a:lstStyle>
-          <a:p>
-            <a:endParaRPr lang="en-US"/>
-          </a:p>
-        </p:txBody>
-      </p:sp>
-      <p:sp>
-        <p:nvSpPr>
-          <p:cNvPr id="7" name="Slide Number Placeholder 6"/>
-          <p:cNvSpPr>
-            <a:spLocks noGrp="1"/>
-          </p:cNvSpPr>
-          <p:nvPr>
-            <p:ph type="sldNum" sz="quarter" idx="5"/>
-          </p:nvPr>
-        </p:nvSpPr>
-        <p:spPr>
-          <a:xfrm>
-            <a:off x="3884613" y="8685213"/>
-            <a:ext cx="2971800" cy="457200"/>
-          </a:xfrm>
-          <a:prstGeom prst="rect">
-            <a:avLst/>
-          </a:prstGeom>
-        </p:spPr>
-        <p:txBody>
-          <a:bodyPr vert="horz" lIns="91440" tIns="45720" rIns="91440" bIns="45720" rtlCol="0" anchor="b"/>
-          <a:lstStyle>
-            <a:lvl1pPr algn="r">
-              <a:defRPr sz="1200"/>
-            </a:lvl1pPr>
-          </a:lstStyle>
-          <a:p>
-            <a:fld id="{BB5E49A5-4136-284D-997B-48E1D791AD67}" type="slidenum">
-              <a:rPr lang="en-US" smtClean="0"/>
-              <a:t>‹#›</a:t>
-            </a:fld>
-            <a:endParaRPr lang="en-US"/>
-          </a:p>
-        </p:txBody>
-      </p:sp>
     </p:spTree>
     <p:extLst>
       <p:ext uri="{BB962C8B-B14F-4D97-AF65-F5344CB8AC3E}">
-        <p14:creationId xmlns:p14="http://schemas.microsoft.com/office/powerpoint/2010/main" val="2623252185"/>
+        <p14:creationId xmlns:p14="http://schemas.microsoft.com/office/powerpoint/2010/main" val="1698148193"/>
       </p:ext>
     </p:extLst>
   </p:cSld>
   <p:clrMap bg1="lt1" tx1="dk1" bg2="lt2" tx2="dk2" accent1="accent1" accent2="accent2" accent3="accent3" accent4="accent4" accent5="accent5" accent6="accent6" hlink="hlink" folHlink="folHlink"/>
   <p:notesStyle>
-    <a:lvl1pPr marL="0" algn="l" defTabSz="457200" rtl="0" eaLnBrk="1" latinLnBrk="0" hangingPunct="1">
+    <a:lvl1pPr marL="0" algn="l" defTabSz="914400" rtl="0" eaLnBrk="1" latinLnBrk="0" hangingPunct="1">
       <a:defRPr sz="1200" kern="1200">
         <a:solidFill>
           <a:schemeClr val="tx1"/>
@@ -393,7 +187,7 @@
         <a:cs typeface="+mn-cs"/>
       </a:defRPr>
     </a:lvl1pPr>
-    <a:lvl2pPr marL="457200" algn="l" defTabSz="457200" rtl="0" eaLnBrk="1" latinLnBrk="0" hangingPunct="1">
+    <a:lvl2pPr marL="457200" algn="l" defTabSz="914400" rtl="0" eaLnBrk="1" latinLnBrk="0" hangingPunct="1">
       <a:defRPr sz="1200" kern="1200">
         <a:solidFill>
           <a:schemeClr val="tx1"/>
@@ -403,7 +197,7 @@
         <a:cs typeface="+mn-cs"/>
       </a:defRPr>
     </a:lvl2pPr>
-    <a:lvl3pPr marL="914400" algn="l" defTabSz="457200" rtl="0" eaLnBrk="1" latinLnBrk="0" hangingPunct="1">
+    <a:lvl3pPr marL="914400" algn="l" defTabSz="914400" rtl="0" eaLnBrk="1" latinLnBrk="0" hangingPunct="1">
       <a:defRPr sz="1200" kern="1200">
         <a:solidFill>
           <a:schemeClr val="tx1"/>
@@ -413,7 +207,7 @@
         <a:cs typeface="+mn-cs"/>
       </a:defRPr>
     </a:lvl3pPr>
-    <a:lvl4pPr marL="1371600" algn="l" defTabSz="457200" rtl="0" eaLnBrk="1" latinLnBrk="0" hangingPunct="1">
+    <a:lvl4pPr marL="1371600" algn="l" defTabSz="914400" rtl="0" eaLnBrk="1" latinLnBrk="0" hangingPunct="1">
       <a:defRPr sz="1200" kern="1200">
         <a:solidFill>
           <a:schemeClr val="tx1"/>
@@ -423,7 +217,7 @@
         <a:cs typeface="+mn-cs"/>
       </a:defRPr>
     </a:lvl4pPr>
-    <a:lvl5pPr marL="1828800" algn="l" defTabSz="457200" rtl="0" eaLnBrk="1" latinLnBrk="0" hangingPunct="1">
+    <a:lvl5pPr marL="1828800" algn="l" defTabSz="914400" rtl="0" eaLnBrk="1" latinLnBrk="0" hangingPunct="1">
       <a:defRPr sz="1200" kern="1200">
         <a:solidFill>
           <a:schemeClr val="tx1"/>
@@ -433,7 +227,7 @@
         <a:cs typeface="+mn-cs"/>
       </a:defRPr>
     </a:lvl5pPr>
-    <a:lvl6pPr marL="2286000" algn="l" defTabSz="457200" rtl="0" eaLnBrk="1" latinLnBrk="0" hangingPunct="1">
+    <a:lvl6pPr marL="2286000" algn="l" defTabSz="914400" rtl="0" eaLnBrk="1" latinLnBrk="0" hangingPunct="1">
       <a:defRPr sz="1200" kern="1200">
         <a:solidFill>
           <a:schemeClr val="tx1"/>
@@ -443,7 +237,7 @@
         <a:cs typeface="+mn-cs"/>
       </a:defRPr>
     </a:lvl6pPr>
-    <a:lvl7pPr marL="2743200" algn="l" defTabSz="457200" rtl="0" eaLnBrk="1" latinLnBrk="0" hangingPunct="1">
+    <a:lvl7pPr marL="2743200" algn="l" defTabSz="914400" rtl="0" eaLnBrk="1" latinLnBrk="0" hangingPunct="1">
       <a:defRPr sz="1200" kern="1200">
         <a:solidFill>
           <a:schemeClr val="tx1"/>
@@ -453,7 +247,7 @@
         <a:cs typeface="+mn-cs"/>
       </a:defRPr>
     </a:lvl7pPr>
-    <a:lvl8pPr marL="3200400" algn="l" defTabSz="457200" rtl="0" eaLnBrk="1" latinLnBrk="0" hangingPunct="1">
+    <a:lvl8pPr marL="3200400" algn="l" defTabSz="914400" rtl="0" eaLnBrk="1" latinLnBrk="0" hangingPunct="1">
       <a:defRPr sz="1200" kern="1200">
         <a:solidFill>
           <a:schemeClr val="tx1"/>
@@ -463,7 +257,7 @@
         <a:cs typeface="+mn-cs"/>
       </a:defRPr>
     </a:lvl8pPr>
-    <a:lvl9pPr marL="3657600" algn="l" defTabSz="457200" rtl="0" eaLnBrk="1" latinLnBrk="0" hangingPunct="1">
+    <a:lvl9pPr marL="3657600" algn="l" defTabSz="914400" rtl="0" eaLnBrk="1" latinLnBrk="0" hangingPunct="1">
       <a:defRPr sz="1200" kern="1200">
         <a:solidFill>
           <a:schemeClr val="tx1"/>
@@ -478,7 +272,7 @@
 </file>
 
 <file path=ppt/notesSlides/notesSlide1.xml><?xml version="1.0" encoding="utf-8"?>
-<p:notes xmlns:a="http://schemas.openxmlformats.org/drawingml/2006/main" xmlns:p="http://schemas.openxmlformats.org/presentationml/2006/main" xmlns:r="http://schemas.openxmlformats.org/officeDocument/2006/relationships">
+<p:notes xmlns:a="http://schemas.openxmlformats.org/drawingml/2006/main" xmlns:r="http://schemas.openxmlformats.org/officeDocument/2006/relationships" xmlns:p="http://schemas.openxmlformats.org/presentationml/2006/main">
   <p:cSld>
     <p:spTree>
       <p:nvGrpSpPr>
@@ -498,7 +292,7 @@
         <p:nvSpPr>
           <p:cNvPr id="2" name="Slide Image Placeholder 1"/>
           <p:cNvSpPr>
-            <a:spLocks noGrp="1"/>
+            <a:spLocks noGrp="1" noRot="1" noChangeAspect="1"/>
           </p:cNvSpPr>
           <p:nvPr>
             <p:ph type="sldImg" idx="2"/>
@@ -513,7 +307,7 @@
             <a:spLocks noGrp="1"/>
           </p:cNvSpPr>
           <p:nvPr>
-            <p:ph type="body" idx="3" sz="quarter"/>
+            <p:ph type="body" sz="quarter" idx="3"/>
           </p:nvPr>
         </p:nvSpPr>
         <p:spPr/>
@@ -534,7 +328,7 @@
             <a:spLocks noGrp="1"/>
           </p:cNvSpPr>
           <p:nvPr>
-            <p:ph type="sldNum" idx="5" sz="quarter"/>
+            <p:ph type="sldNum" sz="quarter" idx="5"/>
           </p:nvPr>
         </p:nvSpPr>
         <p:spPr/>
@@ -548,7 +342,7 @@
 </file>
 
 <file path=ppt/notesSlides/notesSlide10.xml><?xml version="1.0" encoding="utf-8"?>
-<p:notes xmlns:a="http://schemas.openxmlformats.org/drawingml/2006/main" xmlns:p="http://schemas.openxmlformats.org/presentationml/2006/main" xmlns:r="http://schemas.openxmlformats.org/officeDocument/2006/relationships">
+<p:notes xmlns:a="http://schemas.openxmlformats.org/drawingml/2006/main" xmlns:r="http://schemas.openxmlformats.org/officeDocument/2006/relationships" xmlns:p="http://schemas.openxmlformats.org/presentationml/2006/main">
   <p:cSld>
     <p:spTree>
       <p:nvGrpSpPr>
@@ -568,7 +362,7 @@
         <p:nvSpPr>
           <p:cNvPr id="2" name="Slide Image Placeholder 1"/>
           <p:cNvSpPr>
-            <a:spLocks noGrp="1"/>
+            <a:spLocks noGrp="1" noRot="1" noChangeAspect="1"/>
           </p:cNvSpPr>
           <p:nvPr>
             <p:ph type="sldImg" idx="2"/>
@@ -583,7 +377,7 @@
             <a:spLocks noGrp="1"/>
           </p:cNvSpPr>
           <p:nvPr>
-            <p:ph type="body" idx="3" sz="quarter"/>
+            <p:ph type="body" sz="quarter" idx="3"/>
           </p:nvPr>
         </p:nvSpPr>
         <p:spPr/>
@@ -604,7 +398,7 @@
             <a:spLocks noGrp="1"/>
           </p:cNvSpPr>
           <p:nvPr>
-            <p:ph type="sldNum" idx="5" sz="quarter"/>
+            <p:ph type="sldNum" sz="quarter" idx="5"/>
           </p:nvPr>
         </p:nvSpPr>
         <p:spPr/>
@@ -618,7 +412,7 @@
 </file>
 
 <file path=ppt/notesSlides/notesSlide11.xml><?xml version="1.0" encoding="utf-8"?>
-<p:notes xmlns:a="http://schemas.openxmlformats.org/drawingml/2006/main" xmlns:p="http://schemas.openxmlformats.org/presentationml/2006/main" xmlns:r="http://schemas.openxmlformats.org/officeDocument/2006/relationships">
+<p:notes xmlns:a="http://schemas.openxmlformats.org/drawingml/2006/main" xmlns:r="http://schemas.openxmlformats.org/officeDocument/2006/relationships" xmlns:p="http://schemas.openxmlformats.org/presentationml/2006/main">
   <p:cSld>
     <p:spTree>
       <p:nvGrpSpPr>
@@ -638,7 +432,7 @@
         <p:nvSpPr>
           <p:cNvPr id="2" name="Slide Image Placeholder 1"/>
           <p:cNvSpPr>
-            <a:spLocks noGrp="1"/>
+            <a:spLocks noGrp="1" noRot="1" noChangeAspect="1"/>
           </p:cNvSpPr>
           <p:nvPr>
             <p:ph type="sldImg" idx="2"/>
@@ -653,7 +447,7 @@
             <a:spLocks noGrp="1"/>
           </p:cNvSpPr>
           <p:nvPr>
-            <p:ph type="body" idx="3" sz="quarter"/>
+            <p:ph type="body" sz="quarter" idx="3"/>
           </p:nvPr>
         </p:nvSpPr>
         <p:spPr/>
@@ -674,7 +468,7 @@
             <a:spLocks noGrp="1"/>
           </p:cNvSpPr>
           <p:nvPr>
-            <p:ph type="sldNum" idx="5" sz="quarter"/>
+            <p:ph type="sldNum" sz="quarter" idx="5"/>
           </p:nvPr>
         </p:nvSpPr>
         <p:spPr/>
@@ -688,7 +482,7 @@
 </file>
 
 <file path=ppt/notesSlides/notesSlide12.xml><?xml version="1.0" encoding="utf-8"?>
-<p:notes xmlns:a="http://schemas.openxmlformats.org/drawingml/2006/main" xmlns:p="http://schemas.openxmlformats.org/presentationml/2006/main" xmlns:r="http://schemas.openxmlformats.org/officeDocument/2006/relationships">
+<p:notes xmlns:a="http://schemas.openxmlformats.org/drawingml/2006/main" xmlns:r="http://schemas.openxmlformats.org/officeDocument/2006/relationships" xmlns:p="http://schemas.openxmlformats.org/presentationml/2006/main">
   <p:cSld>
     <p:spTree>
       <p:nvGrpSpPr>
@@ -708,7 +502,7 @@
         <p:nvSpPr>
           <p:cNvPr id="2" name="Slide Image Placeholder 1"/>
           <p:cNvSpPr>
-            <a:spLocks noGrp="1"/>
+            <a:spLocks noGrp="1" noRot="1" noChangeAspect="1"/>
           </p:cNvSpPr>
           <p:nvPr>
             <p:ph type="sldImg" idx="2"/>
@@ -723,7 +517,7 @@
             <a:spLocks noGrp="1"/>
           </p:cNvSpPr>
           <p:nvPr>
-            <p:ph type="body" idx="3" sz="quarter"/>
+            <p:ph type="body" sz="quarter" idx="3"/>
           </p:nvPr>
         </p:nvSpPr>
         <p:spPr/>
@@ -744,7 +538,7 @@
             <a:spLocks noGrp="1"/>
           </p:cNvSpPr>
           <p:nvPr>
-            <p:ph type="sldNum" idx="5" sz="quarter"/>
+            <p:ph type="sldNum" sz="quarter" idx="5"/>
           </p:nvPr>
         </p:nvSpPr>
         <p:spPr/>
@@ -758,7 +552,7 @@
 </file>
 
 <file path=ppt/notesSlides/notesSlide13.xml><?xml version="1.0" encoding="utf-8"?>
-<p:notes xmlns:a="http://schemas.openxmlformats.org/drawingml/2006/main" xmlns:p="http://schemas.openxmlformats.org/presentationml/2006/main" xmlns:r="http://schemas.openxmlformats.org/officeDocument/2006/relationships">
+<p:notes xmlns:a="http://schemas.openxmlformats.org/drawingml/2006/main" xmlns:r="http://schemas.openxmlformats.org/officeDocument/2006/relationships" xmlns:p="http://schemas.openxmlformats.org/presentationml/2006/main">
   <p:cSld>
     <p:spTree>
       <p:nvGrpSpPr>
@@ -778,7 +572,7 @@
         <p:nvSpPr>
           <p:cNvPr id="2" name="Slide Image Placeholder 1"/>
           <p:cNvSpPr>
-            <a:spLocks noGrp="1"/>
+            <a:spLocks noGrp="1" noRot="1" noChangeAspect="1"/>
           </p:cNvSpPr>
           <p:nvPr>
             <p:ph type="sldImg" idx="2"/>
@@ -793,7 +587,7 @@
             <a:spLocks noGrp="1"/>
           </p:cNvSpPr>
           <p:nvPr>
-            <p:ph type="body" idx="3" sz="quarter"/>
+            <p:ph type="body" sz="quarter" idx="3"/>
           </p:nvPr>
         </p:nvSpPr>
         <p:spPr/>
@@ -814,7 +608,7 @@
             <a:spLocks noGrp="1"/>
           </p:cNvSpPr>
           <p:nvPr>
-            <p:ph type="sldNum" idx="5" sz="quarter"/>
+            <p:ph type="sldNum" sz="quarter" idx="5"/>
           </p:nvPr>
         </p:nvSpPr>
         <p:spPr/>
@@ -828,7 +622,7 @@
 </file>
 
 <file path=ppt/notesSlides/notesSlide14.xml><?xml version="1.0" encoding="utf-8"?>
-<p:notes xmlns:a="http://schemas.openxmlformats.org/drawingml/2006/main" xmlns:p="http://schemas.openxmlformats.org/presentationml/2006/main" xmlns:r="http://schemas.openxmlformats.org/officeDocument/2006/relationships">
+<p:notes xmlns:a="http://schemas.openxmlformats.org/drawingml/2006/main" xmlns:r="http://schemas.openxmlformats.org/officeDocument/2006/relationships" xmlns:p="http://schemas.openxmlformats.org/presentationml/2006/main">
   <p:cSld>
     <p:spTree>
       <p:nvGrpSpPr>
@@ -848,7 +642,7 @@
         <p:nvSpPr>
           <p:cNvPr id="2" name="Slide Image Placeholder 1"/>
           <p:cNvSpPr>
-            <a:spLocks noGrp="1"/>
+            <a:spLocks noGrp="1" noRot="1" noChangeAspect="1"/>
           </p:cNvSpPr>
           <p:nvPr>
             <p:ph type="sldImg" idx="2"/>
@@ -863,7 +657,7 @@
             <a:spLocks noGrp="1"/>
           </p:cNvSpPr>
           <p:nvPr>
-            <p:ph type="body" idx="3" sz="quarter"/>
+            <p:ph type="body" sz="quarter" idx="3"/>
           </p:nvPr>
         </p:nvSpPr>
         <p:spPr/>
@@ -884,7 +678,7 @@
             <a:spLocks noGrp="1"/>
           </p:cNvSpPr>
           <p:nvPr>
-            <p:ph type="sldNum" idx="5" sz="quarter"/>
+            <p:ph type="sldNum" sz="quarter" idx="5"/>
           </p:nvPr>
         </p:nvSpPr>
         <p:spPr/>
@@ -898,7 +692,7 @@
 </file>
 
 <file path=ppt/notesSlides/notesSlide15.xml><?xml version="1.0" encoding="utf-8"?>
-<p:notes xmlns:a="http://schemas.openxmlformats.org/drawingml/2006/main" xmlns:p="http://schemas.openxmlformats.org/presentationml/2006/main" xmlns:r="http://schemas.openxmlformats.org/officeDocument/2006/relationships">
+<p:notes xmlns:a="http://schemas.openxmlformats.org/drawingml/2006/main" xmlns:r="http://schemas.openxmlformats.org/officeDocument/2006/relationships" xmlns:p="http://schemas.openxmlformats.org/presentationml/2006/main">
   <p:cSld>
     <p:spTree>
       <p:nvGrpSpPr>
@@ -918,7 +712,7 @@
         <p:nvSpPr>
           <p:cNvPr id="2" name="Slide Image Placeholder 1"/>
           <p:cNvSpPr>
-            <a:spLocks noGrp="1"/>
+            <a:spLocks noGrp="1" noRot="1" noChangeAspect="1"/>
           </p:cNvSpPr>
           <p:nvPr>
             <p:ph type="sldImg" idx="2"/>
@@ -933,7 +727,7 @@
             <a:spLocks noGrp="1"/>
           </p:cNvSpPr>
           <p:nvPr>
-            <p:ph type="body" idx="3" sz="quarter"/>
+            <p:ph type="body" sz="quarter" idx="3"/>
           </p:nvPr>
         </p:nvSpPr>
         <p:spPr/>
@@ -954,7 +748,7 @@
             <a:spLocks noGrp="1"/>
           </p:cNvSpPr>
           <p:nvPr>
-            <p:ph type="sldNum" idx="5" sz="quarter"/>
+            <p:ph type="sldNum" sz="quarter" idx="5"/>
           </p:nvPr>
         </p:nvSpPr>
         <p:spPr/>
@@ -968,7 +762,7 @@
 </file>
 
 <file path=ppt/notesSlides/notesSlide16.xml><?xml version="1.0" encoding="utf-8"?>
-<p:notes xmlns:a="http://schemas.openxmlformats.org/drawingml/2006/main" xmlns:p="http://schemas.openxmlformats.org/presentationml/2006/main" xmlns:r="http://schemas.openxmlformats.org/officeDocument/2006/relationships">
+<p:notes xmlns:a="http://schemas.openxmlformats.org/drawingml/2006/main" xmlns:r="http://schemas.openxmlformats.org/officeDocument/2006/relationships" xmlns:p="http://schemas.openxmlformats.org/presentationml/2006/main">
   <p:cSld>
     <p:spTree>
       <p:nvGrpSpPr>
@@ -988,7 +782,7 @@
         <p:nvSpPr>
           <p:cNvPr id="2" name="Slide Image Placeholder 1"/>
           <p:cNvSpPr>
-            <a:spLocks noGrp="1"/>
+            <a:spLocks noGrp="1" noRot="1" noChangeAspect="1"/>
           </p:cNvSpPr>
           <p:nvPr>
             <p:ph type="sldImg" idx="2"/>
@@ -1003,7 +797,7 @@
             <a:spLocks noGrp="1"/>
           </p:cNvSpPr>
           <p:nvPr>
-            <p:ph type="body" idx="3" sz="quarter"/>
+            <p:ph type="body" sz="quarter" idx="3"/>
           </p:nvPr>
         </p:nvSpPr>
         <p:spPr/>
@@ -1024,7 +818,7 @@
             <a:spLocks noGrp="1"/>
           </p:cNvSpPr>
           <p:nvPr>
-            <p:ph type="sldNum" idx="5" sz="quarter"/>
+            <p:ph type="sldNum" sz="quarter" idx="5"/>
           </p:nvPr>
         </p:nvSpPr>
         <p:spPr/>
@@ -1038,7 +832,7 @@
 </file>
 
 <file path=ppt/notesSlides/notesSlide17.xml><?xml version="1.0" encoding="utf-8"?>
-<p:notes xmlns:a="http://schemas.openxmlformats.org/drawingml/2006/main" xmlns:p="http://schemas.openxmlformats.org/presentationml/2006/main" xmlns:r="http://schemas.openxmlformats.org/officeDocument/2006/relationships">
+<p:notes xmlns:a="http://schemas.openxmlformats.org/drawingml/2006/main" xmlns:r="http://schemas.openxmlformats.org/officeDocument/2006/relationships" xmlns:p="http://schemas.openxmlformats.org/presentationml/2006/main">
   <p:cSld>
     <p:spTree>
       <p:nvGrpSpPr>
@@ -1058,7 +852,7 @@
         <p:nvSpPr>
           <p:cNvPr id="2" name="Slide Image Placeholder 1"/>
           <p:cNvSpPr>
-            <a:spLocks noGrp="1"/>
+            <a:spLocks noGrp="1" noRot="1" noChangeAspect="1"/>
           </p:cNvSpPr>
           <p:nvPr>
             <p:ph type="sldImg" idx="2"/>
@@ -1073,7 +867,7 @@
             <a:spLocks noGrp="1"/>
           </p:cNvSpPr>
           <p:nvPr>
-            <p:ph type="body" idx="3" sz="quarter"/>
+            <p:ph type="body" sz="quarter" idx="3"/>
           </p:nvPr>
         </p:nvSpPr>
         <p:spPr/>
@@ -1094,7 +888,7 @@
             <a:spLocks noGrp="1"/>
           </p:cNvSpPr>
           <p:nvPr>
-            <p:ph type="sldNum" idx="5" sz="quarter"/>
+            <p:ph type="sldNum" sz="quarter" idx="5"/>
           </p:nvPr>
         </p:nvSpPr>
         <p:spPr/>
@@ -1108,7 +902,7 @@
 </file>
 
 <file path=ppt/notesSlides/notesSlide18.xml><?xml version="1.0" encoding="utf-8"?>
-<p:notes xmlns:a="http://schemas.openxmlformats.org/drawingml/2006/main" xmlns:p="http://schemas.openxmlformats.org/presentationml/2006/main" xmlns:r="http://schemas.openxmlformats.org/officeDocument/2006/relationships">
+<p:notes xmlns:a="http://schemas.openxmlformats.org/drawingml/2006/main" xmlns:r="http://schemas.openxmlformats.org/officeDocument/2006/relationships" xmlns:p="http://schemas.openxmlformats.org/presentationml/2006/main">
   <p:cSld>
     <p:spTree>
       <p:nvGrpSpPr>
@@ -1128,7 +922,7 @@
         <p:nvSpPr>
           <p:cNvPr id="2" name="Slide Image Placeholder 1"/>
           <p:cNvSpPr>
-            <a:spLocks noGrp="1"/>
+            <a:spLocks noGrp="1" noRot="1" noChangeAspect="1"/>
           </p:cNvSpPr>
           <p:nvPr>
             <p:ph type="sldImg" idx="2"/>
@@ -1143,7 +937,7 @@
             <a:spLocks noGrp="1"/>
           </p:cNvSpPr>
           <p:nvPr>
-            <p:ph type="body" idx="3" sz="quarter"/>
+            <p:ph type="body" sz="quarter" idx="3"/>
           </p:nvPr>
         </p:nvSpPr>
         <p:spPr/>
@@ -1164,7 +958,7 @@
             <a:spLocks noGrp="1"/>
           </p:cNvSpPr>
           <p:nvPr>
-            <p:ph type="sldNum" idx="5" sz="quarter"/>
+            <p:ph type="sldNum" sz="quarter" idx="5"/>
           </p:nvPr>
         </p:nvSpPr>
         <p:spPr/>
@@ -1178,7 +972,7 @@
 </file>
 
 <file path=ppt/notesSlides/notesSlide2.xml><?xml version="1.0" encoding="utf-8"?>
-<p:notes xmlns:a="http://schemas.openxmlformats.org/drawingml/2006/main" xmlns:p="http://schemas.openxmlformats.org/presentationml/2006/main" xmlns:r="http://schemas.openxmlformats.org/officeDocument/2006/relationships">
+<p:notes xmlns:a="http://schemas.openxmlformats.org/drawingml/2006/main" xmlns:r="http://schemas.openxmlformats.org/officeDocument/2006/relationships" xmlns:p="http://schemas.openxmlformats.org/presentationml/2006/main">
   <p:cSld>
     <p:spTree>
       <p:nvGrpSpPr>
@@ -1198,7 +992,7 @@
         <p:nvSpPr>
           <p:cNvPr id="2" name="Slide Image Placeholder 1"/>
           <p:cNvSpPr>
-            <a:spLocks noGrp="1"/>
+            <a:spLocks noGrp="1" noRot="1" noChangeAspect="1"/>
           </p:cNvSpPr>
           <p:nvPr>
             <p:ph type="sldImg" idx="2"/>
@@ -1213,7 +1007,7 @@
             <a:spLocks noGrp="1"/>
           </p:cNvSpPr>
           <p:nvPr>
-            <p:ph type="body" idx="3" sz="quarter"/>
+            <p:ph type="body" sz="quarter" idx="3"/>
           </p:nvPr>
         </p:nvSpPr>
         <p:spPr/>
@@ -1234,7 +1028,7 @@
             <a:spLocks noGrp="1"/>
           </p:cNvSpPr>
           <p:nvPr>
-            <p:ph type="sldNum" idx="5" sz="quarter"/>
+            <p:ph type="sldNum" sz="quarter" idx="5"/>
           </p:nvPr>
         </p:nvSpPr>
         <p:spPr/>
@@ -1248,7 +1042,7 @@
 </file>
 
 <file path=ppt/notesSlides/notesSlide3.xml><?xml version="1.0" encoding="utf-8"?>
-<p:notes xmlns:a="http://schemas.openxmlformats.org/drawingml/2006/main" xmlns:p="http://schemas.openxmlformats.org/presentationml/2006/main" xmlns:r="http://schemas.openxmlformats.org/officeDocument/2006/relationships">
+<p:notes xmlns:a="http://schemas.openxmlformats.org/drawingml/2006/main" xmlns:r="http://schemas.openxmlformats.org/officeDocument/2006/relationships" xmlns:p="http://schemas.openxmlformats.org/presentationml/2006/main">
   <p:cSld>
     <p:spTree>
       <p:nvGrpSpPr>
@@ -1268,7 +1062,7 @@
         <p:nvSpPr>
           <p:cNvPr id="2" name="Slide Image Placeholder 1"/>
           <p:cNvSpPr>
-            <a:spLocks noGrp="1"/>
+            <a:spLocks noGrp="1" noRot="1" noChangeAspect="1"/>
           </p:cNvSpPr>
           <p:nvPr>
             <p:ph type="sldImg" idx="2"/>
@@ -1283,7 +1077,7 @@
             <a:spLocks noGrp="1"/>
           </p:cNvSpPr>
           <p:nvPr>
-            <p:ph type="body" idx="3" sz="quarter"/>
+            <p:ph type="body" sz="quarter" idx="3"/>
           </p:nvPr>
         </p:nvSpPr>
         <p:spPr/>
@@ -1304,7 +1098,7 @@
             <a:spLocks noGrp="1"/>
           </p:cNvSpPr>
           <p:nvPr>
-            <p:ph type="sldNum" idx="5" sz="quarter"/>
+            <p:ph type="sldNum" sz="quarter" idx="5"/>
           </p:nvPr>
         </p:nvSpPr>
         <p:spPr/>
@@ -1318,7 +1112,7 @@
 </file>
 
 <file path=ppt/notesSlides/notesSlide4.xml><?xml version="1.0" encoding="utf-8"?>
-<p:notes xmlns:a="http://schemas.openxmlformats.org/drawingml/2006/main" xmlns:p="http://schemas.openxmlformats.org/presentationml/2006/main" xmlns:r="http://schemas.openxmlformats.org/officeDocument/2006/relationships">
+<p:notes xmlns:a="http://schemas.openxmlformats.org/drawingml/2006/main" xmlns:r="http://schemas.openxmlformats.org/officeDocument/2006/relationships" xmlns:p="http://schemas.openxmlformats.org/presentationml/2006/main">
   <p:cSld>
     <p:spTree>
       <p:nvGrpSpPr>
@@ -1338,7 +1132,7 @@
         <p:nvSpPr>
           <p:cNvPr id="2" name="Slide Image Placeholder 1"/>
           <p:cNvSpPr>
-            <a:spLocks noGrp="1"/>
+            <a:spLocks noGrp="1" noRot="1" noChangeAspect="1"/>
           </p:cNvSpPr>
           <p:nvPr>
             <p:ph type="sldImg" idx="2"/>
@@ -1353,7 +1147,7 @@
             <a:spLocks noGrp="1"/>
           </p:cNvSpPr>
           <p:nvPr>
-            <p:ph type="body" idx="3" sz="quarter"/>
+            <p:ph type="body" sz="quarter" idx="3"/>
           </p:nvPr>
         </p:nvSpPr>
         <p:spPr/>
@@ -1374,7 +1168,7 @@
             <a:spLocks noGrp="1"/>
           </p:cNvSpPr>
           <p:nvPr>
-            <p:ph type="sldNum" idx="5" sz="quarter"/>
+            <p:ph type="sldNum" sz="quarter" idx="5"/>
           </p:nvPr>
         </p:nvSpPr>
         <p:spPr/>
@@ -1388,7 +1182,7 @@
 </file>
 
 <file path=ppt/notesSlides/notesSlide5.xml><?xml version="1.0" encoding="utf-8"?>
-<p:notes xmlns:a="http://schemas.openxmlformats.org/drawingml/2006/main" xmlns:p="http://schemas.openxmlformats.org/presentationml/2006/main" xmlns:r="http://schemas.openxmlformats.org/officeDocument/2006/relationships">
+<p:notes xmlns:a="http://schemas.openxmlformats.org/drawingml/2006/main" xmlns:r="http://schemas.openxmlformats.org/officeDocument/2006/relationships" xmlns:p="http://schemas.openxmlformats.org/presentationml/2006/main">
   <p:cSld>
     <p:spTree>
       <p:nvGrpSpPr>
@@ -1408,7 +1202,7 @@
         <p:nvSpPr>
           <p:cNvPr id="2" name="Slide Image Placeholder 1"/>
           <p:cNvSpPr>
-            <a:spLocks noGrp="1"/>
+            <a:spLocks noGrp="1" noRot="1" noChangeAspect="1"/>
           </p:cNvSpPr>
           <p:nvPr>
             <p:ph type="sldImg" idx="2"/>
@@ -1423,7 +1217,7 @@
             <a:spLocks noGrp="1"/>
           </p:cNvSpPr>
           <p:nvPr>
-            <p:ph type="body" idx="3" sz="quarter"/>
+            <p:ph type="body" sz="quarter" idx="3"/>
           </p:nvPr>
         </p:nvSpPr>
         <p:spPr/>
@@ -1444,7 +1238,7 @@
             <a:spLocks noGrp="1"/>
           </p:cNvSpPr>
           <p:nvPr>
-            <p:ph type="sldNum" idx="5" sz="quarter"/>
+            <p:ph type="sldNum" sz="quarter" idx="5"/>
           </p:nvPr>
         </p:nvSpPr>
         <p:spPr/>
@@ -1458,7 +1252,7 @@
 </file>
 
 <file path=ppt/notesSlides/notesSlide6.xml><?xml version="1.0" encoding="utf-8"?>
-<p:notes xmlns:a="http://schemas.openxmlformats.org/drawingml/2006/main" xmlns:p="http://schemas.openxmlformats.org/presentationml/2006/main" xmlns:r="http://schemas.openxmlformats.org/officeDocument/2006/relationships">
+<p:notes xmlns:a="http://schemas.openxmlformats.org/drawingml/2006/main" xmlns:r="http://schemas.openxmlformats.org/officeDocument/2006/relationships" xmlns:p="http://schemas.openxmlformats.org/presentationml/2006/main">
   <p:cSld>
     <p:spTree>
       <p:nvGrpSpPr>
@@ -1478,7 +1272,7 @@
         <p:nvSpPr>
           <p:cNvPr id="2" name="Slide Image Placeholder 1"/>
           <p:cNvSpPr>
-            <a:spLocks noGrp="1"/>
+            <a:spLocks noGrp="1" noRot="1" noChangeAspect="1"/>
           </p:cNvSpPr>
           <p:nvPr>
             <p:ph type="sldImg" idx="2"/>
@@ -1493,7 +1287,7 @@
             <a:spLocks noGrp="1"/>
           </p:cNvSpPr>
           <p:nvPr>
-            <p:ph type="body" idx="3" sz="quarter"/>
+            <p:ph type="body" sz="quarter" idx="3"/>
           </p:nvPr>
         </p:nvSpPr>
         <p:spPr/>
@@ -1514,7 +1308,7 @@
             <a:spLocks noGrp="1"/>
           </p:cNvSpPr>
           <p:nvPr>
-            <p:ph type="sldNum" idx="5" sz="quarter"/>
+            <p:ph type="sldNum" sz="quarter" idx="5"/>
           </p:nvPr>
         </p:nvSpPr>
         <p:spPr/>
@@ -1528,7 +1322,7 @@
 </file>
 
 <file path=ppt/notesSlides/notesSlide7.xml><?xml version="1.0" encoding="utf-8"?>
-<p:notes xmlns:a="http://schemas.openxmlformats.org/drawingml/2006/main" xmlns:p="http://schemas.openxmlformats.org/presentationml/2006/main" xmlns:r="http://schemas.openxmlformats.org/officeDocument/2006/relationships">
+<p:notes xmlns:a="http://schemas.openxmlformats.org/drawingml/2006/main" xmlns:r="http://schemas.openxmlformats.org/officeDocument/2006/relationships" xmlns:p="http://schemas.openxmlformats.org/presentationml/2006/main">
   <p:cSld>
     <p:spTree>
       <p:nvGrpSpPr>
@@ -1548,7 +1342,7 @@
         <p:nvSpPr>
           <p:cNvPr id="2" name="Slide Image Placeholder 1"/>
           <p:cNvSpPr>
-            <a:spLocks noGrp="1"/>
+            <a:spLocks noGrp="1" noRot="1" noChangeAspect="1"/>
           </p:cNvSpPr>
           <p:nvPr>
             <p:ph type="sldImg" idx="2"/>
@@ -1563,7 +1357,7 @@
             <a:spLocks noGrp="1"/>
           </p:cNvSpPr>
           <p:nvPr>
-            <p:ph type="body" idx="3" sz="quarter"/>
+            <p:ph type="body" sz="quarter" idx="3"/>
           </p:nvPr>
         </p:nvSpPr>
         <p:spPr/>
@@ -1584,7 +1378,7 @@
             <a:spLocks noGrp="1"/>
           </p:cNvSpPr>
           <p:nvPr>
-            <p:ph type="sldNum" idx="5" sz="quarter"/>
+            <p:ph type="sldNum" sz="quarter" idx="5"/>
           </p:nvPr>
         </p:nvSpPr>
         <p:spPr/>
@@ -1598,7 +1392,7 @@
 </file>
 
 <file path=ppt/notesSlides/notesSlide8.xml><?xml version="1.0" encoding="utf-8"?>
-<p:notes xmlns:a="http://schemas.openxmlformats.org/drawingml/2006/main" xmlns:p="http://schemas.openxmlformats.org/presentationml/2006/main" xmlns:r="http://schemas.openxmlformats.org/officeDocument/2006/relationships">
+<p:notes xmlns:a="http://schemas.openxmlformats.org/drawingml/2006/main" xmlns:r="http://schemas.openxmlformats.org/officeDocument/2006/relationships" xmlns:p="http://schemas.openxmlformats.org/presentationml/2006/main">
   <p:cSld>
     <p:spTree>
       <p:nvGrpSpPr>
@@ -1618,7 +1412,7 @@
         <p:nvSpPr>
           <p:cNvPr id="2" name="Slide Image Placeholder 1"/>
           <p:cNvSpPr>
-            <a:spLocks noGrp="1"/>
+            <a:spLocks noGrp="1" noRot="1" noChangeAspect="1"/>
           </p:cNvSpPr>
           <p:nvPr>
             <p:ph type="sldImg" idx="2"/>
@@ -1633,7 +1427,7 @@
             <a:spLocks noGrp="1"/>
           </p:cNvSpPr>
           <p:nvPr>
-            <p:ph type="body" idx="3" sz="quarter"/>
+            <p:ph type="body" sz="quarter" idx="3"/>
           </p:nvPr>
         </p:nvSpPr>
         <p:spPr/>
@@ -1654,7 +1448,7 @@
             <a:spLocks noGrp="1"/>
           </p:cNvSpPr>
           <p:nvPr>
-            <p:ph type="sldNum" idx="5" sz="quarter"/>
+            <p:ph type="sldNum" sz="quarter" idx="5"/>
           </p:nvPr>
         </p:nvSpPr>
         <p:spPr/>
@@ -1668,7 +1462,7 @@
 </file>
 
 <file path=ppt/notesSlides/notesSlide9.xml><?xml version="1.0" encoding="utf-8"?>
-<p:notes xmlns:a="http://schemas.openxmlformats.org/drawingml/2006/main" xmlns:p="http://schemas.openxmlformats.org/presentationml/2006/main" xmlns:r="http://schemas.openxmlformats.org/officeDocument/2006/relationships">
+<p:notes xmlns:a="http://schemas.openxmlformats.org/drawingml/2006/main" xmlns:r="http://schemas.openxmlformats.org/officeDocument/2006/relationships" xmlns:p="http://schemas.openxmlformats.org/presentationml/2006/main">
   <p:cSld>
     <p:spTree>
       <p:nvGrpSpPr>
@@ -1688,7 +1482,7 @@
         <p:nvSpPr>
           <p:cNvPr id="2" name="Slide Image Placeholder 1"/>
           <p:cNvSpPr>
-            <a:spLocks noGrp="1"/>
+            <a:spLocks noGrp="1" noRot="1" noChangeAspect="1"/>
           </p:cNvSpPr>
           <p:nvPr>
             <p:ph type="sldImg" idx="2"/>
@@ -1703,7 +1497,7 @@
             <a:spLocks noGrp="1"/>
           </p:cNvSpPr>
           <p:nvPr>
-            <p:ph type="body" idx="3" sz="quarter"/>
+            <p:ph type="body" sz="quarter" idx="3"/>
           </p:nvPr>
         </p:nvSpPr>
         <p:spPr/>
@@ -1724,7 +1518,7 @@
             <a:spLocks noGrp="1"/>
           </p:cNvSpPr>
           <p:nvPr>
-            <p:ph type="sldNum" idx="5" sz="quarter"/>
+            <p:ph type="sldNum" sz="quarter" idx="5"/>
           </p:nvPr>
         </p:nvSpPr>
         <p:spPr/>
@@ -1775,10 +1569,9 @@
           <a:lstStyle/>
           <a:p>
             <a:r>
-              <a:rPr lang="en-US" smtClean="0"/>
+              <a:rPr lang="en-US"/>
               <a:t>Click to edit Master title style</a:t>
             </a:r>
-            <a:endParaRPr lang="en-US"/>
           </a:p>
         </p:txBody>
       </p:sp>
@@ -1894,10 +1687,9 @@
           </a:lstStyle>
           <a:p>
             <a:r>
-              <a:rPr lang="en-US" smtClean="0"/>
+              <a:rPr lang="en-US"/>
               <a:t>Click to edit Master subtitle style</a:t>
             </a:r>
-            <a:endParaRPr lang="en-US"/>
           </a:p>
         </p:txBody>
       </p:sp>
@@ -1918,7 +1710,7 @@
           <a:p>
             <a:fld id="{5BCAD085-E8A6-8845-BD4E-CB4CCA059FC4}" type="datetimeFigureOut">
               <a:rPr lang="en-US" smtClean="0"/>
-              <a:t>1/27/13</a:t>
+              <a:t>9/11/2026</a:t>
             </a:fld>
             <a:endParaRPr lang="en-US"/>
           </a:p>
@@ -1960,7 +1752,7 @@
           <a:p>
             <a:fld id="{C1FF6DA9-008F-8B48-92A6-B652298478BF}" type="slidenum">
               <a:rPr lang="en-US" smtClean="0"/>
-              <a:t>‹#›</a:t>
+              <a:t>‹Nº›</a:t>
             </a:fld>
             <a:endParaRPr lang="en-US"/>
           </a:p>
@@ -2012,10 +1804,9 @@
           <a:lstStyle/>
           <a:p>
             <a:r>
-              <a:rPr lang="en-US" smtClean="0"/>
+              <a:rPr lang="en-US"/>
               <a:t>Click to edit Master title style</a:t>
             </a:r>
-            <a:endParaRPr lang="en-US"/>
           </a:p>
         </p:txBody>
       </p:sp>
@@ -2036,38 +1827,37 @@
           <a:p>
             <a:pPr lvl="0"/>
             <a:r>
-              <a:rPr lang="en-US" smtClean="0"/>
+              <a:rPr lang="en-US"/>
               <a:t>Click to edit Master text styles</a:t>
             </a:r>
           </a:p>
           <a:p>
             <a:pPr lvl="1"/>
             <a:r>
-              <a:rPr lang="en-US" smtClean="0"/>
+              <a:rPr lang="en-US"/>
               <a:t>Second level</a:t>
             </a:r>
           </a:p>
           <a:p>
             <a:pPr lvl="2"/>
             <a:r>
-              <a:rPr lang="en-US" smtClean="0"/>
+              <a:rPr lang="en-US"/>
               <a:t>Third level</a:t>
             </a:r>
           </a:p>
           <a:p>
             <a:pPr lvl="3"/>
             <a:r>
-              <a:rPr lang="en-US" smtClean="0"/>
+              <a:rPr lang="en-US"/>
               <a:t>Fourth level</a:t>
             </a:r>
           </a:p>
           <a:p>
             <a:pPr lvl="4"/>
             <a:r>
-              <a:rPr lang="en-US" smtClean="0"/>
+              <a:rPr lang="en-US"/>
               <a:t>Fifth level</a:t>
             </a:r>
-            <a:endParaRPr lang="en-US"/>
           </a:p>
         </p:txBody>
       </p:sp>
@@ -2088,7 +1878,7 @@
           <a:p>
             <a:fld id="{5BCAD085-E8A6-8845-BD4E-CB4CCA059FC4}" type="datetimeFigureOut">
               <a:rPr lang="en-US" smtClean="0"/>
-              <a:t>1/27/13</a:t>
+              <a:t>9/11/2026</a:t>
             </a:fld>
             <a:endParaRPr lang="en-US"/>
           </a:p>
@@ -2130,7 +1920,7 @@
           <a:p>
             <a:fld id="{C1FF6DA9-008F-8B48-92A6-B652298478BF}" type="slidenum">
               <a:rPr lang="en-US" smtClean="0"/>
-              <a:t>‹#›</a:t>
+              <a:t>‹Nº›</a:t>
             </a:fld>
             <a:endParaRPr lang="en-US"/>
           </a:p>
@@ -2187,10 +1977,9 @@
           <a:lstStyle/>
           <a:p>
             <a:r>
-              <a:rPr lang="en-US" smtClean="0"/>
+              <a:rPr lang="en-US"/>
               <a:t>Click to edit Master title style</a:t>
             </a:r>
-            <a:endParaRPr lang="en-US"/>
           </a:p>
         </p:txBody>
       </p:sp>
@@ -2216,38 +2005,37 @@
           <a:p>
             <a:pPr lvl="0"/>
             <a:r>
-              <a:rPr lang="en-US" smtClean="0"/>
+              <a:rPr lang="en-US"/>
               <a:t>Click to edit Master text styles</a:t>
             </a:r>
           </a:p>
           <a:p>
             <a:pPr lvl="1"/>
             <a:r>
-              <a:rPr lang="en-US" smtClean="0"/>
+              <a:rPr lang="en-US"/>
               <a:t>Second level</a:t>
             </a:r>
           </a:p>
           <a:p>
             <a:pPr lvl="2"/>
             <a:r>
-              <a:rPr lang="en-US" smtClean="0"/>
+              <a:rPr lang="en-US"/>
               <a:t>Third level</a:t>
             </a:r>
           </a:p>
           <a:p>
             <a:pPr lvl="3"/>
             <a:r>
-              <a:rPr lang="en-US" smtClean="0"/>
+              <a:rPr lang="en-US"/>
               <a:t>Fourth level</a:t>
             </a:r>
           </a:p>
           <a:p>
             <a:pPr lvl="4"/>
             <a:r>
-              <a:rPr lang="en-US" smtClean="0"/>
+              <a:rPr lang="en-US"/>
               <a:t>Fifth level</a:t>
             </a:r>
-            <a:endParaRPr lang="en-US"/>
           </a:p>
         </p:txBody>
       </p:sp>
@@ -2268,7 +2056,7 @@
           <a:p>
             <a:fld id="{5BCAD085-E8A6-8845-BD4E-CB4CCA059FC4}" type="datetimeFigureOut">
               <a:rPr lang="en-US" smtClean="0"/>
-              <a:t>1/27/13</a:t>
+              <a:t>9/11/2026</a:t>
             </a:fld>
             <a:endParaRPr lang="en-US"/>
           </a:p>
@@ -2310,7 +2098,7 @@
           <a:p>
             <a:fld id="{C1FF6DA9-008F-8B48-92A6-B652298478BF}" type="slidenum">
               <a:rPr lang="en-US" smtClean="0"/>
-              <a:t>‹#›</a:t>
+              <a:t>‹Nº›</a:t>
             </a:fld>
             <a:endParaRPr lang="en-US"/>
           </a:p>
@@ -2362,10 +2150,9 @@
           <a:lstStyle/>
           <a:p>
             <a:r>
-              <a:rPr lang="en-US" smtClean="0"/>
+              <a:rPr lang="en-US"/>
               <a:t>Click to edit Master title style</a:t>
             </a:r>
-            <a:endParaRPr lang="en-US"/>
           </a:p>
         </p:txBody>
       </p:sp>
@@ -2386,38 +2173,37 @@
           <a:p>
             <a:pPr lvl="0"/>
             <a:r>
-              <a:rPr lang="en-US" smtClean="0"/>
+              <a:rPr lang="en-US"/>
               <a:t>Click to edit Master text styles</a:t>
             </a:r>
           </a:p>
           <a:p>
             <a:pPr lvl="1"/>
             <a:r>
-              <a:rPr lang="en-US" smtClean="0"/>
+              <a:rPr lang="en-US"/>
               <a:t>Second level</a:t>
             </a:r>
           </a:p>
           <a:p>
             <a:pPr lvl="2"/>
             <a:r>
-              <a:rPr lang="en-US" smtClean="0"/>
+              <a:rPr lang="en-US"/>
               <a:t>Third level</a:t>
             </a:r>
           </a:p>
           <a:p>
             <a:pPr lvl="3"/>
             <a:r>
-              <a:rPr lang="en-US" smtClean="0"/>
+              <a:rPr lang="en-US"/>
               <a:t>Fourth level</a:t>
             </a:r>
           </a:p>
           <a:p>
             <a:pPr lvl="4"/>
             <a:r>
-              <a:rPr lang="en-US" smtClean="0"/>
+              <a:rPr lang="en-US"/>
               <a:t>Fifth level</a:t>
             </a:r>
-            <a:endParaRPr lang="en-US"/>
           </a:p>
         </p:txBody>
       </p:sp>
@@ -2438,7 +2224,7 @@
           <a:p>
             <a:fld id="{5BCAD085-E8A6-8845-BD4E-CB4CCA059FC4}" type="datetimeFigureOut">
               <a:rPr lang="en-US" smtClean="0"/>
-              <a:t>1/27/13</a:t>
+              <a:t>9/11/2026</a:t>
             </a:fld>
             <a:endParaRPr lang="en-US"/>
           </a:p>
@@ -2480,7 +2266,7 @@
           <a:p>
             <a:fld id="{C1FF6DA9-008F-8B48-92A6-B652298478BF}" type="slidenum">
               <a:rPr lang="en-US" smtClean="0"/>
-              <a:t>‹#›</a:t>
+              <a:t>‹Nº›</a:t>
             </a:fld>
             <a:endParaRPr lang="en-US"/>
           </a:p>
@@ -2541,10 +2327,9 @@
           </a:lstStyle>
           <a:p>
             <a:r>
-              <a:rPr lang="en-US" smtClean="0"/>
+              <a:rPr lang="en-US"/>
               <a:t>Click to edit Master title style</a:t>
             </a:r>
-            <a:endParaRPr lang="en-US"/>
           </a:p>
         </p:txBody>
       </p:sp>
@@ -2661,7 +2446,7 @@
           <a:p>
             <a:pPr lvl="0"/>
             <a:r>
-              <a:rPr lang="en-US" smtClean="0"/>
+              <a:rPr lang="en-US"/>
               <a:t>Click to edit Master text styles</a:t>
             </a:r>
           </a:p>
@@ -2684,7 +2469,7 @@
           <a:p>
             <a:fld id="{5BCAD085-E8A6-8845-BD4E-CB4CCA059FC4}" type="datetimeFigureOut">
               <a:rPr lang="en-US" smtClean="0"/>
-              <a:t>1/27/13</a:t>
+              <a:t>9/11/2026</a:t>
             </a:fld>
             <a:endParaRPr lang="en-US"/>
           </a:p>
@@ -2726,7 +2511,7 @@
           <a:p>
             <a:fld id="{C1FF6DA9-008F-8B48-92A6-B652298478BF}" type="slidenum">
               <a:rPr lang="en-US" smtClean="0"/>
-              <a:t>‹#›</a:t>
+              <a:t>‹Nº›</a:t>
             </a:fld>
             <a:endParaRPr lang="en-US"/>
           </a:p>
@@ -2778,10 +2563,9 @@
           <a:lstStyle/>
           <a:p>
             <a:r>
-              <a:rPr lang="en-US" smtClean="0"/>
+              <a:rPr lang="en-US"/>
               <a:t>Click to edit Master title style</a:t>
             </a:r>
-            <a:endParaRPr lang="en-US"/>
           </a:p>
         </p:txBody>
       </p:sp>
@@ -2835,38 +2619,37 @@
           <a:p>
             <a:pPr lvl="0"/>
             <a:r>
-              <a:rPr lang="en-US" smtClean="0"/>
+              <a:rPr lang="en-US"/>
               <a:t>Click to edit Master text styles</a:t>
             </a:r>
           </a:p>
           <a:p>
             <a:pPr lvl="1"/>
             <a:r>
-              <a:rPr lang="en-US" smtClean="0"/>
+              <a:rPr lang="en-US"/>
               <a:t>Second level</a:t>
             </a:r>
           </a:p>
           <a:p>
             <a:pPr lvl="2"/>
             <a:r>
-              <a:rPr lang="en-US" smtClean="0"/>
+              <a:rPr lang="en-US"/>
               <a:t>Third level</a:t>
             </a:r>
           </a:p>
           <a:p>
             <a:pPr lvl="3"/>
             <a:r>
-              <a:rPr lang="en-US" smtClean="0"/>
+              <a:rPr lang="en-US"/>
               <a:t>Fourth level</a:t>
             </a:r>
           </a:p>
           <a:p>
             <a:pPr lvl="4"/>
             <a:r>
-              <a:rPr lang="en-US" smtClean="0"/>
+              <a:rPr lang="en-US"/>
               <a:t>Fifth level</a:t>
             </a:r>
-            <a:endParaRPr lang="en-US"/>
           </a:p>
         </p:txBody>
       </p:sp>
@@ -2920,38 +2703,37 @@
           <a:p>
             <a:pPr lvl="0"/>
             <a:r>
-              <a:rPr lang="en-US" smtClean="0"/>
+              <a:rPr lang="en-US"/>
               <a:t>Click to edit Master text styles</a:t>
             </a:r>
           </a:p>
           <a:p>
             <a:pPr lvl="1"/>
             <a:r>
-              <a:rPr lang="en-US" smtClean="0"/>
+              <a:rPr lang="en-US"/>
               <a:t>Second level</a:t>
             </a:r>
           </a:p>
           <a:p>
             <a:pPr lvl="2"/>
             <a:r>
-              <a:rPr lang="en-US" smtClean="0"/>
+              <a:rPr lang="en-US"/>
               <a:t>Third level</a:t>
             </a:r>
           </a:p>
           <a:p>
             <a:pPr lvl="3"/>
             <a:r>
-              <a:rPr lang="en-US" smtClean="0"/>
+              <a:rPr lang="en-US"/>
               <a:t>Fourth level</a:t>
             </a:r>
           </a:p>
           <a:p>
             <a:pPr lvl="4"/>
             <a:r>
-              <a:rPr lang="en-US" smtClean="0"/>
+              <a:rPr lang="en-US"/>
               <a:t>Fifth level</a:t>
             </a:r>
-            <a:endParaRPr lang="en-US"/>
           </a:p>
         </p:txBody>
       </p:sp>
@@ -2972,7 +2754,7 @@
           <a:p>
             <a:fld id="{5BCAD085-E8A6-8845-BD4E-CB4CCA059FC4}" type="datetimeFigureOut">
               <a:rPr lang="en-US" smtClean="0"/>
-              <a:t>1/27/13</a:t>
+              <a:t>9/11/2026</a:t>
             </a:fld>
             <a:endParaRPr lang="en-US"/>
           </a:p>
@@ -3014,7 +2796,7 @@
           <a:p>
             <a:fld id="{C1FF6DA9-008F-8B48-92A6-B652298478BF}" type="slidenum">
               <a:rPr lang="en-US" smtClean="0"/>
-              <a:t>‹#›</a:t>
+              <a:t>‹Nº›</a:t>
             </a:fld>
             <a:endParaRPr lang="en-US"/>
           </a:p>
@@ -3070,10 +2852,9 @@
           </a:lstStyle>
           <a:p>
             <a:r>
-              <a:rPr lang="en-US" smtClean="0"/>
+              <a:rPr lang="en-US"/>
               <a:t>Click to edit Master title style</a:t>
             </a:r>
-            <a:endParaRPr lang="en-US"/>
           </a:p>
         </p:txBody>
       </p:sp>
@@ -3136,7 +2917,7 @@
           <a:p>
             <a:pPr lvl="0"/>
             <a:r>
-              <a:rPr lang="en-US" smtClean="0"/>
+              <a:rPr lang="en-US"/>
               <a:t>Click to edit Master text styles</a:t>
             </a:r>
           </a:p>
@@ -3192,38 +2973,37 @@
           <a:p>
             <a:pPr lvl="0"/>
             <a:r>
-              <a:rPr lang="en-US" smtClean="0"/>
+              <a:rPr lang="en-US"/>
               <a:t>Click to edit Master text styles</a:t>
             </a:r>
           </a:p>
           <a:p>
             <a:pPr lvl="1"/>
             <a:r>
-              <a:rPr lang="en-US" smtClean="0"/>
+              <a:rPr lang="en-US"/>
               <a:t>Second level</a:t>
             </a:r>
           </a:p>
           <a:p>
             <a:pPr lvl="2"/>
             <a:r>
-              <a:rPr lang="en-US" smtClean="0"/>
+              <a:rPr lang="en-US"/>
               <a:t>Third level</a:t>
             </a:r>
           </a:p>
           <a:p>
             <a:pPr lvl="3"/>
             <a:r>
-              <a:rPr lang="en-US" smtClean="0"/>
+              <a:rPr lang="en-US"/>
               <a:t>Fourth level</a:t>
             </a:r>
           </a:p>
           <a:p>
             <a:pPr lvl="4"/>
             <a:r>
-              <a:rPr lang="en-US" smtClean="0"/>
+              <a:rPr lang="en-US"/>
               <a:t>Fifth level</a:t>
             </a:r>
-            <a:endParaRPr lang="en-US"/>
           </a:p>
         </p:txBody>
       </p:sp>
@@ -3286,7 +3066,7 @@
           <a:p>
             <a:pPr lvl="0"/>
             <a:r>
-              <a:rPr lang="en-US" smtClean="0"/>
+              <a:rPr lang="en-US"/>
               <a:t>Click to edit Master text styles</a:t>
             </a:r>
           </a:p>
@@ -3342,38 +3122,37 @@
           <a:p>
             <a:pPr lvl="0"/>
             <a:r>
-              <a:rPr lang="en-US" smtClean="0"/>
+              <a:rPr lang="en-US"/>
               <a:t>Click to edit Master text styles</a:t>
             </a:r>
           </a:p>
           <a:p>
             <a:pPr lvl="1"/>
             <a:r>
-              <a:rPr lang="en-US" smtClean="0"/>
+              <a:rPr lang="en-US"/>
               <a:t>Second level</a:t>
             </a:r>
           </a:p>
           <a:p>
             <a:pPr lvl="2"/>
             <a:r>
-              <a:rPr lang="en-US" smtClean="0"/>
+              <a:rPr lang="en-US"/>
               <a:t>Third level</a:t>
             </a:r>
           </a:p>
           <a:p>
             <a:pPr lvl="3"/>
             <a:r>
-              <a:rPr lang="en-US" smtClean="0"/>
+              <a:rPr lang="en-US"/>
               <a:t>Fourth level</a:t>
             </a:r>
           </a:p>
           <a:p>
             <a:pPr lvl="4"/>
             <a:r>
-              <a:rPr lang="en-US" smtClean="0"/>
+              <a:rPr lang="en-US"/>
               <a:t>Fifth level</a:t>
             </a:r>
-            <a:endParaRPr lang="en-US"/>
           </a:p>
         </p:txBody>
       </p:sp>
@@ -3394,7 +3173,7 @@
           <a:p>
             <a:fld id="{5BCAD085-E8A6-8845-BD4E-CB4CCA059FC4}" type="datetimeFigureOut">
               <a:rPr lang="en-US" smtClean="0"/>
-              <a:t>1/27/13</a:t>
+              <a:t>9/11/2026</a:t>
             </a:fld>
             <a:endParaRPr lang="en-US"/>
           </a:p>
@@ -3436,7 +3215,7 @@
           <a:p>
             <a:fld id="{C1FF6DA9-008F-8B48-92A6-B652298478BF}" type="slidenum">
               <a:rPr lang="en-US" smtClean="0"/>
-              <a:t>‹#›</a:t>
+              <a:t>‹Nº›</a:t>
             </a:fld>
             <a:endParaRPr lang="en-US"/>
           </a:p>
@@ -3488,10 +3267,9 @@
           <a:lstStyle/>
           <a:p>
             <a:r>
-              <a:rPr lang="en-US" smtClean="0"/>
+              <a:rPr lang="en-US"/>
               <a:t>Click to edit Master title style</a:t>
             </a:r>
-            <a:endParaRPr lang="en-US"/>
           </a:p>
         </p:txBody>
       </p:sp>
@@ -3512,7 +3290,7 @@
           <a:p>
             <a:fld id="{5BCAD085-E8A6-8845-BD4E-CB4CCA059FC4}" type="datetimeFigureOut">
               <a:rPr lang="en-US" smtClean="0"/>
-              <a:t>1/27/13</a:t>
+              <a:t>9/11/2026</a:t>
             </a:fld>
             <a:endParaRPr lang="en-US"/>
           </a:p>
@@ -3554,7 +3332,7 @@
           <a:p>
             <a:fld id="{C1FF6DA9-008F-8B48-92A6-B652298478BF}" type="slidenum">
               <a:rPr lang="en-US" smtClean="0"/>
-              <a:t>‹#›</a:t>
+              <a:t>‹Nº›</a:t>
             </a:fld>
             <a:endParaRPr lang="en-US"/>
           </a:p>
@@ -3607,7 +3385,7 @@
           <a:p>
             <a:fld id="{5BCAD085-E8A6-8845-BD4E-CB4CCA059FC4}" type="datetimeFigureOut">
               <a:rPr lang="en-US" smtClean="0"/>
-              <a:t>1/27/13</a:t>
+              <a:t>9/11/2026</a:t>
             </a:fld>
             <a:endParaRPr lang="en-US"/>
           </a:p>
@@ -3649,7 +3427,7 @@
           <a:p>
             <a:fld id="{C1FF6DA9-008F-8B48-92A6-B652298478BF}" type="slidenum">
               <a:rPr lang="en-US" smtClean="0"/>
-              <a:t>‹#›</a:t>
+              <a:t>‹Nº›</a:t>
             </a:fld>
             <a:endParaRPr lang="en-US"/>
           </a:p>
@@ -3710,10 +3488,9 @@
           </a:lstStyle>
           <a:p>
             <a:r>
-              <a:rPr lang="en-US" smtClean="0"/>
+              <a:rPr lang="en-US"/>
               <a:t>Click to edit Master title style</a:t>
             </a:r>
-            <a:endParaRPr lang="en-US"/>
           </a:p>
         </p:txBody>
       </p:sp>
@@ -3767,38 +3544,37 @@
           <a:p>
             <a:pPr lvl="0"/>
             <a:r>
-              <a:rPr lang="en-US" smtClean="0"/>
+              <a:rPr lang="en-US"/>
               <a:t>Click to edit Master text styles</a:t>
             </a:r>
           </a:p>
           <a:p>
             <a:pPr lvl="1"/>
             <a:r>
-              <a:rPr lang="en-US" smtClean="0"/>
+              <a:rPr lang="en-US"/>
               <a:t>Second level</a:t>
             </a:r>
           </a:p>
           <a:p>
             <a:pPr lvl="2"/>
             <a:r>
-              <a:rPr lang="en-US" smtClean="0"/>
+              <a:rPr lang="en-US"/>
               <a:t>Third level</a:t>
             </a:r>
           </a:p>
           <a:p>
             <a:pPr lvl="3"/>
             <a:r>
-              <a:rPr lang="en-US" smtClean="0"/>
+              <a:rPr lang="en-US"/>
               <a:t>Fourth level</a:t>
             </a:r>
           </a:p>
           <a:p>
             <a:pPr lvl="4"/>
             <a:r>
-              <a:rPr lang="en-US" smtClean="0"/>
+              <a:rPr lang="en-US"/>
               <a:t>Fifth level</a:t>
             </a:r>
-            <a:endParaRPr lang="en-US"/>
           </a:p>
         </p:txBody>
       </p:sp>
@@ -3861,7 +3637,7 @@
           <a:p>
             <a:pPr lvl="0"/>
             <a:r>
-              <a:rPr lang="en-US" smtClean="0"/>
+              <a:rPr lang="en-US"/>
               <a:t>Click to edit Master text styles</a:t>
             </a:r>
           </a:p>
@@ -3884,7 +3660,7 @@
           <a:p>
             <a:fld id="{5BCAD085-E8A6-8845-BD4E-CB4CCA059FC4}" type="datetimeFigureOut">
               <a:rPr lang="en-US" smtClean="0"/>
-              <a:t>1/27/13</a:t>
+              <a:t>9/11/2026</a:t>
             </a:fld>
             <a:endParaRPr lang="en-US"/>
           </a:p>
@@ -3926,7 +3702,7 @@
           <a:p>
             <a:fld id="{C1FF6DA9-008F-8B48-92A6-B652298478BF}" type="slidenum">
               <a:rPr lang="en-US" smtClean="0"/>
-              <a:t>‹#›</a:t>
+              <a:t>‹Nº›</a:t>
             </a:fld>
             <a:endParaRPr lang="en-US"/>
           </a:p>
@@ -3987,10 +3763,9 @@
           </a:lstStyle>
           <a:p>
             <a:r>
-              <a:rPr lang="en-US" smtClean="0"/>
+              <a:rPr lang="en-US"/>
               <a:t>Click to edit Master title style</a:t>
             </a:r>
-            <a:endParaRPr lang="en-US"/>
           </a:p>
         </p:txBody>
       </p:sp>
@@ -4114,7 +3889,7 @@
           <a:p>
             <a:pPr lvl="0"/>
             <a:r>
-              <a:rPr lang="en-US" smtClean="0"/>
+              <a:rPr lang="en-US"/>
               <a:t>Click to edit Master text styles</a:t>
             </a:r>
           </a:p>
@@ -4137,7 +3912,7 @@
           <a:p>
             <a:fld id="{5BCAD085-E8A6-8845-BD4E-CB4CCA059FC4}" type="datetimeFigureOut">
               <a:rPr lang="en-US" smtClean="0"/>
-              <a:t>1/27/13</a:t>
+              <a:t>9/11/2026</a:t>
             </a:fld>
             <a:endParaRPr lang="en-US"/>
           </a:p>
@@ -4179,7 +3954,7 @@
           <a:p>
             <a:fld id="{C1FF6DA9-008F-8B48-92A6-B652298478BF}" type="slidenum">
               <a:rPr lang="en-US" smtClean="0"/>
-              <a:t>‹#›</a:t>
+              <a:t>‹Nº›</a:t>
             </a:fld>
             <a:endParaRPr lang="en-US"/>
           </a:p>
@@ -4246,10 +4021,9 @@
           <a:lstStyle/>
           <a:p>
             <a:r>
-              <a:rPr lang="en-US" smtClean="0"/>
+              <a:rPr lang="en-US"/>
               <a:t>Click to edit Master title style</a:t>
             </a:r>
-            <a:endParaRPr lang="en-US"/>
           </a:p>
         </p:txBody>
       </p:sp>
@@ -4280,38 +4054,37 @@
           <a:p>
             <a:pPr lvl="0"/>
             <a:r>
-              <a:rPr lang="en-US" smtClean="0"/>
+              <a:rPr lang="en-US"/>
               <a:t>Click to edit Master text styles</a:t>
             </a:r>
           </a:p>
           <a:p>
             <a:pPr lvl="1"/>
             <a:r>
-              <a:rPr lang="en-US" smtClean="0"/>
+              <a:rPr lang="en-US"/>
               <a:t>Second level</a:t>
             </a:r>
           </a:p>
           <a:p>
             <a:pPr lvl="2"/>
             <a:r>
-              <a:rPr lang="en-US" smtClean="0"/>
+              <a:rPr lang="en-US"/>
               <a:t>Third level</a:t>
             </a:r>
           </a:p>
           <a:p>
             <a:pPr lvl="3"/>
             <a:r>
-              <a:rPr lang="en-US" smtClean="0"/>
+              <a:rPr lang="en-US"/>
               <a:t>Fourth level</a:t>
             </a:r>
           </a:p>
           <a:p>
             <a:pPr lvl="4"/>
             <a:r>
-              <a:rPr lang="en-US" smtClean="0"/>
+              <a:rPr lang="en-US"/>
               <a:t>Fifth level</a:t>
             </a:r>
-            <a:endParaRPr lang="en-US"/>
           </a:p>
         </p:txBody>
       </p:sp>
@@ -4350,7 +4123,7 @@
           <a:p>
             <a:fld id="{5BCAD085-E8A6-8845-BD4E-CB4CCA059FC4}" type="datetimeFigureOut">
               <a:rPr lang="en-US" smtClean="0"/>
-              <a:t>1/27/13</a:t>
+              <a:t>9/11/2026</a:t>
             </a:fld>
             <a:endParaRPr lang="en-US"/>
           </a:p>
@@ -4428,7 +4201,7 @@
           <a:p>
             <a:fld id="{C1FF6DA9-008F-8B48-92A6-B652298478BF}" type="slidenum">
               <a:rPr lang="en-US" smtClean="0"/>
-              <a:t>‹#›</a:t>
+              <a:t>‹Nº›</a:t>
             </a:fld>
             <a:endParaRPr lang="en-US"/>
           </a:p>
@@ -4709,7 +4482,7 @@
 </file>
 
 <file path=ppt/slides/slide1.xml><?xml version="1.0" encoding="utf-8"?>
-<p:sld xmlns:a="http://schemas.openxmlformats.org/drawingml/2006/main" xmlns:p="http://schemas.openxmlformats.org/presentationml/2006/main" xmlns:r="http://schemas.openxmlformats.org/officeDocument/2006/relationships">
+<p:sld xmlns:a="http://schemas.openxmlformats.org/drawingml/2006/main" xmlns:r="http://schemas.openxmlformats.org/officeDocument/2006/relationships" xmlns:p="http://schemas.openxmlformats.org/presentationml/2006/main">
   <p:cSld>
     <p:spTree>
       <p:nvGrpSpPr>
@@ -4717,7 +4490,14 @@
         <p:cNvGrpSpPr/>
         <p:nvPr/>
       </p:nvGrpSpPr>
-      <p:grpSpPr/>
+      <p:grpSpPr>
+        <a:xfrm>
+          <a:off x="0" y="0"/>
+          <a:ext cx="0" cy="0"/>
+          <a:chOff x="0" y="0"/>
+          <a:chExt cx="0" cy="0"/>
+        </a:xfrm>
+      </p:grpSpPr>
       <p:sp>
         <p:nvSpPr>
           <p:cNvPr id="2" name="Rectangle 1"/>
@@ -4759,6 +4539,7 @@
           <a:lstStyle/>
           <a:p>
             <a:pPr algn="ctr"/>
+            <a:endParaRPr/>
           </a:p>
         </p:txBody>
       </p:sp>
@@ -4803,6 +4584,7 @@
           <a:lstStyle/>
           <a:p>
             <a:pPr algn="ctr"/>
+            <a:endParaRPr/>
           </a:p>
         </p:txBody>
       </p:sp>
@@ -4847,6 +4629,7 @@
           <a:lstStyle/>
           <a:p>
             <a:pPr algn="ctr"/>
+            <a:endParaRPr/>
           </a:p>
         </p:txBody>
       </p:sp>
@@ -4867,7 +4650,7 @@
           <a:noFill/>
         </p:spPr>
         <p:txBody>
-          <a:bodyPr wrap="square" anchor="t" lIns="0" rIns="0" tIns="0" bIns="0">
+          <a:bodyPr wrap="square" lIns="0" tIns="0" rIns="0" bIns="0" anchor="t">
             <a:spAutoFit/>
           </a:bodyPr>
           <a:lstStyle/>
@@ -4906,7 +4689,7 @@
           <a:noFill/>
         </p:spPr>
         <p:txBody>
-          <a:bodyPr wrap="square" anchor="t" lIns="0" rIns="0" tIns="0" bIns="0">
+          <a:bodyPr wrap="square" lIns="0" tIns="0" rIns="0" bIns="0" anchor="t">
             <a:spAutoFit/>
           </a:bodyPr>
           <a:lstStyle/>
@@ -4945,7 +4728,7 @@
           <a:noFill/>
         </p:spPr>
         <p:txBody>
-          <a:bodyPr wrap="square" anchor="t" lIns="0" rIns="0" tIns="0" bIns="0">
+          <a:bodyPr wrap="square" lIns="0" tIns="0" rIns="0" bIns="0" anchor="t">
             <a:spAutoFit/>
           </a:bodyPr>
           <a:lstStyle/>
@@ -5024,6 +4807,7 @@
           <a:lstStyle/>
           <a:p>
             <a:pPr algn="ctr"/>
+            <a:endParaRPr/>
           </a:p>
         </p:txBody>
       </p:sp>
@@ -5044,7 +4828,7 @@
           <a:noFill/>
         </p:spPr>
         <p:txBody>
-          <a:bodyPr wrap="square" anchor="t" lIns="0" rIns="0" tIns="0" bIns="0">
+          <a:bodyPr wrap="square" lIns="0" tIns="0" rIns="0" bIns="0" anchor="t">
             <a:spAutoFit/>
           </a:bodyPr>
           <a:lstStyle/>
@@ -5083,7 +4867,7 @@
           <a:noFill/>
         </p:spPr>
         <p:txBody>
-          <a:bodyPr wrap="square" anchor="t" lIns="0" rIns="0" tIns="0" bIns="0">
+          <a:bodyPr wrap="square" lIns="0" tIns="0" rIns="0" bIns="0" anchor="t">
             <a:spAutoFit/>
           </a:bodyPr>
           <a:lstStyle/>
@@ -5138,7 +4922,7 @@
           <a:noFill/>
         </p:spPr>
         <p:txBody>
-          <a:bodyPr wrap="square" anchor="t" lIns="0" rIns="0" tIns="0" bIns="0">
+          <a:bodyPr wrap="square" lIns="0" tIns="0" rIns="0" bIns="0" anchor="t">
             <a:spAutoFit/>
           </a:bodyPr>
           <a:lstStyle/>
@@ -5169,7 +4953,7 @@
 </file>
 
 <file path=ppt/slides/slide10.xml><?xml version="1.0" encoding="utf-8"?>
-<p:sld xmlns:a="http://schemas.openxmlformats.org/drawingml/2006/main" xmlns:p="http://schemas.openxmlformats.org/presentationml/2006/main" xmlns:r="http://schemas.openxmlformats.org/officeDocument/2006/relationships">
+<p:sld xmlns:a="http://schemas.openxmlformats.org/drawingml/2006/main" xmlns:r="http://schemas.openxmlformats.org/officeDocument/2006/relationships" xmlns:p="http://schemas.openxmlformats.org/presentationml/2006/main">
   <p:cSld>
     <p:spTree>
       <p:nvGrpSpPr>
@@ -5177,7 +4961,14 @@
         <p:cNvGrpSpPr/>
         <p:nvPr/>
       </p:nvGrpSpPr>
-      <p:grpSpPr/>
+      <p:grpSpPr>
+        <a:xfrm>
+          <a:off x="0" y="0"/>
+          <a:ext cx="0" cy="0"/>
+          <a:chOff x="0" y="0"/>
+          <a:chExt cx="0" cy="0"/>
+        </a:xfrm>
+      </p:grpSpPr>
       <p:sp>
         <p:nvSpPr>
           <p:cNvPr id="2" name="Rectangle 1"/>
@@ -5219,6 +5010,7 @@
           <a:lstStyle/>
           <a:p>
             <a:pPr algn="ctr"/>
+            <a:endParaRPr/>
           </a:p>
         </p:txBody>
       </p:sp>
@@ -5263,6 +5055,7 @@
           <a:lstStyle/>
           <a:p>
             <a:pPr algn="ctr"/>
+            <a:endParaRPr/>
           </a:p>
         </p:txBody>
       </p:sp>
@@ -5283,7 +5076,7 @@
           <a:noFill/>
         </p:spPr>
         <p:txBody>
-          <a:bodyPr wrap="square" anchor="t" lIns="0" rIns="0" tIns="0" bIns="0">
+          <a:bodyPr wrap="square" lIns="0" tIns="0" rIns="0" bIns="0" anchor="t">
             <a:spAutoFit/>
           </a:bodyPr>
           <a:lstStyle/>
@@ -5322,7 +5115,7 @@
           <a:noFill/>
         </p:spPr>
         <p:txBody>
-          <a:bodyPr wrap="square" anchor="t" lIns="0" rIns="0" tIns="0" bIns="0">
+          <a:bodyPr wrap="square" lIns="0" tIns="0" rIns="0" bIns="0" anchor="t">
             <a:spAutoFit/>
           </a:bodyPr>
           <a:lstStyle/>
@@ -5385,711 +5178,7 @@
           <a:lstStyle/>
           <a:p>
             <a:pPr algn="ctr"/>
-          </a:p>
-        </p:txBody>
-      </p:sp>
-      <p:graphicFrame>
-        <p:nvGraphicFramePr>
-          <p:cNvPr id="7" name="Table 6"/>
-          <p:cNvGraphicFramePr>
-            <a:graphicFrameLocks noGrp="1"/>
-          </p:cNvGraphicFramePr>
-          <p:nvPr/>
-        </p:nvGraphicFramePr>
-        <p:xfrm>
-          <a:off x="548640" y="1554480"/>
-          <a:ext cx="11064238" cy="3977639"/>
-        </p:xfrm>
-        <a:graphic>
-          <a:graphicData uri="http://schemas.openxmlformats.org/drawingml/2006/table">
-            <a:tbl>
-              <a:tblPr firstRow="1" bandRow="1">
-                <a:tableStyleId>{5C22544A-7EE6-4342-B048-85BDC9FD1C3A}</a:tableStyleId>
-              </a:tblPr>
-              <a:tblGrid>
-                <a:gridCol w="2301361"/>
-                <a:gridCol w="3717584"/>
-                <a:gridCol w="5045293"/>
-              </a:tblGrid>
-              <a:tr h="441959">
-                <a:tc>
-                  <a:txBody>
-                    <a:bodyPr wrap="square"/>
-                    <a:lstStyle/>
-                    <a:p>
-                      <a:pPr algn="l"/>
-                      <a:r>
-                        <a:rPr sz="1300" b="1">
-                          <a:solidFill>
-                            <a:srgbClr val="FFFFFF"/>
-                          </a:solidFill>
-                          <a:latin typeface="Calibri"/>
-                        </a:rPr>
-                        <a:t>Capa</a:t>
-                      </a:r>
-                    </a:p>
-                  </a:txBody>
-                  <a:tcPr marL="76200" marR="76200" marT="50800" marB="50800" anchor="ctr">
-                    <a:solidFill>
-                      <a:srgbClr val="1F2937"/>
-                    </a:solidFill>
-                  </a:tcPr>
-                </a:tc>
-                <a:tc>
-                  <a:txBody>
-                    <a:bodyPr wrap="square"/>
-                    <a:lstStyle/>
-                    <a:p>
-                      <a:pPr algn="l"/>
-                      <a:r>
-                        <a:rPr sz="1300" b="1">
-                          <a:solidFill>
-                            <a:srgbClr val="FFFFFF"/>
-                          </a:solidFill>
-                          <a:latin typeface="Calibri"/>
-                        </a:rPr>
-                        <a:t>Tecnología</a:t>
-                      </a:r>
-                    </a:p>
-                  </a:txBody>
-                  <a:tcPr marL="76200" marR="76200" marT="50800" marB="50800" anchor="ctr">
-                    <a:solidFill>
-                      <a:srgbClr val="1F2937"/>
-                    </a:solidFill>
-                  </a:tcPr>
-                </a:tc>
-                <a:tc>
-                  <a:txBody>
-                    <a:bodyPr wrap="square"/>
-                    <a:lstStyle/>
-                    <a:p>
-                      <a:pPr algn="l"/>
-                      <a:r>
-                        <a:rPr sz="1300" b="1">
-                          <a:solidFill>
-                            <a:srgbClr val="FFFFFF"/>
-                          </a:solidFill>
-                          <a:latin typeface="Calibri"/>
-                        </a:rPr>
-                        <a:t>Por qué</a:t>
-                      </a:r>
-                    </a:p>
-                  </a:txBody>
-                  <a:tcPr marL="76200" marR="76200" marT="50800" marB="50800" anchor="ctr">
-                    <a:solidFill>
-                      <a:srgbClr val="1F2937"/>
-                    </a:solidFill>
-                  </a:tcPr>
-                </a:tc>
-              </a:tr>
-              <a:tr h="441959">
-                <a:tc>
-                  <a:txBody>
-                    <a:bodyPr wrap="square"/>
-                    <a:lstStyle/>
-                    <a:p>
-                      <a:pPr algn="l"/>
-                      <a:r>
-                        <a:rPr sz="1200">
-                          <a:solidFill>
-                            <a:srgbClr val="1F2937"/>
-                          </a:solidFill>
-                          <a:latin typeface="Calibri"/>
-                        </a:rPr>
-                        <a:t>Captura</a:t>
-                      </a:r>
-                    </a:p>
-                  </a:txBody>
-                  <a:tcPr marL="76200" marR="76200" marT="50800" marB="50800" anchor="ctr">
-                    <a:solidFill>
-                      <a:srgbClr val="FFFFFF"/>
-                    </a:solidFill>
-                  </a:tcPr>
-                </a:tc>
-                <a:tc>
-                  <a:txBody>
-                    <a:bodyPr wrap="square"/>
-                    <a:lstStyle/>
-                    <a:p>
-                      <a:pPr algn="l"/>
-                      <a:r>
-                        <a:rPr sz="1200">
-                          <a:solidFill>
-                            <a:srgbClr val="1F2937"/>
-                          </a:solidFill>
-                          <a:latin typeface="Calibri"/>
-                        </a:rPr>
-                        <a:t>Cámaras IP · ONVIF / RTSP</a:t>
-                      </a:r>
-                    </a:p>
-                  </a:txBody>
-                  <a:tcPr marL="76200" marR="76200" marT="50800" marB="50800" anchor="ctr">
-                    <a:solidFill>
-                      <a:srgbClr val="FFFFFF"/>
-                    </a:solidFill>
-                  </a:tcPr>
-                </a:tc>
-                <a:tc>
-                  <a:txBody>
-                    <a:bodyPr wrap="square"/>
-                    <a:lstStyle/>
-                    <a:p>
-                      <a:pPr algn="l"/>
-                      <a:r>
-                        <a:rPr sz="1200">
-                          <a:solidFill>
-                            <a:srgbClr val="1F2937"/>
-                          </a:solidFill>
-                          <a:latin typeface="Calibri"/>
-                        </a:rPr>
-                        <a:t>Estándar de facto; usa el parque instalado del cliente</a:t>
-                      </a:r>
-                    </a:p>
-                  </a:txBody>
-                  <a:tcPr marL="76200" marR="76200" marT="50800" marB="50800" anchor="ctr">
-                    <a:solidFill>
-                      <a:srgbClr val="FFFFFF"/>
-                    </a:solidFill>
-                  </a:tcPr>
-                </a:tc>
-              </a:tr>
-              <a:tr h="441959">
-                <a:tc>
-                  <a:txBody>
-                    <a:bodyPr wrap="square"/>
-                    <a:lstStyle/>
-                    <a:p>
-                      <a:pPr algn="l"/>
-                      <a:r>
-                        <a:rPr sz="1200">
-                          <a:solidFill>
-                            <a:srgbClr val="1F2937"/>
-                          </a:solidFill>
-                          <a:latin typeface="Calibri"/>
-                        </a:rPr>
-                        <a:t>Visión ✅</a:t>
-                      </a:r>
-                    </a:p>
-                  </a:txBody>
-                  <a:tcPr marL="76200" marR="76200" marT="50800" marB="50800" anchor="ctr">
-                    <a:solidFill>
-                      <a:srgbClr val="F3F4F6"/>
-                    </a:solidFill>
-                  </a:tcPr>
-                </a:tc>
-                <a:tc>
-                  <a:txBody>
-                    <a:bodyPr wrap="square"/>
-                    <a:lstStyle/>
-                    <a:p>
-                      <a:pPr algn="l"/>
-                      <a:r>
-                        <a:rPr sz="1200">
-                          <a:solidFill>
-                            <a:srgbClr val="1F2937"/>
-                          </a:solidFill>
-                          <a:latin typeface="Calibri"/>
-                        </a:rPr>
-                        <a:t>YOLOv8 (Ultralytics) → ONNX</a:t>
-                      </a:r>
-                    </a:p>
-                  </a:txBody>
-                  <a:tcPr marL="76200" marR="76200" marT="50800" marB="50800" anchor="ctr">
-                    <a:solidFill>
-                      <a:srgbClr val="F3F4F6"/>
-                    </a:solidFill>
-                  </a:tcPr>
-                </a:tc>
-                <a:tc>
-                  <a:txBody>
-                    <a:bodyPr wrap="square"/>
-                    <a:lstStyle/>
-                    <a:p>
-                      <a:pPr algn="l"/>
-                      <a:r>
-                        <a:rPr sz="1200">
-                          <a:solidFill>
-                            <a:srgbClr val="1F2937"/>
-                          </a:solidFill>
-                          <a:latin typeface="Calibri"/>
-                        </a:rPr>
-                        <a:t>Prototipo ya validado; ONNX corre en hardware modesto</a:t>
-                      </a:r>
-                    </a:p>
-                  </a:txBody>
-                  <a:tcPr marL="76200" marR="76200" marT="50800" marB="50800" anchor="ctr">
-                    <a:solidFill>
-                      <a:srgbClr val="F3F4F6"/>
-                    </a:solidFill>
-                  </a:tcPr>
-                </a:tc>
-              </a:tr>
-              <a:tr h="441959">
-                <a:tc>
-                  <a:txBody>
-                    <a:bodyPr wrap="square"/>
-                    <a:lstStyle/>
-                    <a:p>
-                      <a:pPr algn="l"/>
-                      <a:r>
-                        <a:rPr sz="1200">
-                          <a:solidFill>
-                            <a:srgbClr val="1F2937"/>
-                          </a:solidFill>
-                          <a:latin typeface="Calibri"/>
-                        </a:rPr>
-                        <a:t>Agente Edge ✅</a:t>
-                      </a:r>
-                    </a:p>
-                  </a:txBody>
-                  <a:tcPr marL="76200" marR="76200" marT="50800" marB="50800" anchor="ctr">
-                    <a:solidFill>
-                      <a:srgbClr val="FFFFFF"/>
-                    </a:solidFill>
-                  </a:tcPr>
-                </a:tc>
-                <a:tc>
-                  <a:txBody>
-                    <a:bodyPr wrap="square"/>
-                    <a:lstStyle/>
-                    <a:p>
-                      <a:pPr algn="l"/>
-                      <a:r>
-                        <a:rPr sz="1200">
-                          <a:solidFill>
-                            <a:srgbClr val="1F2937"/>
-                          </a:solidFill>
-                          <a:latin typeface="Calibri"/>
-                        </a:rPr>
-                        <a:t>Python</a:t>
-                      </a:r>
-                    </a:p>
-                  </a:txBody>
-                  <a:tcPr marL="76200" marR="76200" marT="50800" marB="50800" anchor="ctr">
-                    <a:solidFill>
-                      <a:srgbClr val="FFFFFF"/>
-                    </a:solidFill>
-                  </a:tcPr>
-                </a:tc>
-                <a:tc>
-                  <a:txBody>
-                    <a:bodyPr wrap="square"/>
-                    <a:lstStyle/>
-                    <a:p>
-                      <a:pPr algn="l"/>
-                      <a:r>
-                        <a:rPr sz="1200">
-                          <a:solidFill>
-                            <a:srgbClr val="1F2937"/>
-                          </a:solidFill>
-                          <a:latin typeface="Calibri"/>
-                        </a:rPr>
-                        <a:t>Ecosistema de visión maduro; mismo lenguaje del prototipo</a:t>
-                      </a:r>
-                    </a:p>
-                  </a:txBody>
-                  <a:tcPr marL="76200" marR="76200" marT="50800" marB="50800" anchor="ctr">
-                    <a:solidFill>
-                      <a:srgbClr val="FFFFFF"/>
-                    </a:solidFill>
-                  </a:tcPr>
-                </a:tc>
-              </a:tr>
-              <a:tr h="441959">
-                <a:tc>
-                  <a:txBody>
-                    <a:bodyPr wrap="square"/>
-                    <a:lstStyle/>
-                    <a:p>
-                      <a:pPr algn="l"/>
-                      <a:r>
-                        <a:rPr sz="1200">
-                          <a:solidFill>
-                            <a:srgbClr val="1F2937"/>
-                          </a:solidFill>
-                          <a:latin typeface="Calibri"/>
-                        </a:rPr>
-                        <a:t>Alerta física 🔨</a:t>
-                      </a:r>
-                    </a:p>
-                  </a:txBody>
-                  <a:tcPr marL="76200" marR="76200" marT="50800" marB="50800" anchor="ctr">
-                    <a:solidFill>
-                      <a:srgbClr val="F3F4F6"/>
-                    </a:solidFill>
-                  </a:tcPr>
-                </a:tc>
-                <a:tc>
-                  <a:txBody>
-                    <a:bodyPr wrap="square"/>
-                    <a:lstStyle/>
-                    <a:p>
-                      <a:pPr algn="l"/>
-                      <a:r>
-                        <a:rPr sz="1200">
-                          <a:solidFill>
-                            <a:srgbClr val="1F2937"/>
-                          </a:solidFill>
-                          <a:latin typeface="Calibri"/>
-                        </a:rPr>
-                        <a:t>Red IP · gateway · dispositivo receptor</a:t>
-                      </a:r>
-                    </a:p>
-                  </a:txBody>
-                  <a:tcPr marL="76200" marR="76200" marT="50800" marB="50800" anchor="ctr">
-                    <a:solidFill>
-                      <a:srgbClr val="F3F4F6"/>
-                    </a:solidFill>
-                  </a:tcPr>
-                </a:tc>
-                <a:tc>
-                  <a:txBody>
-                    <a:bodyPr wrap="square"/>
-                    <a:lstStyle/>
-                    <a:p>
-                      <a:pPr algn="l"/>
-                      <a:r>
-                        <a:rPr sz="1200">
-                          <a:solidFill>
-                            <a:srgbClr val="1F2937"/>
-                          </a:solidFill>
-                          <a:latin typeface="Calibri"/>
-                        </a:rPr>
-                        <a:t>Desacopla el dispositivo del software; permite simularlo</a:t>
-                      </a:r>
-                    </a:p>
-                  </a:txBody>
-                  <a:tcPr marL="76200" marR="76200" marT="50800" marB="50800" anchor="ctr">
-                    <a:solidFill>
-                      <a:srgbClr val="F3F4F6"/>
-                    </a:solidFill>
-                  </a:tcPr>
-                </a:tc>
-              </a:tr>
-              <a:tr h="441959">
-                <a:tc>
-                  <a:txBody>
-                    <a:bodyPr wrap="square"/>
-                    <a:lstStyle/>
-                    <a:p>
-                      <a:pPr algn="l"/>
-                      <a:r>
-                        <a:rPr sz="1200">
-                          <a:solidFill>
-                            <a:srgbClr val="1F2937"/>
-                          </a:solidFill>
-                          <a:latin typeface="Calibri"/>
-                        </a:rPr>
-                        <a:t>Backend 🔨</a:t>
-                      </a:r>
-                    </a:p>
-                  </a:txBody>
-                  <a:tcPr marL="76200" marR="76200" marT="50800" marB="50800" anchor="ctr">
-                    <a:solidFill>
-                      <a:srgbClr val="FFFFFF"/>
-                    </a:solidFill>
-                  </a:tcPr>
-                </a:tc>
-                <a:tc>
-                  <a:txBody>
-                    <a:bodyPr wrap="square"/>
-                    <a:lstStyle/>
-                    <a:p>
-                      <a:pPr algn="l"/>
-                      <a:r>
-                        <a:rPr sz="1200">
-                          <a:solidFill>
-                            <a:srgbClr val="1F2937"/>
-                          </a:solidFill>
-                          <a:latin typeface="Calibri"/>
-                        </a:rPr>
-                        <a:t>FastAPI</a:t>
-                      </a:r>
-                    </a:p>
-                  </a:txBody>
-                  <a:tcPr marL="76200" marR="76200" marT="50800" marB="50800" anchor="ctr">
-                    <a:solidFill>
-                      <a:srgbClr val="FFFFFF"/>
-                    </a:solidFill>
-                  </a:tcPr>
-                </a:tc>
-                <a:tc>
-                  <a:txBody>
-                    <a:bodyPr wrap="square"/>
-                    <a:lstStyle/>
-                    <a:p>
-                      <a:pPr algn="l"/>
-                      <a:r>
-                        <a:rPr sz="1200">
-                          <a:solidFill>
-                            <a:srgbClr val="1F2937"/>
-                          </a:solidFill>
-                          <a:latin typeface="Calibri"/>
-                        </a:rPr>
-                        <a:t>API REST asíncrona, documentación OpenAPI automática</a:t>
-                      </a:r>
-                    </a:p>
-                  </a:txBody>
-                  <a:tcPr marL="76200" marR="76200" marT="50800" marB="50800" anchor="ctr">
-                    <a:solidFill>
-                      <a:srgbClr val="FFFFFF"/>
-                    </a:solidFill>
-                  </a:tcPr>
-                </a:tc>
-              </a:tr>
-              <a:tr h="441959">
-                <a:tc>
-                  <a:txBody>
-                    <a:bodyPr wrap="square"/>
-                    <a:lstStyle/>
-                    <a:p>
-                      <a:pPr algn="l"/>
-                      <a:r>
-                        <a:rPr sz="1200">
-                          <a:solidFill>
-                            <a:srgbClr val="1F2937"/>
-                          </a:solidFill>
-                          <a:latin typeface="Calibri"/>
-                        </a:rPr>
-                        <a:t>Datos 🔨</a:t>
-                      </a:r>
-                    </a:p>
-                  </a:txBody>
-                  <a:tcPr marL="76200" marR="76200" marT="50800" marB="50800" anchor="ctr">
-                    <a:solidFill>
-                      <a:srgbClr val="F3F4F6"/>
-                    </a:solidFill>
-                  </a:tcPr>
-                </a:tc>
-                <a:tc>
-                  <a:txBody>
-                    <a:bodyPr wrap="square"/>
-                    <a:lstStyle/>
-                    <a:p>
-                      <a:pPr algn="l"/>
-                      <a:r>
-                        <a:rPr sz="1200">
-                          <a:solidFill>
-                            <a:srgbClr val="1F2937"/>
-                          </a:solidFill>
-                          <a:latin typeface="Calibri"/>
-                        </a:rPr>
-                        <a:t>PostgreSQL</a:t>
-                      </a:r>
-                    </a:p>
-                  </a:txBody>
-                  <a:tcPr marL="76200" marR="76200" marT="50800" marB="50800" anchor="ctr">
-                    <a:solidFill>
-                      <a:srgbClr val="F3F4F6"/>
-                    </a:solidFill>
-                  </a:tcPr>
-                </a:tc>
-                <a:tc>
-                  <a:txBody>
-                    <a:bodyPr wrap="square"/>
-                    <a:lstStyle/>
-                    <a:p>
-                      <a:pPr algn="l"/>
-                      <a:r>
-                        <a:rPr sz="1200">
-                          <a:solidFill>
-                            <a:srgbClr val="1F2937"/>
-                          </a:solidFill>
-                          <a:latin typeface="Calibri"/>
-                        </a:rPr>
-                        <a:t>Relacional, migraciones versionadas, índices históricos</a:t>
-                      </a:r>
-                    </a:p>
-                  </a:txBody>
-                  <a:tcPr marL="76200" marR="76200" marT="50800" marB="50800" anchor="ctr">
-                    <a:solidFill>
-                      <a:srgbClr val="F3F4F6"/>
-                    </a:solidFill>
-                  </a:tcPr>
-                </a:tc>
-              </a:tr>
-              <a:tr h="441959">
-                <a:tc>
-                  <a:txBody>
-                    <a:bodyPr wrap="square"/>
-                    <a:lstStyle/>
-                    <a:p>
-                      <a:pPr algn="l"/>
-                      <a:r>
-                        <a:rPr sz="1200">
-                          <a:solidFill>
-                            <a:srgbClr val="1F2937"/>
-                          </a:solidFill>
-                          <a:latin typeface="Calibri"/>
-                        </a:rPr>
-                        <a:t>Frontend 🔨</a:t>
-                      </a:r>
-                    </a:p>
-                  </a:txBody>
-                  <a:tcPr marL="76200" marR="76200" marT="50800" marB="50800" anchor="ctr">
-                    <a:solidFill>
-                      <a:srgbClr val="FFFFFF"/>
-                    </a:solidFill>
-                  </a:tcPr>
-                </a:tc>
-                <a:tc>
-                  <a:txBody>
-                    <a:bodyPr wrap="square"/>
-                    <a:lstStyle/>
-                    <a:p>
-                      <a:pPr algn="l"/>
-                      <a:r>
-                        <a:rPr sz="1200">
-                          <a:solidFill>
-                            <a:srgbClr val="1F2937"/>
-                          </a:solidFill>
-                          <a:latin typeface="Calibri"/>
-                        </a:rPr>
-                        <a:t>React.js</a:t>
-                      </a:r>
-                    </a:p>
-                  </a:txBody>
-                  <a:tcPr marL="76200" marR="76200" marT="50800" marB="50800" anchor="ctr">
-                    <a:solidFill>
-                      <a:srgbClr val="FFFFFF"/>
-                    </a:solidFill>
-                  </a:tcPr>
-                </a:tc>
-                <a:tc>
-                  <a:txBody>
-                    <a:bodyPr wrap="square"/>
-                    <a:lstStyle/>
-                    <a:p>
-                      <a:pPr algn="l"/>
-                      <a:r>
-                        <a:rPr sz="1200">
-                          <a:solidFill>
-                            <a:srgbClr val="1F2937"/>
-                          </a:solidFill>
-                          <a:latin typeface="Calibri"/>
-                        </a:rPr>
-                        <a:t>Componentes reutilizables para el dashboard en vivo</a:t>
-                      </a:r>
-                    </a:p>
-                  </a:txBody>
-                  <a:tcPr marL="76200" marR="76200" marT="50800" marB="50800" anchor="ctr">
-                    <a:solidFill>
-                      <a:srgbClr val="FFFFFF"/>
-                    </a:solidFill>
-                  </a:tcPr>
-                </a:tc>
-              </a:tr>
-              <a:tr h="441967">
-                <a:tc>
-                  <a:txBody>
-                    <a:bodyPr wrap="square"/>
-                    <a:lstStyle/>
-                    <a:p>
-                      <a:pPr algn="l"/>
-                      <a:r>
-                        <a:rPr sz="1200">
-                          <a:solidFill>
-                            <a:srgbClr val="1F2937"/>
-                          </a:solidFill>
-                          <a:latin typeface="Calibri"/>
-                        </a:rPr>
-                        <a:t>Notificaciones 🔨</a:t>
-                      </a:r>
-                    </a:p>
-                  </a:txBody>
-                  <a:tcPr marL="76200" marR="76200" marT="50800" marB="50800" anchor="ctr">
-                    <a:solidFill>
-                      <a:srgbClr val="F3F4F6"/>
-                    </a:solidFill>
-                  </a:tcPr>
-                </a:tc>
-                <a:tc>
-                  <a:txBody>
-                    <a:bodyPr wrap="square"/>
-                    <a:lstStyle/>
-                    <a:p>
-                      <a:pPr algn="l"/>
-                      <a:r>
-                        <a:rPr sz="1200">
-                          <a:solidFill>
-                            <a:srgbClr val="1F2937"/>
-                          </a:solidFill>
-                          <a:latin typeface="Calibri"/>
-                        </a:rPr>
-                        <a:t>Twilio (SMS) · SMTP (correo)</a:t>
-                      </a:r>
-                    </a:p>
-                  </a:txBody>
-                  <a:tcPr marL="76200" marR="76200" marT="50800" marB="50800" anchor="ctr">
-                    <a:solidFill>
-                      <a:srgbClr val="F3F4F6"/>
-                    </a:solidFill>
-                  </a:tcPr>
-                </a:tc>
-                <a:tc>
-                  <a:txBody>
-                    <a:bodyPr wrap="square"/>
-                    <a:lstStyle/>
-                    <a:p>
-                      <a:pPr algn="l"/>
-                      <a:r>
-                        <a:rPr sz="1200">
-                          <a:solidFill>
-                            <a:srgbClr val="1F2937"/>
-                          </a:solidFill>
-                          <a:latin typeface="Calibri"/>
-                        </a:rPr>
-                        <a:t>Canal redundante hacia el prevencionista</a:t>
-                      </a:r>
-                    </a:p>
-                  </a:txBody>
-                  <a:tcPr marL="76200" marR="76200" marT="50800" marB="50800" anchor="ctr">
-                    <a:solidFill>
-                      <a:srgbClr val="F3F4F6"/>
-                    </a:solidFill>
-                  </a:tcPr>
-                </a:tc>
-              </a:tr>
-            </a:tbl>
-          </a:graphicData>
-        </a:graphic>
-      </p:graphicFrame>
-      <p:sp>
-        <p:nvSpPr>
-          <p:cNvPr id="8" name="TextBox 7"/>
-          <p:cNvSpPr txBox="1"/>
-          <p:nvPr/>
-        </p:nvSpPr>
-        <p:spPr>
-          <a:xfrm>
-            <a:off x="548640" y="5669280"/>
-            <a:ext cx="11064240" cy="457200"/>
-          </a:xfrm>
-          <a:prstGeom prst="rect">
-            <a:avLst/>
-          </a:prstGeom>
-          <a:noFill/>
-        </p:spPr>
-        <p:txBody>
-          <a:bodyPr wrap="square" anchor="t" lIns="0" rIns="0" tIns="0" bIns="0">
-            <a:spAutoFit/>
-          </a:bodyPr>
-          <a:lstStyle/>
-          <a:p>
-            <a:pPr algn="l">
-              <a:lnSpc>
-                <a:spcPct val="100000"/>
-              </a:lnSpc>
-            </a:pPr>
-            <a:r>
-              <a:rPr sz="1300" b="1" i="1">
-                <a:solidFill>
-                  <a:srgbClr val="B45309"/>
-                </a:solidFill>
-                <a:latin typeface="Calibri"/>
-              </a:rPr>
-              <a:t>No estamos investigando tecnología nueva: estamos integrando piezas ya probadas por separado.</a:t>
-            </a:r>
+            <a:endParaRPr/>
           </a:p>
         </p:txBody>
       </p:sp>
@@ -6134,6 +5223,7 @@
           <a:lstStyle/>
           <a:p>
             <a:pPr algn="ctr"/>
+            <a:endParaRPr/>
           </a:p>
         </p:txBody>
       </p:sp>
@@ -6154,7 +5244,7 @@
           <a:noFill/>
         </p:spPr>
         <p:txBody>
-          <a:bodyPr wrap="square" anchor="ctr" lIns="0" rIns="0" tIns="0" bIns="0">
+          <a:bodyPr wrap="square" lIns="0" tIns="0" rIns="0" bIns="0" anchor="ctr">
             <a:spAutoFit/>
           </a:bodyPr>
           <a:lstStyle/>
@@ -6193,7 +5283,7 @@
           <a:noFill/>
         </p:spPr>
         <p:txBody>
-          <a:bodyPr wrap="square" anchor="ctr" lIns="0" rIns="0" tIns="0" bIns="0">
+          <a:bodyPr wrap="square" lIns="0" tIns="0" rIns="0" bIns="0" anchor="ctr">
             <a:spAutoFit/>
           </a:bodyPr>
           <a:lstStyle/>
@@ -6215,6 +5305,366 @@
           </a:p>
         </p:txBody>
       </p:sp>
+      <p:pic>
+        <p:nvPicPr>
+          <p:cNvPr id="15" name="Gráfico 14">
+            <a:extLst>
+              <a:ext uri="{FF2B5EF4-FFF2-40B4-BE49-F238E27FC236}">
+                <a16:creationId xmlns:a16="http://schemas.microsoft.com/office/drawing/2014/main" id="{6AAADCF1-9882-409D-9DE4-26BDBF3D9566}"/>
+              </a:ext>
+            </a:extLst>
+          </p:cNvPr>
+          <p:cNvPicPr>
+            <a:picLocks noChangeAspect="1"/>
+          </p:cNvPicPr>
+          <p:nvPr/>
+        </p:nvPicPr>
+        <p:blipFill>
+          <a:blip r:embed="rId3">
+            <a:extLst>
+              <a:ext uri="{96DAC541-7B7A-43D3-8B79-37D633B846F1}">
+                <asvg:svgBlip xmlns:asvg="http://schemas.microsoft.com/office/drawing/2016/SVG/main" r:embed="rId4"/>
+              </a:ext>
+            </a:extLst>
+          </a:blip>
+          <a:stretch>
+            <a:fillRect/>
+          </a:stretch>
+        </p:blipFill>
+        <p:spPr>
+          <a:xfrm>
+            <a:off x="2256479" y="1915147"/>
+            <a:ext cx="1404000" cy="1419149"/>
+          </a:xfrm>
+          <a:prstGeom prst="rect">
+            <a:avLst/>
+          </a:prstGeom>
+        </p:spPr>
+      </p:pic>
+      <p:pic>
+        <p:nvPicPr>
+          <p:cNvPr id="17" name="Gráfico 16">
+            <a:extLst>
+              <a:ext uri="{FF2B5EF4-FFF2-40B4-BE49-F238E27FC236}">
+                <a16:creationId xmlns:a16="http://schemas.microsoft.com/office/drawing/2014/main" id="{83B26D4C-F9C5-449A-8BBC-0E5F170C23B7}"/>
+              </a:ext>
+            </a:extLst>
+          </p:cNvPr>
+          <p:cNvPicPr>
+            <a:picLocks noChangeAspect="1"/>
+          </p:cNvPicPr>
+          <p:nvPr/>
+        </p:nvPicPr>
+        <p:blipFill>
+          <a:blip r:embed="rId5">
+            <a:extLst>
+              <a:ext uri="{96DAC541-7B7A-43D3-8B79-37D633B846F1}">
+                <asvg:svgBlip xmlns:asvg="http://schemas.microsoft.com/office/drawing/2016/SVG/main" r:embed="rId6"/>
+              </a:ext>
+            </a:extLst>
+          </a:blip>
+          <a:stretch>
+            <a:fillRect/>
+          </a:stretch>
+        </p:blipFill>
+        <p:spPr>
+          <a:xfrm>
+            <a:off x="5348052" y="1849305"/>
+            <a:ext cx="1404000" cy="1404000"/>
+          </a:xfrm>
+          <a:prstGeom prst="rect">
+            <a:avLst/>
+          </a:prstGeom>
+        </p:spPr>
+      </p:pic>
+      <p:pic>
+        <p:nvPicPr>
+          <p:cNvPr id="19" name="Gráfico 18">
+            <a:extLst>
+              <a:ext uri="{FF2B5EF4-FFF2-40B4-BE49-F238E27FC236}">
+                <a16:creationId xmlns:a16="http://schemas.microsoft.com/office/drawing/2014/main" id="{CDEB32DA-BBCF-4AAD-8374-C34D13B056C5}"/>
+              </a:ext>
+            </a:extLst>
+          </p:cNvPr>
+          <p:cNvPicPr>
+            <a:picLocks noChangeAspect="1"/>
+          </p:cNvPicPr>
+          <p:nvPr/>
+        </p:nvPicPr>
+        <p:blipFill>
+          <a:blip r:embed="rId7">
+            <a:extLst>
+              <a:ext uri="{96DAC541-7B7A-43D3-8B79-37D633B846F1}">
+                <asvg:svgBlip xmlns:asvg="http://schemas.microsoft.com/office/drawing/2016/SVG/main" r:embed="rId8"/>
+              </a:ext>
+            </a:extLst>
+          </a:blip>
+          <a:stretch>
+            <a:fillRect/>
+          </a:stretch>
+        </p:blipFill>
+        <p:spPr>
+          <a:xfrm>
+            <a:off x="3757153" y="3628857"/>
+            <a:ext cx="1404000" cy="1404000"/>
+          </a:xfrm>
+          <a:prstGeom prst="rect">
+            <a:avLst/>
+          </a:prstGeom>
+        </p:spPr>
+      </p:pic>
+      <p:pic>
+        <p:nvPicPr>
+          <p:cNvPr id="21" name="Gráfico 20">
+            <a:extLst>
+              <a:ext uri="{FF2B5EF4-FFF2-40B4-BE49-F238E27FC236}">
+                <a16:creationId xmlns:a16="http://schemas.microsoft.com/office/drawing/2014/main" id="{1B8E9ADD-0EED-43BF-8F35-12185B966B86}"/>
+              </a:ext>
+            </a:extLst>
+          </p:cNvPr>
+          <p:cNvPicPr>
+            <a:picLocks noChangeAspect="1"/>
+          </p:cNvPicPr>
+          <p:nvPr/>
+        </p:nvPicPr>
+        <p:blipFill>
+          <a:blip r:embed="rId9">
+            <a:extLst>
+              <a:ext uri="{96DAC541-7B7A-43D3-8B79-37D633B846F1}">
+                <asvg:svgBlip xmlns:asvg="http://schemas.microsoft.com/office/drawing/2016/SVG/main" r:embed="rId10"/>
+              </a:ext>
+            </a:extLst>
+          </a:blip>
+          <a:stretch>
+            <a:fillRect/>
+          </a:stretch>
+        </p:blipFill>
+        <p:spPr>
+          <a:xfrm>
+            <a:off x="5348052" y="3607962"/>
+            <a:ext cx="1404000" cy="1404000"/>
+          </a:xfrm>
+          <a:prstGeom prst="rect">
+            <a:avLst/>
+          </a:prstGeom>
+        </p:spPr>
+      </p:pic>
+      <p:pic>
+        <p:nvPicPr>
+          <p:cNvPr id="23" name="Gráfico 22">
+            <a:extLst>
+              <a:ext uri="{FF2B5EF4-FFF2-40B4-BE49-F238E27FC236}">
+                <a16:creationId xmlns:a16="http://schemas.microsoft.com/office/drawing/2014/main" id="{70EF4573-A30F-47D6-A2ED-FBC41844DBAE}"/>
+              </a:ext>
+            </a:extLst>
+          </p:cNvPr>
+          <p:cNvPicPr>
+            <a:picLocks noChangeAspect="1"/>
+          </p:cNvPicPr>
+          <p:nvPr/>
+        </p:nvPicPr>
+        <p:blipFill>
+          <a:blip r:embed="rId11">
+            <a:extLst>
+              <a:ext uri="{96DAC541-7B7A-43D3-8B79-37D633B846F1}">
+                <asvg:svgBlip xmlns:asvg="http://schemas.microsoft.com/office/drawing/2016/SVG/main" r:embed="rId12"/>
+              </a:ext>
+            </a:extLst>
+          </a:blip>
+          <a:stretch>
+            <a:fillRect/>
+          </a:stretch>
+        </p:blipFill>
+        <p:spPr>
+          <a:xfrm>
+            <a:off x="6938951" y="3668961"/>
+            <a:ext cx="1404000" cy="1404000"/>
+          </a:xfrm>
+          <a:prstGeom prst="rect">
+            <a:avLst/>
+          </a:prstGeom>
+        </p:spPr>
+      </p:pic>
+      <p:pic>
+        <p:nvPicPr>
+          <p:cNvPr id="25" name="Gráfico 24">
+            <a:extLst>
+              <a:ext uri="{FF2B5EF4-FFF2-40B4-BE49-F238E27FC236}">
+                <a16:creationId xmlns:a16="http://schemas.microsoft.com/office/drawing/2014/main" id="{EEA546F8-1CF2-4839-AFC5-DE611E9D3D23}"/>
+              </a:ext>
+            </a:extLst>
+          </p:cNvPr>
+          <p:cNvPicPr>
+            <a:picLocks noChangeAspect="1"/>
+          </p:cNvPicPr>
+          <p:nvPr/>
+        </p:nvPicPr>
+        <p:blipFill>
+          <a:blip r:embed="rId13">
+            <a:extLst>
+              <a:ext uri="{96DAC541-7B7A-43D3-8B79-37D633B846F1}">
+                <asvg:svgBlip xmlns:asvg="http://schemas.microsoft.com/office/drawing/2016/SVG/main" r:embed="rId14"/>
+              </a:ext>
+            </a:extLst>
+          </a:blip>
+          <a:stretch>
+            <a:fillRect/>
+          </a:stretch>
+        </p:blipFill>
+        <p:spPr>
+          <a:xfrm>
+            <a:off x="8358880" y="3664191"/>
+            <a:ext cx="1404000" cy="1404000"/>
+          </a:xfrm>
+          <a:prstGeom prst="rect">
+            <a:avLst/>
+          </a:prstGeom>
+        </p:spPr>
+      </p:pic>
+      <p:pic>
+        <p:nvPicPr>
+          <p:cNvPr id="27" name="Gráfico 26">
+            <a:extLst>
+              <a:ext uri="{FF2B5EF4-FFF2-40B4-BE49-F238E27FC236}">
+                <a16:creationId xmlns:a16="http://schemas.microsoft.com/office/drawing/2014/main" id="{0C02128D-E4E5-4518-994B-84A1EDE19698}"/>
+              </a:ext>
+            </a:extLst>
+          </p:cNvPr>
+          <p:cNvPicPr>
+            <a:picLocks noChangeAspect="1"/>
+          </p:cNvPicPr>
+          <p:nvPr/>
+        </p:nvPicPr>
+        <p:blipFill>
+          <a:blip r:embed="rId15">
+            <a:extLst>
+              <a:ext uri="{96DAC541-7B7A-43D3-8B79-37D633B846F1}">
+                <asvg:svgBlip xmlns:asvg="http://schemas.microsoft.com/office/drawing/2016/SVG/main" r:embed="rId16"/>
+              </a:ext>
+            </a:extLst>
+          </a:blip>
+          <a:stretch>
+            <a:fillRect/>
+          </a:stretch>
+        </p:blipFill>
+        <p:spPr>
+          <a:xfrm>
+            <a:off x="2166254" y="3678501"/>
+            <a:ext cx="1404000" cy="1404000"/>
+          </a:xfrm>
+          <a:prstGeom prst="rect">
+            <a:avLst/>
+          </a:prstGeom>
+        </p:spPr>
+      </p:pic>
+      <p:pic>
+        <p:nvPicPr>
+          <p:cNvPr id="29" name="Gráfico 28">
+            <a:extLst>
+              <a:ext uri="{FF2B5EF4-FFF2-40B4-BE49-F238E27FC236}">
+                <a16:creationId xmlns:a16="http://schemas.microsoft.com/office/drawing/2014/main" id="{7090D70E-11CC-4387-9569-0BB5FD8E354C}"/>
+              </a:ext>
+            </a:extLst>
+          </p:cNvPr>
+          <p:cNvPicPr>
+            <a:picLocks noChangeAspect="1"/>
+          </p:cNvPicPr>
+          <p:nvPr/>
+        </p:nvPicPr>
+        <p:blipFill>
+          <a:blip r:embed="rId17">
+            <a:extLst>
+              <a:ext uri="{96DAC541-7B7A-43D3-8B79-37D633B846F1}">
+                <asvg:svgBlip xmlns:asvg="http://schemas.microsoft.com/office/drawing/2016/SVG/main" r:embed="rId18"/>
+              </a:ext>
+            </a:extLst>
+          </a:blip>
+          <a:stretch>
+            <a:fillRect/>
+          </a:stretch>
+        </p:blipFill>
+        <p:spPr>
+          <a:xfrm>
+            <a:off x="3802265" y="1895391"/>
+            <a:ext cx="1404000" cy="1404000"/>
+          </a:xfrm>
+          <a:prstGeom prst="rect">
+            <a:avLst/>
+          </a:prstGeom>
+        </p:spPr>
+      </p:pic>
+      <p:pic>
+        <p:nvPicPr>
+          <p:cNvPr id="31" name="Gráfico 30">
+            <a:extLst>
+              <a:ext uri="{FF2B5EF4-FFF2-40B4-BE49-F238E27FC236}">
+                <a16:creationId xmlns:a16="http://schemas.microsoft.com/office/drawing/2014/main" id="{BC3406DD-1FC2-4CA9-A923-BC226B425094}"/>
+              </a:ext>
+            </a:extLst>
+          </p:cNvPr>
+          <p:cNvPicPr>
+            <a:picLocks noChangeAspect="1"/>
+          </p:cNvPicPr>
+          <p:nvPr/>
+        </p:nvPicPr>
+        <p:blipFill>
+          <a:blip r:embed="rId19">
+            <a:extLst>
+              <a:ext uri="{96DAC541-7B7A-43D3-8B79-37D633B846F1}">
+                <asvg:svgBlip xmlns:asvg="http://schemas.microsoft.com/office/drawing/2016/SVG/main" r:embed="rId20"/>
+              </a:ext>
+            </a:extLst>
+          </a:blip>
+          <a:stretch>
+            <a:fillRect/>
+          </a:stretch>
+        </p:blipFill>
+        <p:spPr>
+          <a:xfrm>
+            <a:off x="7043256" y="1922721"/>
+            <a:ext cx="1195389" cy="1404000"/>
+          </a:xfrm>
+          <a:prstGeom prst="rect">
+            <a:avLst/>
+          </a:prstGeom>
+        </p:spPr>
+      </p:pic>
+      <p:pic>
+        <p:nvPicPr>
+          <p:cNvPr id="33" name="Gráfico 32">
+            <a:extLst>
+              <a:ext uri="{FF2B5EF4-FFF2-40B4-BE49-F238E27FC236}">
+                <a16:creationId xmlns:a16="http://schemas.microsoft.com/office/drawing/2014/main" id="{F14FCA51-39BD-4432-91CF-0634B88121D7}"/>
+              </a:ext>
+            </a:extLst>
+          </p:cNvPr>
+          <p:cNvPicPr>
+            <a:picLocks noChangeAspect="1"/>
+          </p:cNvPicPr>
+          <p:nvPr/>
+        </p:nvPicPr>
+        <p:blipFill>
+          <a:blip r:embed="rId21">
+            <a:extLst>
+              <a:ext uri="{96DAC541-7B7A-43D3-8B79-37D633B846F1}">
+                <asvg:svgBlip xmlns:asvg="http://schemas.microsoft.com/office/drawing/2016/SVG/main" r:embed="rId22"/>
+              </a:ext>
+            </a:extLst>
+          </a:blip>
+          <a:stretch>
+            <a:fillRect/>
+          </a:stretch>
+        </p:blipFill>
+        <p:spPr>
+          <a:xfrm>
+            <a:off x="8358881" y="1954461"/>
+            <a:ext cx="1403999" cy="1403999"/>
+          </a:xfrm>
+          <a:prstGeom prst="rect">
+            <a:avLst/>
+          </a:prstGeom>
+        </p:spPr>
+      </p:pic>
     </p:spTree>
   </p:cSld>
   <p:clrMapOvr>
@@ -6224,7 +5674,7 @@
 </file>
 
 <file path=ppt/slides/slide11.xml><?xml version="1.0" encoding="utf-8"?>
-<p:sld xmlns:a="http://schemas.openxmlformats.org/drawingml/2006/main" xmlns:p="http://schemas.openxmlformats.org/presentationml/2006/main" xmlns:r="http://schemas.openxmlformats.org/officeDocument/2006/relationships">
+<p:sld xmlns:a="http://schemas.openxmlformats.org/drawingml/2006/main" xmlns:r="http://schemas.openxmlformats.org/officeDocument/2006/relationships" xmlns:p="http://schemas.openxmlformats.org/presentationml/2006/main">
   <p:cSld>
     <p:spTree>
       <p:nvGrpSpPr>
@@ -6232,7 +5682,14 @@
         <p:cNvGrpSpPr/>
         <p:nvPr/>
       </p:nvGrpSpPr>
-      <p:grpSpPr/>
+      <p:grpSpPr>
+        <a:xfrm>
+          <a:off x="0" y="0"/>
+          <a:ext cx="0" cy="0"/>
+          <a:chOff x="0" y="0"/>
+          <a:chExt cx="0" cy="0"/>
+        </a:xfrm>
+      </p:grpSpPr>
       <p:sp>
         <p:nvSpPr>
           <p:cNvPr id="2" name="Rectangle 1"/>
@@ -6274,6 +5731,7 @@
           <a:lstStyle/>
           <a:p>
             <a:pPr algn="ctr"/>
+            <a:endParaRPr/>
           </a:p>
         </p:txBody>
       </p:sp>
@@ -6318,6 +5776,7 @@
           <a:lstStyle/>
           <a:p>
             <a:pPr algn="ctr"/>
+            <a:endParaRPr/>
           </a:p>
         </p:txBody>
       </p:sp>
@@ -6338,7 +5797,7 @@
           <a:noFill/>
         </p:spPr>
         <p:txBody>
-          <a:bodyPr wrap="square" anchor="t" lIns="0" rIns="0" tIns="0" bIns="0">
+          <a:bodyPr wrap="square" lIns="0" tIns="0" rIns="0" bIns="0" anchor="t">
             <a:spAutoFit/>
           </a:bodyPr>
           <a:lstStyle/>
@@ -6377,7 +5836,7 @@
           <a:noFill/>
         </p:spPr>
         <p:txBody>
-          <a:bodyPr wrap="square" anchor="t" lIns="0" rIns="0" tIns="0" bIns="0">
+          <a:bodyPr wrap="square" lIns="0" tIns="0" rIns="0" bIns="0" anchor="t">
             <a:spAutoFit/>
           </a:bodyPr>
           <a:lstStyle/>
@@ -6440,6 +5899,7 @@
           <a:lstStyle/>
           <a:p>
             <a:pPr algn="ctr"/>
+            <a:endParaRPr/>
           </a:p>
         </p:txBody>
       </p:sp>
@@ -6486,6 +5946,7 @@
           <a:lstStyle/>
           <a:p>
             <a:pPr algn="ctr"/>
+            <a:endParaRPr/>
           </a:p>
         </p:txBody>
       </p:sp>
@@ -6506,7 +5967,7 @@
           <a:noFill/>
         </p:spPr>
         <p:txBody>
-          <a:bodyPr wrap="square" anchor="t" lIns="0" rIns="0" tIns="0" bIns="0">
+          <a:bodyPr wrap="square" lIns="0" tIns="0" rIns="0" bIns="0" anchor="t">
             <a:spAutoFit/>
           </a:bodyPr>
           <a:lstStyle/>
@@ -6545,7 +6006,7 @@
           <a:noFill/>
         </p:spPr>
         <p:txBody>
-          <a:bodyPr wrap="square" anchor="t" lIns="0" rIns="0" tIns="0" bIns="0">
+          <a:bodyPr wrap="square" lIns="0" tIns="0" rIns="0" bIns="0" anchor="t">
             <a:spAutoFit/>
           </a:bodyPr>
           <a:lstStyle/>
@@ -6624,6 +6085,7 @@
           <a:lstStyle/>
           <a:p>
             <a:pPr algn="ctr"/>
+            <a:endParaRPr/>
           </a:p>
         </p:txBody>
       </p:sp>
@@ -6670,6 +6132,7 @@
           <a:lstStyle/>
           <a:p>
             <a:pPr algn="ctr"/>
+            <a:endParaRPr/>
           </a:p>
         </p:txBody>
       </p:sp>
@@ -6690,7 +6153,7 @@
           <a:noFill/>
         </p:spPr>
         <p:txBody>
-          <a:bodyPr wrap="square" anchor="t" lIns="0" rIns="0" tIns="0" bIns="0">
+          <a:bodyPr wrap="square" lIns="0" tIns="0" rIns="0" bIns="0" anchor="t">
             <a:spAutoFit/>
           </a:bodyPr>
           <a:lstStyle/>
@@ -6729,7 +6192,7 @@
           <a:noFill/>
         </p:spPr>
         <p:txBody>
-          <a:bodyPr wrap="square" anchor="t" lIns="0" rIns="0" tIns="0" bIns="0">
+          <a:bodyPr wrap="square" lIns="0" tIns="0" rIns="0" bIns="0" anchor="t">
             <a:spAutoFit/>
           </a:bodyPr>
           <a:lstStyle/>
@@ -6808,6 +6271,7 @@
           <a:lstStyle/>
           <a:p>
             <a:pPr algn="ctr"/>
+            <a:endParaRPr/>
           </a:p>
         </p:txBody>
       </p:sp>
@@ -6854,6 +6318,7 @@
           <a:lstStyle/>
           <a:p>
             <a:pPr algn="ctr"/>
+            <a:endParaRPr/>
           </a:p>
         </p:txBody>
       </p:sp>
@@ -6874,7 +6339,7 @@
           <a:noFill/>
         </p:spPr>
         <p:txBody>
-          <a:bodyPr wrap="square" anchor="t" lIns="0" rIns="0" tIns="0" bIns="0">
+          <a:bodyPr wrap="square" lIns="0" tIns="0" rIns="0" bIns="0" anchor="t">
             <a:spAutoFit/>
           </a:bodyPr>
           <a:lstStyle/>
@@ -6913,7 +6378,7 @@
           <a:noFill/>
         </p:spPr>
         <p:txBody>
-          <a:bodyPr wrap="square" anchor="t" lIns="0" rIns="0" tIns="0" bIns="0">
+          <a:bodyPr wrap="square" lIns="0" tIns="0" rIns="0" bIns="0" anchor="t">
             <a:spAutoFit/>
           </a:bodyPr>
           <a:lstStyle/>
@@ -6992,6 +6457,7 @@
           <a:lstStyle/>
           <a:p>
             <a:pPr algn="ctr"/>
+            <a:endParaRPr/>
           </a:p>
         </p:txBody>
       </p:sp>
@@ -7038,6 +6504,7 @@
           <a:lstStyle/>
           <a:p>
             <a:pPr algn="ctr"/>
+            <a:endParaRPr/>
           </a:p>
         </p:txBody>
       </p:sp>
@@ -7058,7 +6525,7 @@
           <a:noFill/>
         </p:spPr>
         <p:txBody>
-          <a:bodyPr wrap="square" anchor="t" lIns="0" rIns="0" tIns="0" bIns="0">
+          <a:bodyPr wrap="square" lIns="0" tIns="0" rIns="0" bIns="0" anchor="t">
             <a:spAutoFit/>
           </a:bodyPr>
           <a:lstStyle/>
@@ -7097,7 +6564,7 @@
           <a:noFill/>
         </p:spPr>
         <p:txBody>
-          <a:bodyPr wrap="square" anchor="t" lIns="0" rIns="0" tIns="0" bIns="0">
+          <a:bodyPr wrap="square" lIns="0" tIns="0" rIns="0" bIns="0" anchor="t">
             <a:spAutoFit/>
           </a:bodyPr>
           <a:lstStyle/>
@@ -7152,7 +6619,7 @@
           <a:noFill/>
         </p:spPr>
         <p:txBody>
-          <a:bodyPr wrap="square" anchor="t" lIns="0" rIns="0" tIns="0" bIns="0">
+          <a:bodyPr wrap="square" lIns="0" tIns="0" rIns="0" bIns="0" anchor="t">
             <a:spAutoFit/>
           </a:bodyPr>
           <a:lstStyle/>
@@ -7191,7 +6658,7 @@
           <a:noFill/>
         </p:spPr>
         <p:txBody>
-          <a:bodyPr wrap="square" lIns="0" rIns="0" tIns="0" bIns="0">
+          <a:bodyPr wrap="square" lIns="0" tIns="0" rIns="0" bIns="0">
             <a:spAutoFit/>
           </a:bodyPr>
           <a:lstStyle/>
@@ -7380,6 +6847,7 @@
           <a:lstStyle/>
           <a:p>
             <a:pPr algn="ctr"/>
+            <a:endParaRPr/>
           </a:p>
         </p:txBody>
       </p:sp>
@@ -7400,7 +6868,7 @@
           <a:noFill/>
         </p:spPr>
         <p:txBody>
-          <a:bodyPr wrap="square" anchor="t" lIns="0" rIns="0" tIns="0" bIns="0">
+          <a:bodyPr wrap="square" lIns="0" tIns="0" rIns="0" bIns="0" anchor="t">
             <a:spAutoFit/>
           </a:bodyPr>
           <a:lstStyle/>
@@ -7439,7 +6907,7 @@
           <a:noFill/>
         </p:spPr>
         <p:txBody>
-          <a:bodyPr wrap="square" anchor="t" lIns="0" rIns="0" tIns="0" bIns="0">
+          <a:bodyPr wrap="square" lIns="0" tIns="0" rIns="0" bIns="0" anchor="t">
             <a:spAutoFit/>
           </a:bodyPr>
           <a:lstStyle/>
@@ -7478,7 +6946,7 @@
           <a:noFill/>
         </p:spPr>
         <p:txBody>
-          <a:bodyPr wrap="square" anchor="t" lIns="0" rIns="0" tIns="0" bIns="0">
+          <a:bodyPr wrap="square" lIns="0" tIns="0" rIns="0" bIns="0" anchor="t">
             <a:spAutoFit/>
           </a:bodyPr>
           <a:lstStyle/>
@@ -7541,6 +7009,7 @@
           <a:lstStyle/>
           <a:p>
             <a:pPr algn="ctr"/>
+            <a:endParaRPr/>
           </a:p>
         </p:txBody>
       </p:sp>
@@ -7561,7 +7030,7 @@
           <a:noFill/>
         </p:spPr>
         <p:txBody>
-          <a:bodyPr wrap="square" anchor="ctr" lIns="0" rIns="0" tIns="0" bIns="0">
+          <a:bodyPr wrap="square" lIns="0" tIns="0" rIns="0" bIns="0" anchor="ctr">
             <a:spAutoFit/>
           </a:bodyPr>
           <a:lstStyle/>
@@ -7600,7 +7069,7 @@
           <a:noFill/>
         </p:spPr>
         <p:txBody>
-          <a:bodyPr wrap="square" anchor="ctr" lIns="0" rIns="0" tIns="0" bIns="0">
+          <a:bodyPr wrap="square" lIns="0" tIns="0" rIns="0" bIns="0" anchor="ctr">
             <a:spAutoFit/>
           </a:bodyPr>
           <a:lstStyle/>
@@ -7631,7 +7100,7 @@
 </file>
 
 <file path=ppt/slides/slide12.xml><?xml version="1.0" encoding="utf-8"?>
-<p:sld xmlns:a="http://schemas.openxmlformats.org/drawingml/2006/main" xmlns:p="http://schemas.openxmlformats.org/presentationml/2006/main" xmlns:r="http://schemas.openxmlformats.org/officeDocument/2006/relationships">
+<p:sld xmlns:a="http://schemas.openxmlformats.org/drawingml/2006/main" xmlns:r="http://schemas.openxmlformats.org/officeDocument/2006/relationships" xmlns:p="http://schemas.openxmlformats.org/presentationml/2006/main">
   <p:cSld>
     <p:spTree>
       <p:nvGrpSpPr>
@@ -7639,7 +7108,14 @@
         <p:cNvGrpSpPr/>
         <p:nvPr/>
       </p:nvGrpSpPr>
-      <p:grpSpPr/>
+      <p:grpSpPr>
+        <a:xfrm>
+          <a:off x="0" y="0"/>
+          <a:ext cx="0" cy="0"/>
+          <a:chOff x="0" y="0"/>
+          <a:chExt cx="0" cy="0"/>
+        </a:xfrm>
+      </p:grpSpPr>
       <p:sp>
         <p:nvSpPr>
           <p:cNvPr id="2" name="Rectangle 1"/>
@@ -7681,6 +7157,7 @@
           <a:lstStyle/>
           <a:p>
             <a:pPr algn="ctr"/>
+            <a:endParaRPr/>
           </a:p>
         </p:txBody>
       </p:sp>
@@ -7725,6 +7202,7 @@
           <a:lstStyle/>
           <a:p>
             <a:pPr algn="ctr"/>
+            <a:endParaRPr/>
           </a:p>
         </p:txBody>
       </p:sp>
@@ -7745,7 +7223,7 @@
           <a:noFill/>
         </p:spPr>
         <p:txBody>
-          <a:bodyPr wrap="square" anchor="t" lIns="0" rIns="0" tIns="0" bIns="0">
+          <a:bodyPr wrap="square" lIns="0" tIns="0" rIns="0" bIns="0" anchor="t">
             <a:spAutoFit/>
           </a:bodyPr>
           <a:lstStyle/>
@@ -7784,7 +7262,7 @@
           <a:noFill/>
         </p:spPr>
         <p:txBody>
-          <a:bodyPr wrap="square" anchor="t" lIns="0" rIns="0" tIns="0" bIns="0">
+          <a:bodyPr wrap="square" lIns="0" tIns="0" rIns="0" bIns="0" anchor="t">
             <a:spAutoFit/>
           </a:bodyPr>
           <a:lstStyle/>
@@ -7847,6 +7325,7 @@
           <a:lstStyle/>
           <a:p>
             <a:pPr algn="ctr"/>
+            <a:endParaRPr/>
           </a:p>
         </p:txBody>
       </p:sp>
@@ -7893,6 +7372,7 @@
           <a:lstStyle/>
           <a:p>
             <a:pPr algn="ctr"/>
+            <a:endParaRPr/>
           </a:p>
         </p:txBody>
       </p:sp>
@@ -7913,7 +7393,7 @@
           <a:noFill/>
         </p:spPr>
         <p:txBody>
-          <a:bodyPr wrap="square" anchor="ctr" lIns="0" rIns="0" tIns="0" bIns="0">
+          <a:bodyPr wrap="square" lIns="0" tIns="0" rIns="0" bIns="0" anchor="ctr">
             <a:spAutoFit/>
           </a:bodyPr>
           <a:lstStyle/>
@@ -7952,7 +7432,7 @@
           <a:noFill/>
         </p:spPr>
         <p:txBody>
-          <a:bodyPr wrap="square" anchor="t" lIns="0" rIns="0" tIns="0" bIns="0">
+          <a:bodyPr wrap="square" lIns="0" tIns="0" rIns="0" bIns="0" anchor="t">
             <a:spAutoFit/>
           </a:bodyPr>
           <a:lstStyle/>
@@ -7991,7 +7471,7 @@
           <a:noFill/>
         </p:spPr>
         <p:txBody>
-          <a:bodyPr wrap="square" anchor="t" lIns="0" rIns="0" tIns="0" bIns="0">
+          <a:bodyPr wrap="square" lIns="0" tIns="0" rIns="0" bIns="0" anchor="t">
             <a:spAutoFit/>
           </a:bodyPr>
           <a:lstStyle/>
@@ -8056,6 +7536,7 @@
           <a:lstStyle/>
           <a:p>
             <a:pPr algn="ctr"/>
+            <a:endParaRPr/>
           </a:p>
         </p:txBody>
       </p:sp>
@@ -8076,7 +7557,7 @@
           <a:noFill/>
         </p:spPr>
         <p:txBody>
-          <a:bodyPr wrap="square" anchor="ctr" lIns="0" rIns="0" tIns="0" bIns="0">
+          <a:bodyPr wrap="square" lIns="0" tIns="0" rIns="0" bIns="0" anchor="ctr">
             <a:spAutoFit/>
           </a:bodyPr>
           <a:lstStyle/>
@@ -8115,7 +7596,7 @@
           <a:noFill/>
         </p:spPr>
         <p:txBody>
-          <a:bodyPr wrap="square" anchor="t" lIns="0" rIns="0" tIns="0" bIns="0">
+          <a:bodyPr wrap="square" lIns="0" tIns="0" rIns="0" bIns="0" anchor="t">
             <a:spAutoFit/>
           </a:bodyPr>
           <a:lstStyle/>
@@ -8154,7 +7635,7 @@
           <a:noFill/>
         </p:spPr>
         <p:txBody>
-          <a:bodyPr wrap="square" anchor="t" lIns="0" rIns="0" tIns="0" bIns="0">
+          <a:bodyPr wrap="square" lIns="0" tIns="0" rIns="0" bIns="0" anchor="t">
             <a:spAutoFit/>
           </a:bodyPr>
           <a:lstStyle/>
@@ -8219,6 +7700,7 @@
           <a:lstStyle/>
           <a:p>
             <a:pPr algn="ctr"/>
+            <a:endParaRPr/>
           </a:p>
         </p:txBody>
       </p:sp>
@@ -8239,7 +7721,7 @@
           <a:noFill/>
         </p:spPr>
         <p:txBody>
-          <a:bodyPr wrap="square" anchor="ctr" lIns="0" rIns="0" tIns="0" bIns="0">
+          <a:bodyPr wrap="square" lIns="0" tIns="0" rIns="0" bIns="0" anchor="ctr">
             <a:spAutoFit/>
           </a:bodyPr>
           <a:lstStyle/>
@@ -8278,7 +7760,7 @@
           <a:noFill/>
         </p:spPr>
         <p:txBody>
-          <a:bodyPr wrap="square" anchor="t" lIns="0" rIns="0" tIns="0" bIns="0">
+          <a:bodyPr wrap="square" lIns="0" tIns="0" rIns="0" bIns="0" anchor="t">
             <a:spAutoFit/>
           </a:bodyPr>
           <a:lstStyle/>
@@ -8317,7 +7799,7 @@
           <a:noFill/>
         </p:spPr>
         <p:txBody>
-          <a:bodyPr wrap="square" anchor="t" lIns="0" rIns="0" tIns="0" bIns="0">
+          <a:bodyPr wrap="square" lIns="0" tIns="0" rIns="0" bIns="0" anchor="t">
             <a:spAutoFit/>
           </a:bodyPr>
           <a:lstStyle/>
@@ -8382,6 +7864,7 @@
           <a:lstStyle/>
           <a:p>
             <a:pPr algn="ctr"/>
+            <a:endParaRPr/>
           </a:p>
         </p:txBody>
       </p:sp>
@@ -8402,7 +7885,7 @@
           <a:noFill/>
         </p:spPr>
         <p:txBody>
-          <a:bodyPr wrap="square" anchor="ctr" lIns="0" rIns="0" tIns="0" bIns="0">
+          <a:bodyPr wrap="square" lIns="0" tIns="0" rIns="0" bIns="0" anchor="ctr">
             <a:spAutoFit/>
           </a:bodyPr>
           <a:lstStyle/>
@@ -8441,7 +7924,7 @@
           <a:noFill/>
         </p:spPr>
         <p:txBody>
-          <a:bodyPr wrap="square" anchor="t" lIns="0" rIns="0" tIns="0" bIns="0">
+          <a:bodyPr wrap="square" lIns="0" tIns="0" rIns="0" bIns="0" anchor="t">
             <a:spAutoFit/>
           </a:bodyPr>
           <a:lstStyle/>
@@ -8480,7 +7963,7 @@
           <a:noFill/>
         </p:spPr>
         <p:txBody>
-          <a:bodyPr wrap="square" anchor="t" lIns="0" rIns="0" tIns="0" bIns="0">
+          <a:bodyPr wrap="square" lIns="0" tIns="0" rIns="0" bIns="0" anchor="t">
             <a:spAutoFit/>
           </a:bodyPr>
           <a:lstStyle/>
@@ -8519,7 +8002,7 @@
           <a:noFill/>
         </p:spPr>
         <p:txBody>
-          <a:bodyPr wrap="square" anchor="t" lIns="0" rIns="0" tIns="0" bIns="0">
+          <a:bodyPr wrap="square" lIns="0" tIns="0" rIns="0" bIns="0" anchor="t">
             <a:spAutoFit/>
           </a:bodyPr>
           <a:lstStyle/>
@@ -8582,6 +8065,7 @@
           <a:lstStyle/>
           <a:p>
             <a:pPr algn="ctr"/>
+            <a:endParaRPr/>
           </a:p>
         </p:txBody>
       </p:sp>
@@ -8602,7 +8086,7 @@
           <a:noFill/>
         </p:spPr>
         <p:txBody>
-          <a:bodyPr wrap="square" anchor="ctr" lIns="0" rIns="0" tIns="0" bIns="0">
+          <a:bodyPr wrap="square" lIns="0" tIns="0" rIns="0" bIns="0" anchor="ctr">
             <a:spAutoFit/>
           </a:bodyPr>
           <a:lstStyle/>
@@ -8641,7 +8125,7 @@
           <a:noFill/>
         </p:spPr>
         <p:txBody>
-          <a:bodyPr wrap="square" anchor="ctr" lIns="0" rIns="0" tIns="0" bIns="0">
+          <a:bodyPr wrap="square" lIns="0" tIns="0" rIns="0" bIns="0" anchor="ctr">
             <a:spAutoFit/>
           </a:bodyPr>
           <a:lstStyle/>
@@ -8672,7 +8156,7 @@
 </file>
 
 <file path=ppt/slides/slide13.xml><?xml version="1.0" encoding="utf-8"?>
-<p:sld xmlns:a="http://schemas.openxmlformats.org/drawingml/2006/main" xmlns:p="http://schemas.openxmlformats.org/presentationml/2006/main" xmlns:r="http://schemas.openxmlformats.org/officeDocument/2006/relationships">
+<p:sld xmlns:a="http://schemas.openxmlformats.org/drawingml/2006/main" xmlns:r="http://schemas.openxmlformats.org/officeDocument/2006/relationships" xmlns:p="http://schemas.openxmlformats.org/presentationml/2006/main">
   <p:cSld>
     <p:spTree>
       <p:nvGrpSpPr>
@@ -8680,7 +8164,14 @@
         <p:cNvGrpSpPr/>
         <p:nvPr/>
       </p:nvGrpSpPr>
-      <p:grpSpPr/>
+      <p:grpSpPr>
+        <a:xfrm>
+          <a:off x="0" y="0"/>
+          <a:ext cx="0" cy="0"/>
+          <a:chOff x="0" y="0"/>
+          <a:chExt cx="0" cy="0"/>
+        </a:xfrm>
+      </p:grpSpPr>
       <p:sp>
         <p:nvSpPr>
           <p:cNvPr id="2" name="Rectangle 1"/>
@@ -8722,6 +8213,7 @@
           <a:lstStyle/>
           <a:p>
             <a:pPr algn="ctr"/>
+            <a:endParaRPr/>
           </a:p>
         </p:txBody>
       </p:sp>
@@ -8766,6 +8258,7 @@
           <a:lstStyle/>
           <a:p>
             <a:pPr algn="ctr"/>
+            <a:endParaRPr/>
           </a:p>
         </p:txBody>
       </p:sp>
@@ -8786,7 +8279,7 @@
           <a:noFill/>
         </p:spPr>
         <p:txBody>
-          <a:bodyPr wrap="square" anchor="t" lIns="0" rIns="0" tIns="0" bIns="0">
+          <a:bodyPr wrap="square" lIns="0" tIns="0" rIns="0" bIns="0" anchor="t">
             <a:spAutoFit/>
           </a:bodyPr>
           <a:lstStyle/>
@@ -8825,7 +8318,7 @@
           <a:noFill/>
         </p:spPr>
         <p:txBody>
-          <a:bodyPr wrap="square" anchor="t" lIns="0" rIns="0" tIns="0" bIns="0">
+          <a:bodyPr wrap="square" lIns="0" tIns="0" rIns="0" bIns="0" anchor="t">
             <a:spAutoFit/>
           </a:bodyPr>
           <a:lstStyle/>
@@ -8888,6 +8381,7 @@
           <a:lstStyle/>
           <a:p>
             <a:pPr algn="ctr"/>
+            <a:endParaRPr/>
           </a:p>
         </p:txBody>
       </p:sp>
@@ -8910,15 +8404,39 @@
                 <a:tableStyleId>{5C22544A-7EE6-4342-B048-85BDC9FD1C3A}</a:tableStyleId>
               </a:tblPr>
               <a:tblGrid>
-                <a:gridCol w="640080"/>
-                <a:gridCol w="4206239"/>
-                <a:gridCol w="1188720"/>
-                <a:gridCol w="5029200"/>
+                <a:gridCol w="640080">
+                  <a:extLst>
+                    <a:ext uri="{9D8B030D-6E8A-4147-A177-3AD203B41FA5}">
+                      <a16:colId xmlns:a16="http://schemas.microsoft.com/office/drawing/2014/main" val="20000"/>
+                    </a:ext>
+                  </a:extLst>
+                </a:gridCol>
+                <a:gridCol w="4206239">
+                  <a:extLst>
+                    <a:ext uri="{9D8B030D-6E8A-4147-A177-3AD203B41FA5}">
+                      <a16:colId xmlns:a16="http://schemas.microsoft.com/office/drawing/2014/main" val="20001"/>
+                    </a:ext>
+                  </a:extLst>
+                </a:gridCol>
+                <a:gridCol w="1188720">
+                  <a:extLst>
+                    <a:ext uri="{9D8B030D-6E8A-4147-A177-3AD203B41FA5}">
+                      <a16:colId xmlns:a16="http://schemas.microsoft.com/office/drawing/2014/main" val="20002"/>
+                    </a:ext>
+                  </a:extLst>
+                </a:gridCol>
+                <a:gridCol w="5029200">
+                  <a:extLst>
+                    <a:ext uri="{9D8B030D-6E8A-4147-A177-3AD203B41FA5}">
+                      <a16:colId xmlns:a16="http://schemas.microsoft.com/office/drawing/2014/main" val="20003"/>
+                    </a:ext>
+                  </a:extLst>
+                </a:gridCol>
               </a:tblGrid>
               <a:tr h="533400">
                 <a:tc>
                   <a:txBody>
-                    <a:bodyPr wrap="square"/>
+                    <a:bodyPr/>
                     <a:lstStyle/>
                     <a:p>
                       <a:pPr algn="ctr"/>
@@ -8941,7 +8459,7 @@
                 </a:tc>
                 <a:tc>
                   <a:txBody>
-                    <a:bodyPr wrap="square"/>
+                    <a:bodyPr/>
                     <a:lstStyle/>
                     <a:p>
                       <a:pPr algn="l"/>
@@ -8964,7 +8482,7 @@
                 </a:tc>
                 <a:tc>
                   <a:txBody>
-                    <a:bodyPr wrap="square"/>
+                    <a:bodyPr/>
                     <a:lstStyle/>
                     <a:p>
                       <a:pPr algn="ctr"/>
@@ -8987,7 +8505,7 @@
                 </a:tc>
                 <a:tc>
                   <a:txBody>
-                    <a:bodyPr wrap="square"/>
+                    <a:bodyPr/>
                     <a:lstStyle/>
                     <a:p>
                       <a:pPr algn="l"/>
@@ -9008,11 +8526,16 @@
                     </a:solidFill>
                   </a:tcPr>
                 </a:tc>
+                <a:extLst>
+                  <a:ext uri="{0D108BD9-81ED-4DB2-BD59-A6C34878D82A}">
+                    <a16:rowId xmlns:a16="http://schemas.microsoft.com/office/drawing/2014/main" val="10000"/>
+                  </a:ext>
+                </a:extLst>
               </a:tr>
               <a:tr h="533400">
                 <a:tc>
                   <a:txBody>
-                    <a:bodyPr wrap="square"/>
+                    <a:bodyPr/>
                     <a:lstStyle/>
                     <a:p>
                       <a:pPr algn="ctr"/>
@@ -9035,7 +8558,7 @@
                 </a:tc>
                 <a:tc>
                   <a:txBody>
-                    <a:bodyPr wrap="square"/>
+                    <a:bodyPr/>
                     <a:lstStyle/>
                     <a:p>
                       <a:pPr algn="l"/>
@@ -9058,7 +8581,7 @@
                 </a:tc>
                 <a:tc>
                   <a:txBody>
-                    <a:bodyPr wrap="square"/>
+                    <a:bodyPr/>
                     <a:lstStyle/>
                     <a:p>
                       <a:pPr algn="ctr"/>
@@ -9081,7 +8604,7 @@
                 </a:tc>
                 <a:tc>
                   <a:txBody>
-                    <a:bodyPr wrap="square"/>
+                    <a:bodyPr/>
                     <a:lstStyle/>
                     <a:p>
                       <a:pPr algn="l"/>
@@ -9102,11 +8625,16 @@
                     </a:solidFill>
                   </a:tcPr>
                 </a:tc>
+                <a:extLst>
+                  <a:ext uri="{0D108BD9-81ED-4DB2-BD59-A6C34878D82A}">
+                    <a16:rowId xmlns:a16="http://schemas.microsoft.com/office/drawing/2014/main" val="10001"/>
+                  </a:ext>
+                </a:extLst>
               </a:tr>
               <a:tr h="533400">
                 <a:tc>
                   <a:txBody>
-                    <a:bodyPr wrap="square"/>
+                    <a:bodyPr/>
                     <a:lstStyle/>
                     <a:p>
                       <a:pPr algn="ctr"/>
@@ -9129,7 +8657,7 @@
                 </a:tc>
                 <a:tc>
                   <a:txBody>
-                    <a:bodyPr wrap="square"/>
+                    <a:bodyPr/>
                     <a:lstStyle/>
                     <a:p>
                       <a:pPr algn="l"/>
@@ -9152,7 +8680,7 @@
                 </a:tc>
                 <a:tc>
                   <a:txBody>
-                    <a:bodyPr wrap="square"/>
+                    <a:bodyPr/>
                     <a:lstStyle/>
                     <a:p>
                       <a:pPr algn="ctr"/>
@@ -9175,7 +8703,7 @@
                 </a:tc>
                 <a:tc>
                   <a:txBody>
-                    <a:bodyPr wrap="square"/>
+                    <a:bodyPr/>
                     <a:lstStyle/>
                     <a:p>
                       <a:pPr algn="l"/>
@@ -9196,11 +8724,16 @@
                     </a:solidFill>
                   </a:tcPr>
                 </a:tc>
+                <a:extLst>
+                  <a:ext uri="{0D108BD9-81ED-4DB2-BD59-A6C34878D82A}">
+                    <a16:rowId xmlns:a16="http://schemas.microsoft.com/office/drawing/2014/main" val="10002"/>
+                  </a:ext>
+                </a:extLst>
               </a:tr>
               <a:tr h="533400">
                 <a:tc>
                   <a:txBody>
-                    <a:bodyPr wrap="square"/>
+                    <a:bodyPr/>
                     <a:lstStyle/>
                     <a:p>
                       <a:pPr algn="ctr"/>
@@ -9223,7 +8756,7 @@
                 </a:tc>
                 <a:tc>
                   <a:txBody>
-                    <a:bodyPr wrap="square"/>
+                    <a:bodyPr/>
                     <a:lstStyle/>
                     <a:p>
                       <a:pPr algn="l"/>
@@ -9246,7 +8779,7 @@
                 </a:tc>
                 <a:tc>
                   <a:txBody>
-                    <a:bodyPr wrap="square"/>
+                    <a:bodyPr/>
                     <a:lstStyle/>
                     <a:p>
                       <a:pPr algn="ctr"/>
@@ -9269,7 +8802,7 @@
                 </a:tc>
                 <a:tc>
                   <a:txBody>
-                    <a:bodyPr wrap="square"/>
+                    <a:bodyPr/>
                     <a:lstStyle/>
                     <a:p>
                       <a:pPr algn="l"/>
@@ -9290,11 +8823,16 @@
                     </a:solidFill>
                   </a:tcPr>
                 </a:tc>
+                <a:extLst>
+                  <a:ext uri="{0D108BD9-81ED-4DB2-BD59-A6C34878D82A}">
+                    <a16:rowId xmlns:a16="http://schemas.microsoft.com/office/drawing/2014/main" val="10003"/>
+                  </a:ext>
+                </a:extLst>
               </a:tr>
               <a:tr h="533400">
                 <a:tc>
                   <a:txBody>
-                    <a:bodyPr wrap="square"/>
+                    <a:bodyPr/>
                     <a:lstStyle/>
                     <a:p>
                       <a:pPr algn="ctr"/>
@@ -9317,7 +8855,7 @@
                 </a:tc>
                 <a:tc>
                   <a:txBody>
-                    <a:bodyPr wrap="square"/>
+                    <a:bodyPr/>
                     <a:lstStyle/>
                     <a:p>
                       <a:pPr algn="l"/>
@@ -9340,7 +8878,7 @@
                 </a:tc>
                 <a:tc>
                   <a:txBody>
-                    <a:bodyPr wrap="square"/>
+                    <a:bodyPr/>
                     <a:lstStyle/>
                     <a:p>
                       <a:pPr algn="ctr"/>
@@ -9363,7 +8901,7 @@
                 </a:tc>
                 <a:tc>
                   <a:txBody>
-                    <a:bodyPr wrap="square"/>
+                    <a:bodyPr/>
                     <a:lstStyle/>
                     <a:p>
                       <a:pPr algn="l"/>
@@ -9384,11 +8922,16 @@
                     </a:solidFill>
                   </a:tcPr>
                 </a:tc>
+                <a:extLst>
+                  <a:ext uri="{0D108BD9-81ED-4DB2-BD59-A6C34878D82A}">
+                    <a16:rowId xmlns:a16="http://schemas.microsoft.com/office/drawing/2014/main" val="10004"/>
+                  </a:ext>
+                </a:extLst>
               </a:tr>
               <a:tr h="533400">
                 <a:tc>
                   <a:txBody>
-                    <a:bodyPr wrap="square"/>
+                    <a:bodyPr/>
                     <a:lstStyle/>
                     <a:p>
                       <a:pPr algn="ctr"/>
@@ -9411,7 +8954,7 @@
                 </a:tc>
                 <a:tc>
                   <a:txBody>
-                    <a:bodyPr wrap="square"/>
+                    <a:bodyPr/>
                     <a:lstStyle/>
                     <a:p>
                       <a:pPr algn="l"/>
@@ -9434,7 +8977,7 @@
                 </a:tc>
                 <a:tc>
                   <a:txBody>
-                    <a:bodyPr wrap="square"/>
+                    <a:bodyPr/>
                     <a:lstStyle/>
                     <a:p>
                       <a:pPr algn="ctr"/>
@@ -9457,7 +9000,7 @@
                 </a:tc>
                 <a:tc>
                   <a:txBody>
-                    <a:bodyPr wrap="square"/>
+                    <a:bodyPr/>
                     <a:lstStyle/>
                     <a:p>
                       <a:pPr algn="l"/>
@@ -9478,6 +9021,11 @@
                     </a:solidFill>
                   </a:tcPr>
                 </a:tc>
+                <a:extLst>
+                  <a:ext uri="{0D108BD9-81ED-4DB2-BD59-A6C34878D82A}">
+                    <a16:rowId xmlns:a16="http://schemas.microsoft.com/office/drawing/2014/main" val="10005"/>
+                  </a:ext>
+                </a:extLst>
               </a:tr>
             </a:tbl>
           </a:graphicData>
@@ -9500,7 +9048,7 @@
           <a:noFill/>
         </p:spPr>
         <p:txBody>
-          <a:bodyPr wrap="square" anchor="t" lIns="0" rIns="0" tIns="0" bIns="0">
+          <a:bodyPr wrap="square" lIns="0" tIns="0" rIns="0" bIns="0" anchor="t">
             <a:spAutoFit/>
           </a:bodyPr>
           <a:lstStyle/>
@@ -9563,6 +9111,7 @@
           <a:lstStyle/>
           <a:p>
             <a:pPr algn="ctr"/>
+            <a:endParaRPr/>
           </a:p>
         </p:txBody>
       </p:sp>
@@ -9583,7 +9132,7 @@
           <a:noFill/>
         </p:spPr>
         <p:txBody>
-          <a:bodyPr wrap="square" anchor="ctr" lIns="0" rIns="0" tIns="0" bIns="0">
+          <a:bodyPr wrap="square" lIns="0" tIns="0" rIns="0" bIns="0" anchor="ctr">
             <a:spAutoFit/>
           </a:bodyPr>
           <a:lstStyle/>
@@ -9622,7 +9171,7 @@
           <a:noFill/>
         </p:spPr>
         <p:txBody>
-          <a:bodyPr wrap="square" anchor="ctr" lIns="0" rIns="0" tIns="0" bIns="0">
+          <a:bodyPr wrap="square" lIns="0" tIns="0" rIns="0" bIns="0" anchor="ctr">
             <a:spAutoFit/>
           </a:bodyPr>
           <a:lstStyle/>
@@ -9653,7 +9202,7 @@
 </file>
 
 <file path=ppt/slides/slide14.xml><?xml version="1.0" encoding="utf-8"?>
-<p:sld xmlns:a="http://schemas.openxmlformats.org/drawingml/2006/main" xmlns:p="http://schemas.openxmlformats.org/presentationml/2006/main" xmlns:r="http://schemas.openxmlformats.org/officeDocument/2006/relationships">
+<p:sld xmlns:a="http://schemas.openxmlformats.org/drawingml/2006/main" xmlns:r="http://schemas.openxmlformats.org/officeDocument/2006/relationships" xmlns:p="http://schemas.openxmlformats.org/presentationml/2006/main">
   <p:cSld>
     <p:spTree>
       <p:nvGrpSpPr>
@@ -9661,7 +9210,14 @@
         <p:cNvGrpSpPr/>
         <p:nvPr/>
       </p:nvGrpSpPr>
-      <p:grpSpPr/>
+      <p:grpSpPr>
+        <a:xfrm>
+          <a:off x="0" y="0"/>
+          <a:ext cx="0" cy="0"/>
+          <a:chOff x="0" y="0"/>
+          <a:chExt cx="0" cy="0"/>
+        </a:xfrm>
+      </p:grpSpPr>
       <p:sp>
         <p:nvSpPr>
           <p:cNvPr id="2" name="Rectangle 1"/>
@@ -9703,6 +9259,7 @@
           <a:lstStyle/>
           <a:p>
             <a:pPr algn="ctr"/>
+            <a:endParaRPr/>
           </a:p>
         </p:txBody>
       </p:sp>
@@ -9747,6 +9304,7 @@
           <a:lstStyle/>
           <a:p>
             <a:pPr algn="ctr"/>
+            <a:endParaRPr/>
           </a:p>
         </p:txBody>
       </p:sp>
@@ -9767,7 +9325,7 @@
           <a:noFill/>
         </p:spPr>
         <p:txBody>
-          <a:bodyPr wrap="square" anchor="t" lIns="0" rIns="0" tIns="0" bIns="0">
+          <a:bodyPr wrap="square" lIns="0" tIns="0" rIns="0" bIns="0" anchor="t">
             <a:spAutoFit/>
           </a:bodyPr>
           <a:lstStyle/>
@@ -9806,7 +9364,7 @@
           <a:noFill/>
         </p:spPr>
         <p:txBody>
-          <a:bodyPr wrap="square" anchor="t" lIns="0" rIns="0" tIns="0" bIns="0">
+          <a:bodyPr wrap="square" lIns="0" tIns="0" rIns="0" bIns="0" anchor="t">
             <a:spAutoFit/>
           </a:bodyPr>
           <a:lstStyle/>
@@ -9869,6 +9427,7 @@
           <a:lstStyle/>
           <a:p>
             <a:pPr algn="ctr"/>
+            <a:endParaRPr/>
           </a:p>
         </p:txBody>
       </p:sp>
@@ -9913,6 +9472,7 @@
           <a:lstStyle/>
           <a:p>
             <a:pPr algn="ctr"/>
+            <a:endParaRPr/>
           </a:p>
         </p:txBody>
       </p:sp>
@@ -9933,7 +9493,7 @@
           <a:noFill/>
         </p:spPr>
         <p:txBody>
-          <a:bodyPr wrap="square" anchor="t" lIns="0" rIns="0" tIns="0" bIns="0">
+          <a:bodyPr wrap="square" lIns="0" tIns="0" rIns="0" bIns="0" anchor="t">
             <a:spAutoFit/>
           </a:bodyPr>
           <a:lstStyle/>
@@ -9972,7 +9532,7 @@
           <a:noFill/>
         </p:spPr>
         <p:txBody>
-          <a:bodyPr wrap="square" anchor="t" lIns="0" rIns="0" tIns="0" bIns="0">
+          <a:bodyPr wrap="square" lIns="0" tIns="0" rIns="0" bIns="0" anchor="t">
             <a:spAutoFit/>
           </a:bodyPr>
           <a:lstStyle/>
@@ -10011,7 +9571,7 @@
           <a:noFill/>
         </p:spPr>
         <p:txBody>
-          <a:bodyPr wrap="square" lIns="0" rIns="0" tIns="0" bIns="0">
+          <a:bodyPr wrap="square" lIns="0" tIns="0" rIns="0" bIns="0">
             <a:spAutoFit/>
           </a:bodyPr>
           <a:lstStyle/>
@@ -10142,6 +9702,7 @@
           <a:lstStyle/>
           <a:p>
             <a:pPr algn="ctr"/>
+            <a:endParaRPr/>
           </a:p>
         </p:txBody>
       </p:sp>
@@ -10162,7 +9723,7 @@
           <a:noFill/>
         </p:spPr>
         <p:txBody>
-          <a:bodyPr wrap="square" anchor="t" lIns="0" rIns="0" tIns="0" bIns="0">
+          <a:bodyPr wrap="square" lIns="0" tIns="0" rIns="0" bIns="0" anchor="t">
             <a:spAutoFit/>
           </a:bodyPr>
           <a:lstStyle/>
@@ -10201,7 +9762,7 @@
           <a:noFill/>
         </p:spPr>
         <p:txBody>
-          <a:bodyPr wrap="square" anchor="t" lIns="0" rIns="0" tIns="0" bIns="0">
+          <a:bodyPr wrap="square" lIns="0" tIns="0" rIns="0" bIns="0" anchor="t">
             <a:spAutoFit/>
           </a:bodyPr>
           <a:lstStyle/>
@@ -10240,7 +9801,7 @@
           <a:noFill/>
         </p:spPr>
         <p:txBody>
-          <a:bodyPr wrap="square" lIns="0" rIns="0" tIns="0" bIns="0">
+          <a:bodyPr wrap="square" lIns="0" tIns="0" rIns="0" bIns="0">
             <a:spAutoFit/>
           </a:bodyPr>
           <a:lstStyle/>
@@ -10399,6 +9960,7 @@
           <a:lstStyle/>
           <a:p>
             <a:pPr algn="ctr"/>
+            <a:endParaRPr/>
           </a:p>
         </p:txBody>
       </p:sp>
@@ -10419,7 +9981,7 @@
           <a:noFill/>
         </p:spPr>
         <p:txBody>
-          <a:bodyPr wrap="square" anchor="t" lIns="0" rIns="0" tIns="0" bIns="0">
+          <a:bodyPr wrap="square" lIns="0" tIns="0" rIns="0" bIns="0" anchor="t">
             <a:spAutoFit/>
           </a:bodyPr>
           <a:lstStyle/>
@@ -10458,7 +10020,7 @@
           <a:noFill/>
         </p:spPr>
         <p:txBody>
-          <a:bodyPr wrap="square" anchor="t" lIns="0" rIns="0" tIns="0" bIns="0">
+          <a:bodyPr wrap="square" lIns="0" tIns="0" rIns="0" bIns="0" anchor="t">
             <a:spAutoFit/>
           </a:bodyPr>
           <a:lstStyle/>
@@ -10497,7 +10059,7 @@
           <a:noFill/>
         </p:spPr>
         <p:txBody>
-          <a:bodyPr wrap="square" lIns="0" rIns="0" tIns="0" bIns="0">
+          <a:bodyPr wrap="square" lIns="0" tIns="0" rIns="0" bIns="0">
             <a:spAutoFit/>
           </a:bodyPr>
           <a:lstStyle/>
@@ -10632,7 +10194,7 @@
           <a:noFill/>
         </p:spPr>
         <p:txBody>
-          <a:bodyPr wrap="square" anchor="t" lIns="0" rIns="0" tIns="0" bIns="0">
+          <a:bodyPr wrap="square" lIns="0" tIns="0" rIns="0" bIns="0" anchor="t">
             <a:spAutoFit/>
           </a:bodyPr>
           <a:lstStyle/>
@@ -10695,6 +10257,7 @@
           <a:lstStyle/>
           <a:p>
             <a:pPr algn="ctr"/>
+            <a:endParaRPr/>
           </a:p>
         </p:txBody>
       </p:sp>
@@ -10715,7 +10278,7 @@
           <a:noFill/>
         </p:spPr>
         <p:txBody>
-          <a:bodyPr wrap="square" anchor="ctr" lIns="0" rIns="0" tIns="0" bIns="0">
+          <a:bodyPr wrap="square" lIns="0" tIns="0" rIns="0" bIns="0" anchor="ctr">
             <a:spAutoFit/>
           </a:bodyPr>
           <a:lstStyle/>
@@ -10754,7 +10317,7 @@
           <a:noFill/>
         </p:spPr>
         <p:txBody>
-          <a:bodyPr wrap="square" anchor="ctr" lIns="0" rIns="0" tIns="0" bIns="0">
+          <a:bodyPr wrap="square" lIns="0" tIns="0" rIns="0" bIns="0" anchor="ctr">
             <a:spAutoFit/>
           </a:bodyPr>
           <a:lstStyle/>
@@ -10785,7 +10348,7 @@
 </file>
 
 <file path=ppt/slides/slide15.xml><?xml version="1.0" encoding="utf-8"?>
-<p:sld xmlns:a="http://schemas.openxmlformats.org/drawingml/2006/main" xmlns:p="http://schemas.openxmlformats.org/presentationml/2006/main" xmlns:r="http://schemas.openxmlformats.org/officeDocument/2006/relationships">
+<p:sld xmlns:a="http://schemas.openxmlformats.org/drawingml/2006/main" xmlns:r="http://schemas.openxmlformats.org/officeDocument/2006/relationships" xmlns:p="http://schemas.openxmlformats.org/presentationml/2006/main">
   <p:cSld>
     <p:spTree>
       <p:nvGrpSpPr>
@@ -10793,7 +10356,14 @@
         <p:cNvGrpSpPr/>
         <p:nvPr/>
       </p:nvGrpSpPr>
-      <p:grpSpPr/>
+      <p:grpSpPr>
+        <a:xfrm>
+          <a:off x="0" y="0"/>
+          <a:ext cx="0" cy="0"/>
+          <a:chOff x="0" y="0"/>
+          <a:chExt cx="0" cy="0"/>
+        </a:xfrm>
+      </p:grpSpPr>
       <p:sp>
         <p:nvSpPr>
           <p:cNvPr id="2" name="Rectangle 1"/>
@@ -10835,6 +10405,7 @@
           <a:lstStyle/>
           <a:p>
             <a:pPr algn="ctr"/>
+            <a:endParaRPr/>
           </a:p>
         </p:txBody>
       </p:sp>
@@ -10879,6 +10450,7 @@
           <a:lstStyle/>
           <a:p>
             <a:pPr algn="ctr"/>
+            <a:endParaRPr/>
           </a:p>
         </p:txBody>
       </p:sp>
@@ -10899,7 +10471,7 @@
           <a:noFill/>
         </p:spPr>
         <p:txBody>
-          <a:bodyPr wrap="square" anchor="t" lIns="0" rIns="0" tIns="0" bIns="0">
+          <a:bodyPr wrap="square" lIns="0" tIns="0" rIns="0" bIns="0" anchor="t">
             <a:spAutoFit/>
           </a:bodyPr>
           <a:lstStyle/>
@@ -10938,7 +10510,7 @@
           <a:noFill/>
         </p:spPr>
         <p:txBody>
-          <a:bodyPr wrap="square" anchor="t" lIns="0" rIns="0" tIns="0" bIns="0">
+          <a:bodyPr wrap="square" lIns="0" tIns="0" rIns="0" bIns="0" anchor="t">
             <a:spAutoFit/>
           </a:bodyPr>
           <a:lstStyle/>
@@ -11001,6 +10573,7 @@
           <a:lstStyle/>
           <a:p>
             <a:pPr algn="ctr"/>
+            <a:endParaRPr/>
           </a:p>
         </p:txBody>
       </p:sp>
@@ -11047,6 +10620,7 @@
           <a:lstStyle/>
           <a:p>
             <a:pPr algn="ctr"/>
+            <a:endParaRPr/>
           </a:p>
         </p:txBody>
       </p:sp>
@@ -11091,6 +10665,7 @@
           <a:lstStyle/>
           <a:p>
             <a:pPr algn="ctr"/>
+            <a:endParaRPr/>
           </a:p>
         </p:txBody>
       </p:sp>
@@ -11111,7 +10686,7 @@
           <a:noFill/>
         </p:spPr>
         <p:txBody>
-          <a:bodyPr wrap="square" anchor="t" lIns="0" rIns="0" tIns="0" bIns="0">
+          <a:bodyPr wrap="square" lIns="0" tIns="0" rIns="0" bIns="0" anchor="t">
             <a:spAutoFit/>
           </a:bodyPr>
           <a:lstStyle/>
@@ -11166,7 +10741,7 @@
           <a:noFill/>
         </p:spPr>
         <p:txBody>
-          <a:bodyPr wrap="square" anchor="t" lIns="0" rIns="0" tIns="0" bIns="0">
+          <a:bodyPr wrap="square" lIns="0" tIns="0" rIns="0" bIns="0" anchor="t">
             <a:spAutoFit/>
           </a:bodyPr>
           <a:lstStyle/>
@@ -11205,7 +10780,7 @@
           <a:noFill/>
         </p:spPr>
         <p:txBody>
-          <a:bodyPr wrap="square" anchor="t" lIns="0" rIns="0" tIns="0" bIns="0">
+          <a:bodyPr wrap="square" lIns="0" tIns="0" rIns="0" bIns="0" anchor="t">
             <a:spAutoFit/>
           </a:bodyPr>
           <a:lstStyle/>
@@ -11244,7 +10819,7 @@
           <a:noFill/>
         </p:spPr>
         <p:txBody>
-          <a:bodyPr wrap="square" anchor="t" lIns="0" rIns="0" tIns="0" bIns="0">
+          <a:bodyPr wrap="square" lIns="0" tIns="0" rIns="0" bIns="0" anchor="t">
             <a:spAutoFit/>
           </a:bodyPr>
           <a:lstStyle/>
@@ -11283,7 +10858,7 @@
           <a:noFill/>
         </p:spPr>
         <p:txBody>
-          <a:bodyPr wrap="square" anchor="t" lIns="0" rIns="0" tIns="0" bIns="0">
+          <a:bodyPr wrap="square" lIns="0" tIns="0" rIns="0" bIns="0" anchor="t">
             <a:spAutoFit/>
           </a:bodyPr>
           <a:lstStyle/>
@@ -11348,6 +10923,7 @@
           <a:lstStyle/>
           <a:p>
             <a:pPr algn="ctr"/>
+            <a:endParaRPr/>
           </a:p>
         </p:txBody>
       </p:sp>
@@ -11392,6 +10968,7 @@
           <a:lstStyle/>
           <a:p>
             <a:pPr algn="ctr"/>
+            <a:endParaRPr/>
           </a:p>
         </p:txBody>
       </p:sp>
@@ -11412,7 +10989,7 @@
           <a:noFill/>
         </p:spPr>
         <p:txBody>
-          <a:bodyPr wrap="square" anchor="t" lIns="0" rIns="0" tIns="0" bIns="0">
+          <a:bodyPr wrap="square" lIns="0" tIns="0" rIns="0" bIns="0" anchor="t">
             <a:spAutoFit/>
           </a:bodyPr>
           <a:lstStyle/>
@@ -11467,7 +11044,7 @@
           <a:noFill/>
         </p:spPr>
         <p:txBody>
-          <a:bodyPr wrap="square" anchor="t" lIns="0" rIns="0" tIns="0" bIns="0">
+          <a:bodyPr wrap="square" lIns="0" tIns="0" rIns="0" bIns="0" anchor="t">
             <a:spAutoFit/>
           </a:bodyPr>
           <a:lstStyle/>
@@ -11506,7 +11083,7 @@
           <a:noFill/>
         </p:spPr>
         <p:txBody>
-          <a:bodyPr wrap="square" anchor="t" lIns="0" rIns="0" tIns="0" bIns="0">
+          <a:bodyPr wrap="square" lIns="0" tIns="0" rIns="0" bIns="0" anchor="t">
             <a:spAutoFit/>
           </a:bodyPr>
           <a:lstStyle/>
@@ -11545,7 +11122,7 @@
           <a:noFill/>
         </p:spPr>
         <p:txBody>
-          <a:bodyPr wrap="square" anchor="t" lIns="0" rIns="0" tIns="0" bIns="0">
+          <a:bodyPr wrap="square" lIns="0" tIns="0" rIns="0" bIns="0" anchor="t">
             <a:spAutoFit/>
           </a:bodyPr>
           <a:lstStyle/>
@@ -11584,7 +11161,7 @@
           <a:noFill/>
         </p:spPr>
         <p:txBody>
-          <a:bodyPr wrap="square" anchor="t" lIns="0" rIns="0" tIns="0" bIns="0">
+          <a:bodyPr wrap="square" lIns="0" tIns="0" rIns="0" bIns="0" anchor="t">
             <a:spAutoFit/>
           </a:bodyPr>
           <a:lstStyle/>
@@ -11623,7 +11200,7 @@
           <a:noFill/>
         </p:spPr>
         <p:txBody>
-          <a:bodyPr wrap="square" anchor="t" lIns="0" rIns="0" tIns="0" bIns="0">
+          <a:bodyPr wrap="square" lIns="0" tIns="0" rIns="0" bIns="0" anchor="t">
             <a:spAutoFit/>
           </a:bodyPr>
           <a:lstStyle/>
@@ -11662,7 +11239,7 @@
           <a:noFill/>
         </p:spPr>
         <p:txBody>
-          <a:bodyPr wrap="square" anchor="t" lIns="0" rIns="0" tIns="0" bIns="0">
+          <a:bodyPr wrap="square" lIns="0" tIns="0" rIns="0" bIns="0" anchor="t">
             <a:spAutoFit/>
           </a:bodyPr>
           <a:lstStyle/>
@@ -11727,6 +11304,7 @@
           <a:lstStyle/>
           <a:p>
             <a:pPr algn="ctr"/>
+            <a:endParaRPr/>
           </a:p>
         </p:txBody>
       </p:sp>
@@ -11771,6 +11349,7 @@
           <a:lstStyle/>
           <a:p>
             <a:pPr algn="ctr"/>
+            <a:endParaRPr/>
           </a:p>
         </p:txBody>
       </p:sp>
@@ -11791,7 +11370,7 @@
           <a:noFill/>
         </p:spPr>
         <p:txBody>
-          <a:bodyPr wrap="square" anchor="t" lIns="0" rIns="0" tIns="0" bIns="0">
+          <a:bodyPr wrap="square" lIns="0" tIns="0" rIns="0" bIns="0" anchor="t">
             <a:spAutoFit/>
           </a:bodyPr>
           <a:lstStyle/>
@@ -11846,7 +11425,7 @@
           <a:noFill/>
         </p:spPr>
         <p:txBody>
-          <a:bodyPr wrap="square" anchor="t" lIns="0" rIns="0" tIns="0" bIns="0">
+          <a:bodyPr wrap="square" lIns="0" tIns="0" rIns="0" bIns="0" anchor="t">
             <a:spAutoFit/>
           </a:bodyPr>
           <a:lstStyle/>
@@ -11885,7 +11464,7 @@
           <a:noFill/>
         </p:spPr>
         <p:txBody>
-          <a:bodyPr wrap="square" anchor="t" lIns="0" rIns="0" tIns="0" bIns="0">
+          <a:bodyPr wrap="square" lIns="0" tIns="0" rIns="0" bIns="0" anchor="t">
             <a:spAutoFit/>
           </a:bodyPr>
           <a:lstStyle/>
@@ -11924,7 +11503,7 @@
           <a:noFill/>
         </p:spPr>
         <p:txBody>
-          <a:bodyPr wrap="square" anchor="t" lIns="0" rIns="0" tIns="0" bIns="0">
+          <a:bodyPr wrap="square" lIns="0" tIns="0" rIns="0" bIns="0" anchor="t">
             <a:spAutoFit/>
           </a:bodyPr>
           <a:lstStyle/>
@@ -11963,7 +11542,7 @@
           <a:noFill/>
         </p:spPr>
         <p:txBody>
-          <a:bodyPr wrap="square" anchor="t" lIns="0" rIns="0" tIns="0" bIns="0">
+          <a:bodyPr wrap="square" lIns="0" tIns="0" rIns="0" bIns="0" anchor="t">
             <a:spAutoFit/>
           </a:bodyPr>
           <a:lstStyle/>
@@ -12028,6 +11607,7 @@
           <a:lstStyle/>
           <a:p>
             <a:pPr algn="ctr"/>
+            <a:endParaRPr/>
           </a:p>
         </p:txBody>
       </p:sp>
@@ -12048,7 +11628,7 @@
           <a:noFill/>
         </p:spPr>
         <p:txBody>
-          <a:bodyPr wrap="square" anchor="ctr" lIns="0" rIns="0" tIns="0" bIns="0">
+          <a:bodyPr wrap="square" lIns="0" tIns="0" rIns="0" bIns="0" anchor="ctr">
             <a:spAutoFit/>
           </a:bodyPr>
           <a:lstStyle/>
@@ -12087,7 +11667,7 @@
           <a:noFill/>
         </p:spPr>
         <p:txBody>
-          <a:bodyPr wrap="square" anchor="t" lIns="0" rIns="0" tIns="0" bIns="0">
+          <a:bodyPr wrap="square" lIns="0" tIns="0" rIns="0" bIns="0" anchor="t">
             <a:spAutoFit/>
           </a:bodyPr>
           <a:lstStyle/>
@@ -12150,6 +11730,7 @@
           <a:lstStyle/>
           <a:p>
             <a:pPr algn="ctr"/>
+            <a:endParaRPr/>
           </a:p>
         </p:txBody>
       </p:sp>
@@ -12170,7 +11751,7 @@
           <a:noFill/>
         </p:spPr>
         <p:txBody>
-          <a:bodyPr wrap="square" anchor="ctr" lIns="0" rIns="0" tIns="0" bIns="0">
+          <a:bodyPr wrap="square" lIns="0" tIns="0" rIns="0" bIns="0" anchor="ctr">
             <a:spAutoFit/>
           </a:bodyPr>
           <a:lstStyle/>
@@ -12209,7 +11790,7 @@
           <a:noFill/>
         </p:spPr>
         <p:txBody>
-          <a:bodyPr wrap="square" anchor="ctr" lIns="0" rIns="0" tIns="0" bIns="0">
+          <a:bodyPr wrap="square" lIns="0" tIns="0" rIns="0" bIns="0" anchor="ctr">
             <a:spAutoFit/>
           </a:bodyPr>
           <a:lstStyle/>
@@ -12240,7 +11821,7 @@
 </file>
 
 <file path=ppt/slides/slide16.xml><?xml version="1.0" encoding="utf-8"?>
-<p:sld xmlns:a="http://schemas.openxmlformats.org/drawingml/2006/main" xmlns:p="http://schemas.openxmlformats.org/presentationml/2006/main" xmlns:r="http://schemas.openxmlformats.org/officeDocument/2006/relationships">
+<p:sld xmlns:a="http://schemas.openxmlformats.org/drawingml/2006/main" xmlns:r="http://schemas.openxmlformats.org/officeDocument/2006/relationships" xmlns:p="http://schemas.openxmlformats.org/presentationml/2006/main">
   <p:cSld>
     <p:spTree>
       <p:nvGrpSpPr>
@@ -12248,7 +11829,14 @@
         <p:cNvGrpSpPr/>
         <p:nvPr/>
       </p:nvGrpSpPr>
-      <p:grpSpPr/>
+      <p:grpSpPr>
+        <a:xfrm>
+          <a:off x="0" y="0"/>
+          <a:ext cx="0" cy="0"/>
+          <a:chOff x="0" y="0"/>
+          <a:chExt cx="0" cy="0"/>
+        </a:xfrm>
+      </p:grpSpPr>
       <p:sp>
         <p:nvSpPr>
           <p:cNvPr id="2" name="Rectangle 1"/>
@@ -12290,6 +11878,7 @@
           <a:lstStyle/>
           <a:p>
             <a:pPr algn="ctr"/>
+            <a:endParaRPr/>
           </a:p>
         </p:txBody>
       </p:sp>
@@ -12334,6 +11923,7 @@
           <a:lstStyle/>
           <a:p>
             <a:pPr algn="ctr"/>
+            <a:endParaRPr/>
           </a:p>
         </p:txBody>
       </p:sp>
@@ -12354,7 +11944,7 @@
           <a:noFill/>
         </p:spPr>
         <p:txBody>
-          <a:bodyPr wrap="square" anchor="t" lIns="0" rIns="0" tIns="0" bIns="0">
+          <a:bodyPr wrap="square" lIns="0" tIns="0" rIns="0" bIns="0" anchor="t">
             <a:spAutoFit/>
           </a:bodyPr>
           <a:lstStyle/>
@@ -12393,7 +11983,7 @@
           <a:noFill/>
         </p:spPr>
         <p:txBody>
-          <a:bodyPr wrap="square" anchor="t" lIns="0" rIns="0" tIns="0" bIns="0">
+          <a:bodyPr wrap="square" lIns="0" tIns="0" rIns="0" bIns="0" anchor="t">
             <a:spAutoFit/>
           </a:bodyPr>
           <a:lstStyle/>
@@ -12456,6 +12046,7 @@
           <a:lstStyle/>
           <a:p>
             <a:pPr algn="ctr"/>
+            <a:endParaRPr/>
           </a:p>
         </p:txBody>
       </p:sp>
@@ -12476,7 +12067,7 @@
           <a:noFill/>
         </p:spPr>
         <p:txBody>
-          <a:bodyPr wrap="square" anchor="t" lIns="0" rIns="0" tIns="0" bIns="0">
+          <a:bodyPr wrap="square" lIns="0" tIns="0" rIns="0" bIns="0" anchor="t">
             <a:spAutoFit/>
           </a:bodyPr>
           <a:lstStyle/>
@@ -12515,7 +12106,7 @@
           <a:noFill/>
         </p:spPr>
         <p:txBody>
-          <a:bodyPr wrap="square" lIns="0" rIns="0" tIns="0" bIns="0">
+          <a:bodyPr wrap="square" lIns="0" tIns="0" rIns="0" bIns="0">
             <a:spAutoFit/>
           </a:bodyPr>
           <a:lstStyle/>
@@ -12594,7 +12185,7 @@
           <a:noFill/>
         </p:spPr>
         <p:txBody>
-          <a:bodyPr wrap="square" anchor="t" lIns="0" rIns="0" tIns="0" bIns="0">
+          <a:bodyPr wrap="square" lIns="0" tIns="0" rIns="0" bIns="0" anchor="t">
             <a:spAutoFit/>
           </a:bodyPr>
           <a:lstStyle/>
@@ -12633,7 +12224,7 @@
           <a:noFill/>
         </p:spPr>
         <p:txBody>
-          <a:bodyPr wrap="square" lIns="0" rIns="0" tIns="0" bIns="0">
+          <a:bodyPr wrap="square" lIns="0" tIns="0" rIns="0" bIns="0">
             <a:spAutoFit/>
           </a:bodyPr>
           <a:lstStyle/>
@@ -12738,6 +12329,7 @@
           <a:lstStyle/>
           <a:p>
             <a:pPr algn="ctr"/>
+            <a:endParaRPr/>
           </a:p>
         </p:txBody>
       </p:sp>
@@ -12758,7 +12350,7 @@
           <a:noFill/>
         </p:spPr>
         <p:txBody>
-          <a:bodyPr wrap="square" anchor="t" lIns="0" rIns="0" tIns="0" bIns="0">
+          <a:bodyPr wrap="square" lIns="0" tIns="0" rIns="0" bIns="0" anchor="t">
             <a:spAutoFit/>
           </a:bodyPr>
           <a:lstStyle/>
@@ -12821,6 +12413,7 @@
           <a:lstStyle/>
           <a:p>
             <a:pPr algn="ctr"/>
+            <a:endParaRPr/>
           </a:p>
         </p:txBody>
       </p:sp>
@@ -12841,7 +12434,7 @@
           <a:noFill/>
         </p:spPr>
         <p:txBody>
-          <a:bodyPr wrap="square" anchor="ctr" lIns="0" rIns="0" tIns="0" bIns="0">
+          <a:bodyPr wrap="square" lIns="0" tIns="0" rIns="0" bIns="0" anchor="ctr">
             <a:spAutoFit/>
           </a:bodyPr>
           <a:lstStyle/>
@@ -12880,7 +12473,7 @@
           <a:noFill/>
         </p:spPr>
         <p:txBody>
-          <a:bodyPr wrap="square" anchor="ctr" lIns="0" rIns="0" tIns="0" bIns="0">
+          <a:bodyPr wrap="square" lIns="0" tIns="0" rIns="0" bIns="0" anchor="ctr">
             <a:spAutoFit/>
           </a:bodyPr>
           <a:lstStyle/>
@@ -12911,7 +12504,7 @@
 </file>
 
 <file path=ppt/slides/slide17.xml><?xml version="1.0" encoding="utf-8"?>
-<p:sld xmlns:a="http://schemas.openxmlformats.org/drawingml/2006/main" xmlns:p="http://schemas.openxmlformats.org/presentationml/2006/main" xmlns:r="http://schemas.openxmlformats.org/officeDocument/2006/relationships">
+<p:sld xmlns:a="http://schemas.openxmlformats.org/drawingml/2006/main" xmlns:r="http://schemas.openxmlformats.org/officeDocument/2006/relationships" xmlns:p="http://schemas.openxmlformats.org/presentationml/2006/main">
   <p:cSld>
     <p:spTree>
       <p:nvGrpSpPr>
@@ -12919,7 +12512,14 @@
         <p:cNvGrpSpPr/>
         <p:nvPr/>
       </p:nvGrpSpPr>
-      <p:grpSpPr/>
+      <p:grpSpPr>
+        <a:xfrm>
+          <a:off x="0" y="0"/>
+          <a:ext cx="0" cy="0"/>
+          <a:chOff x="0" y="0"/>
+          <a:chExt cx="0" cy="0"/>
+        </a:xfrm>
+      </p:grpSpPr>
       <p:sp>
         <p:nvSpPr>
           <p:cNvPr id="2" name="Rectangle 1"/>
@@ -12961,6 +12561,7 @@
           <a:lstStyle/>
           <a:p>
             <a:pPr algn="ctr"/>
+            <a:endParaRPr/>
           </a:p>
         </p:txBody>
       </p:sp>
@@ -13005,6 +12606,7 @@
           <a:lstStyle/>
           <a:p>
             <a:pPr algn="ctr"/>
+            <a:endParaRPr/>
           </a:p>
         </p:txBody>
       </p:sp>
@@ -13025,7 +12627,7 @@
           <a:noFill/>
         </p:spPr>
         <p:txBody>
-          <a:bodyPr wrap="square" anchor="t" lIns="0" rIns="0" tIns="0" bIns="0">
+          <a:bodyPr wrap="square" lIns="0" tIns="0" rIns="0" bIns="0" anchor="t">
             <a:spAutoFit/>
           </a:bodyPr>
           <a:lstStyle/>
@@ -13064,7 +12666,7 @@
           <a:noFill/>
         </p:spPr>
         <p:txBody>
-          <a:bodyPr wrap="square" anchor="t" lIns="0" rIns="0" tIns="0" bIns="0">
+          <a:bodyPr wrap="square" lIns="0" tIns="0" rIns="0" bIns="0" anchor="t">
             <a:spAutoFit/>
           </a:bodyPr>
           <a:lstStyle/>
@@ -13127,6 +12729,7 @@
           <a:lstStyle/>
           <a:p>
             <a:pPr algn="ctr"/>
+            <a:endParaRPr/>
           </a:p>
         </p:txBody>
       </p:sp>
@@ -13173,6 +12776,7 @@
           <a:lstStyle/>
           <a:p>
             <a:pPr algn="ctr"/>
+            <a:endParaRPr/>
           </a:p>
         </p:txBody>
       </p:sp>
@@ -13193,7 +12797,7 @@
           <a:noFill/>
         </p:spPr>
         <p:txBody>
-          <a:bodyPr wrap="square" anchor="ctr" lIns="0" rIns="0" tIns="0" bIns="0">
+          <a:bodyPr wrap="square" lIns="0" tIns="0" rIns="0" bIns="0" anchor="ctr">
             <a:spAutoFit/>
           </a:bodyPr>
           <a:lstStyle/>
@@ -13288,6 +12892,7 @@
           <a:lstStyle/>
           <a:p>
             <a:pPr algn="ctr"/>
+            <a:endParaRPr/>
           </a:p>
         </p:txBody>
       </p:sp>
@@ -13308,7 +12913,7 @@
           <a:noFill/>
         </p:spPr>
         <p:txBody>
-          <a:bodyPr wrap="square" anchor="ctr" lIns="0" rIns="0" tIns="0" bIns="0">
+          <a:bodyPr wrap="square" lIns="0" tIns="0" rIns="0" bIns="0" anchor="ctr">
             <a:spAutoFit/>
           </a:bodyPr>
           <a:lstStyle/>
@@ -13373,6 +12978,7 @@
           <a:lstStyle/>
           <a:p>
             <a:pPr algn="ctr"/>
+            <a:endParaRPr/>
           </a:p>
         </p:txBody>
       </p:sp>
@@ -13417,6 +13023,7 @@
           <a:lstStyle/>
           <a:p>
             <a:pPr algn="ctr"/>
+            <a:endParaRPr/>
           </a:p>
         </p:txBody>
       </p:sp>
@@ -13437,7 +13044,7 @@
           <a:noFill/>
         </p:spPr>
         <p:txBody>
-          <a:bodyPr wrap="square" anchor="ctr" lIns="0" rIns="0" tIns="0" bIns="0">
+          <a:bodyPr wrap="square" lIns="0" tIns="0" rIns="0" bIns="0" anchor="ctr">
             <a:spAutoFit/>
           </a:bodyPr>
           <a:lstStyle/>
@@ -13476,7 +13083,7 @@
           <a:noFill/>
         </p:spPr>
         <p:txBody>
-          <a:bodyPr wrap="square" anchor="t" lIns="0" rIns="0" tIns="0" bIns="0">
+          <a:bodyPr wrap="square" lIns="0" tIns="0" rIns="0" bIns="0" anchor="t">
             <a:spAutoFit/>
           </a:bodyPr>
           <a:lstStyle/>
@@ -13515,7 +13122,7 @@
           <a:noFill/>
         </p:spPr>
         <p:txBody>
-          <a:bodyPr wrap="square" anchor="t" lIns="0" rIns="0" tIns="0" bIns="0">
+          <a:bodyPr wrap="square" lIns="0" tIns="0" rIns="0" bIns="0" anchor="t">
             <a:spAutoFit/>
           </a:bodyPr>
           <a:lstStyle/>
@@ -13580,6 +13187,7 @@
           <a:lstStyle/>
           <a:p>
             <a:pPr algn="ctr"/>
+            <a:endParaRPr/>
           </a:p>
         </p:txBody>
       </p:sp>
@@ -13624,6 +13232,7 @@
           <a:lstStyle/>
           <a:p>
             <a:pPr algn="ctr"/>
+            <a:endParaRPr/>
           </a:p>
         </p:txBody>
       </p:sp>
@@ -13644,7 +13253,7 @@
           <a:noFill/>
         </p:spPr>
         <p:txBody>
-          <a:bodyPr wrap="square" anchor="ctr" lIns="0" rIns="0" tIns="0" bIns="0">
+          <a:bodyPr wrap="square" lIns="0" tIns="0" rIns="0" bIns="0" anchor="ctr">
             <a:spAutoFit/>
           </a:bodyPr>
           <a:lstStyle/>
@@ -13683,7 +13292,7 @@
           <a:noFill/>
         </p:spPr>
         <p:txBody>
-          <a:bodyPr wrap="square" anchor="t" lIns="0" rIns="0" tIns="0" bIns="0">
+          <a:bodyPr wrap="square" lIns="0" tIns="0" rIns="0" bIns="0" anchor="t">
             <a:spAutoFit/>
           </a:bodyPr>
           <a:lstStyle/>
@@ -13722,7 +13331,7 @@
           <a:noFill/>
         </p:spPr>
         <p:txBody>
-          <a:bodyPr wrap="square" anchor="t" lIns="0" rIns="0" tIns="0" bIns="0">
+          <a:bodyPr wrap="square" lIns="0" tIns="0" rIns="0" bIns="0" anchor="t">
             <a:spAutoFit/>
           </a:bodyPr>
           <a:lstStyle/>
@@ -13785,6 +13394,7 @@
           <a:lstStyle/>
           <a:p>
             <a:pPr algn="ctr"/>
+            <a:endParaRPr/>
           </a:p>
         </p:txBody>
       </p:sp>
@@ -13805,7 +13415,7 @@
           <a:noFill/>
         </p:spPr>
         <p:txBody>
-          <a:bodyPr wrap="square" anchor="ctr" lIns="0" rIns="0" tIns="0" bIns="0">
+          <a:bodyPr wrap="square" lIns="0" tIns="0" rIns="0" bIns="0" anchor="ctr">
             <a:spAutoFit/>
           </a:bodyPr>
           <a:lstStyle/>
@@ -13844,7 +13454,7 @@
           <a:noFill/>
         </p:spPr>
         <p:txBody>
-          <a:bodyPr wrap="square" anchor="ctr" lIns="0" rIns="0" tIns="0" bIns="0">
+          <a:bodyPr wrap="square" lIns="0" tIns="0" rIns="0" bIns="0" anchor="ctr">
             <a:spAutoFit/>
           </a:bodyPr>
           <a:lstStyle/>
@@ -13875,7 +13485,7 @@
 </file>
 
 <file path=ppt/slides/slide18.xml><?xml version="1.0" encoding="utf-8"?>
-<p:sld xmlns:a="http://schemas.openxmlformats.org/drawingml/2006/main" xmlns:p="http://schemas.openxmlformats.org/presentationml/2006/main" xmlns:r="http://schemas.openxmlformats.org/officeDocument/2006/relationships">
+<p:sld xmlns:a="http://schemas.openxmlformats.org/drawingml/2006/main" xmlns:r="http://schemas.openxmlformats.org/officeDocument/2006/relationships" xmlns:p="http://schemas.openxmlformats.org/presentationml/2006/main">
   <p:cSld>
     <p:spTree>
       <p:nvGrpSpPr>
@@ -13883,7 +13493,14 @@
         <p:cNvGrpSpPr/>
         <p:nvPr/>
       </p:nvGrpSpPr>
-      <p:grpSpPr/>
+      <p:grpSpPr>
+        <a:xfrm>
+          <a:off x="0" y="0"/>
+          <a:ext cx="0" cy="0"/>
+          <a:chOff x="0" y="0"/>
+          <a:chExt cx="0" cy="0"/>
+        </a:xfrm>
+      </p:grpSpPr>
       <p:sp>
         <p:nvSpPr>
           <p:cNvPr id="2" name="Rectangle 1"/>
@@ -13925,6 +13542,7 @@
           <a:lstStyle/>
           <a:p>
             <a:pPr algn="ctr"/>
+            <a:endParaRPr/>
           </a:p>
         </p:txBody>
       </p:sp>
@@ -13969,6 +13587,7 @@
           <a:lstStyle/>
           <a:p>
             <a:pPr algn="ctr"/>
+            <a:endParaRPr/>
           </a:p>
         </p:txBody>
       </p:sp>
@@ -13989,7 +13608,7 @@
           <a:noFill/>
         </p:spPr>
         <p:txBody>
-          <a:bodyPr wrap="square" anchor="t" lIns="0" rIns="0" tIns="0" bIns="0">
+          <a:bodyPr wrap="square" lIns="0" tIns="0" rIns="0" bIns="0" anchor="t">
             <a:spAutoFit/>
           </a:bodyPr>
           <a:lstStyle/>
@@ -14028,7 +13647,7 @@
           <a:noFill/>
         </p:spPr>
         <p:txBody>
-          <a:bodyPr wrap="square" anchor="t" lIns="0" rIns="0" tIns="0" bIns="0">
+          <a:bodyPr wrap="square" lIns="0" tIns="0" rIns="0" bIns="0" anchor="t">
             <a:spAutoFit/>
           </a:bodyPr>
           <a:lstStyle/>
@@ -14091,6 +13710,7 @@
           <a:lstStyle/>
           <a:p>
             <a:pPr algn="ctr"/>
+            <a:endParaRPr/>
           </a:p>
         </p:txBody>
       </p:sp>
@@ -14135,6 +13755,7 @@
           <a:lstStyle/>
           <a:p>
             <a:pPr algn="ctr"/>
+            <a:endParaRPr/>
           </a:p>
         </p:txBody>
       </p:sp>
@@ -14155,7 +13776,7 @@
           <a:noFill/>
         </p:spPr>
         <p:txBody>
-          <a:bodyPr wrap="square" anchor="t" lIns="0" rIns="0" tIns="0" bIns="0">
+          <a:bodyPr wrap="square" lIns="0" tIns="0" rIns="0" bIns="0" anchor="t">
             <a:spAutoFit/>
           </a:bodyPr>
           <a:lstStyle/>
@@ -14194,7 +13815,7 @@
           <a:noFill/>
         </p:spPr>
         <p:txBody>
-          <a:bodyPr wrap="square" anchor="t" lIns="0" rIns="0" tIns="0" bIns="0">
+          <a:bodyPr wrap="square" lIns="0" tIns="0" rIns="0" bIns="0" anchor="t">
             <a:spAutoFit/>
           </a:bodyPr>
           <a:lstStyle/>
@@ -14257,6 +13878,7 @@
           <a:lstStyle/>
           <a:p>
             <a:pPr algn="ctr"/>
+            <a:endParaRPr/>
           </a:p>
         </p:txBody>
       </p:sp>
@@ -14277,7 +13899,7 @@
           <a:noFill/>
         </p:spPr>
         <p:txBody>
-          <a:bodyPr wrap="square" anchor="t" lIns="0" rIns="0" tIns="0" bIns="0">
+          <a:bodyPr wrap="square" lIns="0" tIns="0" rIns="0" bIns="0" anchor="t">
             <a:spAutoFit/>
           </a:bodyPr>
           <a:lstStyle/>
@@ -14316,7 +13938,7 @@
           <a:noFill/>
         </p:spPr>
         <p:txBody>
-          <a:bodyPr wrap="square" anchor="t" lIns="0" rIns="0" tIns="0" bIns="0">
+          <a:bodyPr wrap="square" lIns="0" tIns="0" rIns="0" bIns="0" anchor="t">
             <a:spAutoFit/>
           </a:bodyPr>
           <a:lstStyle/>
@@ -14379,6 +14001,7 @@
           <a:lstStyle/>
           <a:p>
             <a:pPr algn="ctr"/>
+            <a:endParaRPr/>
           </a:p>
         </p:txBody>
       </p:sp>
@@ -14399,7 +14022,7 @@
           <a:noFill/>
         </p:spPr>
         <p:txBody>
-          <a:bodyPr wrap="square" anchor="t" lIns="0" rIns="0" tIns="0" bIns="0">
+          <a:bodyPr wrap="square" lIns="0" tIns="0" rIns="0" bIns="0" anchor="t">
             <a:spAutoFit/>
           </a:bodyPr>
           <a:lstStyle/>
@@ -14438,7 +14061,7 @@
           <a:noFill/>
         </p:spPr>
         <p:txBody>
-          <a:bodyPr wrap="square" anchor="t" lIns="0" rIns="0" tIns="0" bIns="0">
+          <a:bodyPr wrap="square" lIns="0" tIns="0" rIns="0" bIns="0" anchor="t">
             <a:spAutoFit/>
           </a:bodyPr>
           <a:lstStyle/>
@@ -14501,6 +14124,7 @@
           <a:lstStyle/>
           <a:p>
             <a:pPr algn="ctr"/>
+            <a:endParaRPr/>
           </a:p>
         </p:txBody>
       </p:sp>
@@ -14521,7 +14145,7 @@
           <a:noFill/>
         </p:spPr>
         <p:txBody>
-          <a:bodyPr wrap="square" anchor="t" lIns="0" rIns="0" tIns="0" bIns="0">
+          <a:bodyPr wrap="square" lIns="0" tIns="0" rIns="0" bIns="0" anchor="t">
             <a:spAutoFit/>
           </a:bodyPr>
           <a:lstStyle/>
@@ -14560,7 +14184,7 @@
           <a:noFill/>
         </p:spPr>
         <p:txBody>
-          <a:bodyPr wrap="square" anchor="t" lIns="0" rIns="0" tIns="0" bIns="0">
+          <a:bodyPr wrap="square" lIns="0" tIns="0" rIns="0" bIns="0" anchor="t">
             <a:spAutoFit/>
           </a:bodyPr>
           <a:lstStyle/>
@@ -14623,6 +14247,7 @@
           <a:lstStyle/>
           <a:p>
             <a:pPr algn="ctr"/>
+            <a:endParaRPr/>
           </a:p>
         </p:txBody>
       </p:sp>
@@ -14643,7 +14268,7 @@
           <a:noFill/>
         </p:spPr>
         <p:txBody>
-          <a:bodyPr wrap="square" anchor="t" lIns="0" rIns="0" tIns="0" bIns="0">
+          <a:bodyPr wrap="square" lIns="0" tIns="0" rIns="0" bIns="0" anchor="t">
             <a:spAutoFit/>
           </a:bodyPr>
           <a:lstStyle/>
@@ -14682,7 +14307,7 @@
           <a:noFill/>
         </p:spPr>
         <p:txBody>
-          <a:bodyPr wrap="square" anchor="t" lIns="0" rIns="0" tIns="0" bIns="0">
+          <a:bodyPr wrap="square" lIns="0" tIns="0" rIns="0" bIns="0" anchor="t">
             <a:spAutoFit/>
           </a:bodyPr>
           <a:lstStyle/>
@@ -14745,6 +14370,7 @@
           <a:lstStyle/>
           <a:p>
             <a:pPr algn="ctr"/>
+            <a:endParaRPr/>
           </a:p>
         </p:txBody>
       </p:sp>
@@ -14765,7 +14391,7 @@
           <a:noFill/>
         </p:spPr>
         <p:txBody>
-          <a:bodyPr wrap="square" anchor="ctr" lIns="0" rIns="0" tIns="0" bIns="0">
+          <a:bodyPr wrap="square" lIns="0" tIns="0" rIns="0" bIns="0" anchor="ctr">
             <a:spAutoFit/>
           </a:bodyPr>
           <a:lstStyle/>
@@ -14804,7 +14430,7 @@
           <a:noFill/>
         </p:spPr>
         <p:txBody>
-          <a:bodyPr wrap="square" anchor="ctr" lIns="0" rIns="0" tIns="0" bIns="0">
+          <a:bodyPr wrap="square" lIns="0" tIns="0" rIns="0" bIns="0" anchor="ctr">
             <a:spAutoFit/>
           </a:bodyPr>
           <a:lstStyle/>
@@ -14835,7 +14461,7 @@
 </file>
 
 <file path=ppt/slides/slide19.xml><?xml version="1.0" encoding="utf-8"?>
-<p:sld xmlns:a="http://schemas.openxmlformats.org/drawingml/2006/main" xmlns:p="http://schemas.openxmlformats.org/presentationml/2006/main" xmlns:r="http://schemas.openxmlformats.org/officeDocument/2006/relationships" show="0">
+<p:sld xmlns:a="http://schemas.openxmlformats.org/drawingml/2006/main" xmlns:r="http://schemas.openxmlformats.org/officeDocument/2006/relationships" xmlns:p="http://schemas.openxmlformats.org/presentationml/2006/main" show="0">
   <p:cSld>
     <p:spTree>
       <p:nvGrpSpPr>
@@ -14843,7 +14469,14 @@
         <p:cNvGrpSpPr/>
         <p:nvPr/>
       </p:nvGrpSpPr>
-      <p:grpSpPr/>
+      <p:grpSpPr>
+        <a:xfrm>
+          <a:off x="0" y="0"/>
+          <a:ext cx="0" cy="0"/>
+          <a:chOff x="0" y="0"/>
+          <a:chExt cx="0" cy="0"/>
+        </a:xfrm>
+      </p:grpSpPr>
       <p:sp>
         <p:nvSpPr>
           <p:cNvPr id="2" name="Rectangle 1"/>
@@ -14885,6 +14518,7 @@
           <a:lstStyle/>
           <a:p>
             <a:pPr algn="ctr"/>
+            <a:endParaRPr/>
           </a:p>
         </p:txBody>
       </p:sp>
@@ -14929,6 +14563,7 @@
           <a:lstStyle/>
           <a:p>
             <a:pPr algn="ctr"/>
+            <a:endParaRPr/>
           </a:p>
         </p:txBody>
       </p:sp>
@@ -14949,7 +14584,7 @@
           <a:noFill/>
         </p:spPr>
         <p:txBody>
-          <a:bodyPr wrap="square" anchor="t" lIns="0" rIns="0" tIns="0" bIns="0">
+          <a:bodyPr wrap="square" lIns="0" tIns="0" rIns="0" bIns="0" anchor="t">
             <a:spAutoFit/>
           </a:bodyPr>
           <a:lstStyle/>
@@ -14988,7 +14623,7 @@
           <a:noFill/>
         </p:spPr>
         <p:txBody>
-          <a:bodyPr wrap="square" anchor="t" lIns="0" rIns="0" tIns="0" bIns="0">
+          <a:bodyPr wrap="square" lIns="0" tIns="0" rIns="0" bIns="0" anchor="t">
             <a:spAutoFit/>
           </a:bodyPr>
           <a:lstStyle/>
@@ -15051,6 +14686,7 @@
           <a:lstStyle/>
           <a:p>
             <a:pPr algn="ctr"/>
+            <a:endParaRPr/>
           </a:p>
         </p:txBody>
       </p:sp>
@@ -15073,15 +14709,39 @@
                 <a:tableStyleId>{5C22544A-7EE6-4342-B048-85BDC9FD1C3A}</a:tableStyleId>
               </a:tblPr>
               <a:tblGrid>
-                <a:gridCol w="548640"/>
-                <a:gridCol w="4297680"/>
-                <a:gridCol w="1005840"/>
-                <a:gridCol w="5394960"/>
+                <a:gridCol w="548640">
+                  <a:extLst>
+                    <a:ext uri="{9D8B030D-6E8A-4147-A177-3AD203B41FA5}">
+                      <a16:colId xmlns:a16="http://schemas.microsoft.com/office/drawing/2014/main" val="20000"/>
+                    </a:ext>
+                  </a:extLst>
+                </a:gridCol>
+                <a:gridCol w="4297680">
+                  <a:extLst>
+                    <a:ext uri="{9D8B030D-6E8A-4147-A177-3AD203B41FA5}">
+                      <a16:colId xmlns:a16="http://schemas.microsoft.com/office/drawing/2014/main" val="20001"/>
+                    </a:ext>
+                  </a:extLst>
+                </a:gridCol>
+                <a:gridCol w="1005840">
+                  <a:extLst>
+                    <a:ext uri="{9D8B030D-6E8A-4147-A177-3AD203B41FA5}">
+                      <a16:colId xmlns:a16="http://schemas.microsoft.com/office/drawing/2014/main" val="20002"/>
+                    </a:ext>
+                  </a:extLst>
+                </a:gridCol>
+                <a:gridCol w="5394960">
+                  <a:extLst>
+                    <a:ext uri="{9D8B030D-6E8A-4147-A177-3AD203B41FA5}">
+                      <a16:colId xmlns:a16="http://schemas.microsoft.com/office/drawing/2014/main" val="20003"/>
+                    </a:ext>
+                  </a:extLst>
+                </a:gridCol>
               </a:tblGrid>
               <a:tr h="560070">
                 <a:tc>
                   <a:txBody>
-                    <a:bodyPr wrap="square"/>
+                    <a:bodyPr/>
                     <a:lstStyle/>
                     <a:p>
                       <a:pPr algn="ctr"/>
@@ -15104,7 +14764,7 @@
                 </a:tc>
                 <a:tc>
                   <a:txBody>
-                    <a:bodyPr wrap="square"/>
+                    <a:bodyPr/>
                     <a:lstStyle/>
                     <a:p>
                       <a:pPr algn="l"/>
@@ -15127,7 +14787,7 @@
                 </a:tc>
                 <a:tc>
                   <a:txBody>
-                    <a:bodyPr wrap="square"/>
+                    <a:bodyPr/>
                     <a:lstStyle/>
                     <a:p>
                       <a:pPr algn="ctr"/>
@@ -15150,7 +14810,7 @@
                 </a:tc>
                 <a:tc>
                   <a:txBody>
-                    <a:bodyPr wrap="square"/>
+                    <a:bodyPr/>
                     <a:lstStyle/>
                     <a:p>
                       <a:pPr algn="l"/>
@@ -15171,11 +14831,16 @@
                     </a:solidFill>
                   </a:tcPr>
                 </a:tc>
+                <a:extLst>
+                  <a:ext uri="{0D108BD9-81ED-4DB2-BD59-A6C34878D82A}">
+                    <a16:rowId xmlns:a16="http://schemas.microsoft.com/office/drawing/2014/main" val="10000"/>
+                  </a:ext>
+                </a:extLst>
               </a:tr>
               <a:tr h="560070">
                 <a:tc>
                   <a:txBody>
-                    <a:bodyPr wrap="square"/>
+                    <a:bodyPr/>
                     <a:lstStyle/>
                     <a:p>
                       <a:pPr algn="ctr"/>
@@ -15198,7 +14863,7 @@
                 </a:tc>
                 <a:tc>
                   <a:txBody>
-                    <a:bodyPr wrap="square"/>
+                    <a:bodyPr/>
                     <a:lstStyle/>
                     <a:p>
                       <a:pPr algn="l"/>
@@ -15221,7 +14886,7 @@
                 </a:tc>
                 <a:tc>
                   <a:txBody>
-                    <a:bodyPr wrap="square"/>
+                    <a:bodyPr/>
                     <a:lstStyle/>
                     <a:p>
                       <a:pPr algn="ctr"/>
@@ -15244,7 +14909,7 @@
                 </a:tc>
                 <a:tc>
                   <a:txBody>
-                    <a:bodyPr wrap="square"/>
+                    <a:bodyPr/>
                     <a:lstStyle/>
                     <a:p>
                       <a:pPr algn="l"/>
@@ -15265,11 +14930,16 @@
                     </a:solidFill>
                   </a:tcPr>
                 </a:tc>
+                <a:extLst>
+                  <a:ext uri="{0D108BD9-81ED-4DB2-BD59-A6C34878D82A}">
+                    <a16:rowId xmlns:a16="http://schemas.microsoft.com/office/drawing/2014/main" val="10001"/>
+                  </a:ext>
+                </a:extLst>
               </a:tr>
               <a:tr h="560070">
                 <a:tc>
                   <a:txBody>
-                    <a:bodyPr wrap="square"/>
+                    <a:bodyPr/>
                     <a:lstStyle/>
                     <a:p>
                       <a:pPr algn="ctr"/>
@@ -15292,7 +14962,7 @@
                 </a:tc>
                 <a:tc>
                   <a:txBody>
-                    <a:bodyPr wrap="square"/>
+                    <a:bodyPr/>
                     <a:lstStyle/>
                     <a:p>
                       <a:pPr algn="l"/>
@@ -15315,7 +14985,7 @@
                 </a:tc>
                 <a:tc>
                   <a:txBody>
-                    <a:bodyPr wrap="square"/>
+                    <a:bodyPr/>
                     <a:lstStyle/>
                     <a:p>
                       <a:pPr algn="ctr"/>
@@ -15338,7 +15008,7 @@
                 </a:tc>
                 <a:tc>
                   <a:txBody>
-                    <a:bodyPr wrap="square"/>
+                    <a:bodyPr/>
                     <a:lstStyle/>
                     <a:p>
                       <a:pPr algn="l"/>
@@ -15359,11 +15029,16 @@
                     </a:solidFill>
                   </a:tcPr>
                 </a:tc>
+                <a:extLst>
+                  <a:ext uri="{0D108BD9-81ED-4DB2-BD59-A6C34878D82A}">
+                    <a16:rowId xmlns:a16="http://schemas.microsoft.com/office/drawing/2014/main" val="10002"/>
+                  </a:ext>
+                </a:extLst>
               </a:tr>
               <a:tr h="560070">
                 <a:tc>
                   <a:txBody>
-                    <a:bodyPr wrap="square"/>
+                    <a:bodyPr/>
                     <a:lstStyle/>
                     <a:p>
                       <a:pPr algn="ctr"/>
@@ -15386,7 +15061,7 @@
                 </a:tc>
                 <a:tc>
                   <a:txBody>
-                    <a:bodyPr wrap="square"/>
+                    <a:bodyPr/>
                     <a:lstStyle/>
                     <a:p>
                       <a:pPr algn="l"/>
@@ -15409,7 +15084,7 @@
                 </a:tc>
                 <a:tc>
                   <a:txBody>
-                    <a:bodyPr wrap="square"/>
+                    <a:bodyPr/>
                     <a:lstStyle/>
                     <a:p>
                       <a:pPr algn="ctr"/>
@@ -15432,7 +15107,7 @@
                 </a:tc>
                 <a:tc>
                   <a:txBody>
-                    <a:bodyPr wrap="square"/>
+                    <a:bodyPr/>
                     <a:lstStyle/>
                     <a:p>
                       <a:pPr algn="l"/>
@@ -15453,11 +15128,16 @@
                     </a:solidFill>
                   </a:tcPr>
                 </a:tc>
+                <a:extLst>
+                  <a:ext uri="{0D108BD9-81ED-4DB2-BD59-A6C34878D82A}">
+                    <a16:rowId xmlns:a16="http://schemas.microsoft.com/office/drawing/2014/main" val="10003"/>
+                  </a:ext>
+                </a:extLst>
               </a:tr>
               <a:tr h="560070">
                 <a:tc>
                   <a:txBody>
-                    <a:bodyPr wrap="square"/>
+                    <a:bodyPr/>
                     <a:lstStyle/>
                     <a:p>
                       <a:pPr algn="ctr"/>
@@ -15480,7 +15160,7 @@
                 </a:tc>
                 <a:tc>
                   <a:txBody>
-                    <a:bodyPr wrap="square"/>
+                    <a:bodyPr/>
                     <a:lstStyle/>
                     <a:p>
                       <a:pPr algn="l"/>
@@ -15503,7 +15183,7 @@
                 </a:tc>
                 <a:tc>
                   <a:txBody>
-                    <a:bodyPr wrap="square"/>
+                    <a:bodyPr/>
                     <a:lstStyle/>
                     <a:p>
                       <a:pPr algn="ctr"/>
@@ -15526,7 +15206,7 @@
                 </a:tc>
                 <a:tc>
                   <a:txBody>
-                    <a:bodyPr wrap="square"/>
+                    <a:bodyPr/>
                     <a:lstStyle/>
                     <a:p>
                       <a:pPr algn="l"/>
@@ -15547,11 +15227,16 @@
                     </a:solidFill>
                   </a:tcPr>
                 </a:tc>
+                <a:extLst>
+                  <a:ext uri="{0D108BD9-81ED-4DB2-BD59-A6C34878D82A}">
+                    <a16:rowId xmlns:a16="http://schemas.microsoft.com/office/drawing/2014/main" val="10004"/>
+                  </a:ext>
+                </a:extLst>
               </a:tr>
               <a:tr h="560070">
                 <a:tc>
                   <a:txBody>
-                    <a:bodyPr wrap="square"/>
+                    <a:bodyPr/>
                     <a:lstStyle/>
                     <a:p>
                       <a:pPr algn="ctr"/>
@@ -15574,7 +15259,7 @@
                 </a:tc>
                 <a:tc>
                   <a:txBody>
-                    <a:bodyPr wrap="square"/>
+                    <a:bodyPr/>
                     <a:lstStyle/>
                     <a:p>
                       <a:pPr algn="l"/>
@@ -15597,7 +15282,7 @@
                 </a:tc>
                 <a:tc>
                   <a:txBody>
-                    <a:bodyPr wrap="square"/>
+                    <a:bodyPr/>
                     <a:lstStyle/>
                     <a:p>
                       <a:pPr algn="ctr"/>
@@ -15620,7 +15305,7 @@
                 </a:tc>
                 <a:tc>
                   <a:txBody>
-                    <a:bodyPr wrap="square"/>
+                    <a:bodyPr/>
                     <a:lstStyle/>
                     <a:p>
                       <a:pPr algn="l"/>
@@ -15641,11 +15326,16 @@
                     </a:solidFill>
                   </a:tcPr>
                 </a:tc>
+                <a:extLst>
+                  <a:ext uri="{0D108BD9-81ED-4DB2-BD59-A6C34878D82A}">
+                    <a16:rowId xmlns:a16="http://schemas.microsoft.com/office/drawing/2014/main" val="10005"/>
+                  </a:ext>
+                </a:extLst>
               </a:tr>
               <a:tr h="560070">
                 <a:tc>
                   <a:txBody>
-                    <a:bodyPr wrap="square"/>
+                    <a:bodyPr/>
                     <a:lstStyle/>
                     <a:p>
                       <a:pPr algn="ctr"/>
@@ -15668,7 +15358,7 @@
                 </a:tc>
                 <a:tc>
                   <a:txBody>
-                    <a:bodyPr wrap="square"/>
+                    <a:bodyPr/>
                     <a:lstStyle/>
                     <a:p>
                       <a:pPr algn="l"/>
@@ -15691,7 +15381,7 @@
                 </a:tc>
                 <a:tc>
                   <a:txBody>
-                    <a:bodyPr wrap="square"/>
+                    <a:bodyPr/>
                     <a:lstStyle/>
                     <a:p>
                       <a:pPr algn="ctr"/>
@@ -15714,7 +15404,7 @@
                 </a:tc>
                 <a:tc>
                   <a:txBody>
-                    <a:bodyPr wrap="square"/>
+                    <a:bodyPr/>
                     <a:lstStyle/>
                     <a:p>
                       <a:pPr algn="l"/>
@@ -15735,11 +15425,16 @@
                     </a:solidFill>
                   </a:tcPr>
                 </a:tc>
+                <a:extLst>
+                  <a:ext uri="{0D108BD9-81ED-4DB2-BD59-A6C34878D82A}">
+                    <a16:rowId xmlns:a16="http://schemas.microsoft.com/office/drawing/2014/main" val="10006"/>
+                  </a:ext>
+                </a:extLst>
               </a:tr>
               <a:tr h="560070">
                 <a:tc>
                   <a:txBody>
-                    <a:bodyPr wrap="square"/>
+                    <a:bodyPr/>
                     <a:lstStyle/>
                     <a:p>
                       <a:pPr algn="ctr"/>
@@ -15762,7 +15457,7 @@
                 </a:tc>
                 <a:tc>
                   <a:txBody>
-                    <a:bodyPr wrap="square"/>
+                    <a:bodyPr/>
                     <a:lstStyle/>
                     <a:p>
                       <a:pPr algn="l"/>
@@ -15785,7 +15480,7 @@
                 </a:tc>
                 <a:tc>
                   <a:txBody>
-                    <a:bodyPr wrap="square"/>
+                    <a:bodyPr/>
                     <a:lstStyle/>
                     <a:p>
                       <a:pPr algn="ctr"/>
@@ -15808,7 +15503,7 @@
                 </a:tc>
                 <a:tc>
                   <a:txBody>
-                    <a:bodyPr wrap="square"/>
+                    <a:bodyPr/>
                     <a:lstStyle/>
                     <a:p>
                       <a:pPr algn="l"/>
@@ -15829,6 +15524,11 @@
                     </a:solidFill>
                   </a:tcPr>
                 </a:tc>
+                <a:extLst>
+                  <a:ext uri="{0D108BD9-81ED-4DB2-BD59-A6C34878D82A}">
+                    <a16:rowId xmlns:a16="http://schemas.microsoft.com/office/drawing/2014/main" val="10007"/>
+                  </a:ext>
+                </a:extLst>
               </a:tr>
             </a:tbl>
           </a:graphicData>
@@ -15875,6 +15575,7 @@
           <a:lstStyle/>
           <a:p>
             <a:pPr algn="ctr"/>
+            <a:endParaRPr/>
           </a:p>
         </p:txBody>
       </p:sp>
@@ -15895,7 +15596,7 @@
           <a:noFill/>
         </p:spPr>
         <p:txBody>
-          <a:bodyPr wrap="square" anchor="ctr" lIns="0" rIns="0" tIns="0" bIns="0">
+          <a:bodyPr wrap="square" lIns="0" tIns="0" rIns="0" bIns="0" anchor="ctr">
             <a:spAutoFit/>
           </a:bodyPr>
           <a:lstStyle/>
@@ -15934,7 +15635,7 @@
           <a:noFill/>
         </p:spPr>
         <p:txBody>
-          <a:bodyPr wrap="square" anchor="ctr" lIns="0" rIns="0" tIns="0" bIns="0">
+          <a:bodyPr wrap="square" lIns="0" tIns="0" rIns="0" bIns="0" anchor="ctr">
             <a:spAutoFit/>
           </a:bodyPr>
           <a:lstStyle/>
@@ -15965,7 +15666,7 @@
 </file>
 
 <file path=ppt/slides/slide2.xml><?xml version="1.0" encoding="utf-8"?>
-<p:sld xmlns:a="http://schemas.openxmlformats.org/drawingml/2006/main" xmlns:p="http://schemas.openxmlformats.org/presentationml/2006/main" xmlns:r="http://schemas.openxmlformats.org/officeDocument/2006/relationships">
+<p:sld xmlns:a="http://schemas.openxmlformats.org/drawingml/2006/main" xmlns:r="http://schemas.openxmlformats.org/officeDocument/2006/relationships" xmlns:p="http://schemas.openxmlformats.org/presentationml/2006/main">
   <p:cSld>
     <p:spTree>
       <p:nvGrpSpPr>
@@ -15973,7 +15674,14 @@
         <p:cNvGrpSpPr/>
         <p:nvPr/>
       </p:nvGrpSpPr>
-      <p:grpSpPr/>
+      <p:grpSpPr>
+        <a:xfrm>
+          <a:off x="0" y="0"/>
+          <a:ext cx="0" cy="0"/>
+          <a:chOff x="0" y="0"/>
+          <a:chExt cx="0" cy="0"/>
+        </a:xfrm>
+      </p:grpSpPr>
       <p:sp>
         <p:nvSpPr>
           <p:cNvPr id="2" name="Rectangle 1"/>
@@ -16015,6 +15723,7 @@
           <a:lstStyle/>
           <a:p>
             <a:pPr algn="ctr"/>
+            <a:endParaRPr/>
           </a:p>
         </p:txBody>
       </p:sp>
@@ -16059,6 +15768,7 @@
           <a:lstStyle/>
           <a:p>
             <a:pPr algn="ctr"/>
+            <a:endParaRPr/>
           </a:p>
         </p:txBody>
       </p:sp>
@@ -16079,7 +15789,7 @@
           <a:noFill/>
         </p:spPr>
         <p:txBody>
-          <a:bodyPr wrap="square" anchor="t" lIns="0" rIns="0" tIns="0" bIns="0">
+          <a:bodyPr wrap="square" lIns="0" tIns="0" rIns="0" bIns="0" anchor="t">
             <a:spAutoFit/>
           </a:bodyPr>
           <a:lstStyle/>
@@ -16118,7 +15828,7 @@
           <a:noFill/>
         </p:spPr>
         <p:txBody>
-          <a:bodyPr wrap="square" anchor="t" lIns="0" rIns="0" tIns="0" bIns="0">
+          <a:bodyPr wrap="square" lIns="0" tIns="0" rIns="0" bIns="0" anchor="t">
             <a:spAutoFit/>
           </a:bodyPr>
           <a:lstStyle/>
@@ -16181,6 +15891,7 @@
           <a:lstStyle/>
           <a:p>
             <a:pPr algn="ctr"/>
+            <a:endParaRPr/>
           </a:p>
         </p:txBody>
       </p:sp>
@@ -16201,7 +15912,7 @@
           <a:noFill/>
         </p:spPr>
         <p:txBody>
-          <a:bodyPr wrap="square" anchor="t" lIns="0" rIns="0" tIns="0" bIns="0">
+          <a:bodyPr wrap="square" lIns="0" tIns="0" rIns="0" bIns="0" anchor="t">
             <a:spAutoFit/>
           </a:bodyPr>
           <a:lstStyle/>
@@ -16240,7 +15951,7 @@
           <a:noFill/>
         </p:spPr>
         <p:txBody>
-          <a:bodyPr wrap="square" anchor="t" lIns="0" rIns="0" tIns="0" bIns="0">
+          <a:bodyPr wrap="square" lIns="0" tIns="0" rIns="0" bIns="0" anchor="t">
             <a:spAutoFit/>
           </a:bodyPr>
           <a:lstStyle/>
@@ -16279,7 +15990,7 @@
           <a:noFill/>
         </p:spPr>
         <p:txBody>
-          <a:bodyPr wrap="square" anchor="t" lIns="0" rIns="0" tIns="0" bIns="0">
+          <a:bodyPr wrap="square" lIns="0" tIns="0" rIns="0" bIns="0" anchor="t">
             <a:spAutoFit/>
           </a:bodyPr>
           <a:lstStyle/>
@@ -16318,7 +16029,7 @@
           <a:noFill/>
         </p:spPr>
         <p:txBody>
-          <a:bodyPr wrap="square" anchor="t" lIns="0" rIns="0" tIns="0" bIns="0">
+          <a:bodyPr wrap="square" lIns="0" tIns="0" rIns="0" bIns="0" anchor="t">
             <a:spAutoFit/>
           </a:bodyPr>
           <a:lstStyle/>
@@ -16357,7 +16068,7 @@
           <a:noFill/>
         </p:spPr>
         <p:txBody>
-          <a:bodyPr wrap="square" anchor="t" lIns="0" rIns="0" tIns="0" bIns="0">
+          <a:bodyPr wrap="square" lIns="0" tIns="0" rIns="0" bIns="0" anchor="t">
             <a:spAutoFit/>
           </a:bodyPr>
           <a:lstStyle/>
@@ -16396,7 +16107,7 @@
           <a:noFill/>
         </p:spPr>
         <p:txBody>
-          <a:bodyPr wrap="square" anchor="t" lIns="0" rIns="0" tIns="0" bIns="0">
+          <a:bodyPr wrap="square" lIns="0" tIns="0" rIns="0" bIns="0" anchor="t">
             <a:spAutoFit/>
           </a:bodyPr>
           <a:lstStyle/>
@@ -16435,7 +16146,7 @@
           <a:noFill/>
         </p:spPr>
         <p:txBody>
-          <a:bodyPr wrap="square" anchor="t" lIns="0" rIns="0" tIns="0" bIns="0">
+          <a:bodyPr wrap="square" lIns="0" tIns="0" rIns="0" bIns="0" anchor="t">
             <a:spAutoFit/>
           </a:bodyPr>
           <a:lstStyle/>
@@ -16474,7 +16185,7 @@
           <a:noFill/>
         </p:spPr>
         <p:txBody>
-          <a:bodyPr wrap="square" anchor="t" lIns="0" rIns="0" tIns="0" bIns="0">
+          <a:bodyPr wrap="square" lIns="0" tIns="0" rIns="0" bIns="0" anchor="t">
             <a:spAutoFit/>
           </a:bodyPr>
           <a:lstStyle/>
@@ -16513,7 +16224,7 @@
           <a:noFill/>
         </p:spPr>
         <p:txBody>
-          <a:bodyPr wrap="square" anchor="t" lIns="0" rIns="0" tIns="0" bIns="0">
+          <a:bodyPr wrap="square" lIns="0" tIns="0" rIns="0" bIns="0" anchor="t">
             <a:spAutoFit/>
           </a:bodyPr>
           <a:lstStyle/>
@@ -16552,7 +16263,7 @@
           <a:noFill/>
         </p:spPr>
         <p:txBody>
-          <a:bodyPr wrap="square" anchor="t" lIns="0" rIns="0" tIns="0" bIns="0">
+          <a:bodyPr wrap="square" lIns="0" tIns="0" rIns="0" bIns="0" anchor="t">
             <a:spAutoFit/>
           </a:bodyPr>
           <a:lstStyle/>
@@ -16591,7 +16302,7 @@
           <a:noFill/>
         </p:spPr>
         <p:txBody>
-          <a:bodyPr wrap="square" anchor="t" lIns="0" rIns="0" tIns="0" bIns="0">
+          <a:bodyPr wrap="square" lIns="0" tIns="0" rIns="0" bIns="0" anchor="t">
             <a:spAutoFit/>
           </a:bodyPr>
           <a:lstStyle/>
@@ -16630,7 +16341,7 @@
           <a:noFill/>
         </p:spPr>
         <p:txBody>
-          <a:bodyPr wrap="square" anchor="t" lIns="0" rIns="0" tIns="0" bIns="0">
+          <a:bodyPr wrap="square" lIns="0" tIns="0" rIns="0" bIns="0" anchor="t">
             <a:spAutoFit/>
           </a:bodyPr>
           <a:lstStyle/>
@@ -16669,7 +16380,7 @@
           <a:noFill/>
         </p:spPr>
         <p:txBody>
-          <a:bodyPr wrap="square" anchor="t" lIns="0" rIns="0" tIns="0" bIns="0">
+          <a:bodyPr wrap="square" lIns="0" tIns="0" rIns="0" bIns="0" anchor="t">
             <a:spAutoFit/>
           </a:bodyPr>
           <a:lstStyle/>
@@ -16708,7 +16419,7 @@
           <a:noFill/>
         </p:spPr>
         <p:txBody>
-          <a:bodyPr wrap="square" anchor="t" lIns="0" rIns="0" tIns="0" bIns="0">
+          <a:bodyPr wrap="square" lIns="0" tIns="0" rIns="0" bIns="0" anchor="t">
             <a:spAutoFit/>
           </a:bodyPr>
           <a:lstStyle/>
@@ -16747,7 +16458,7 @@
           <a:noFill/>
         </p:spPr>
         <p:txBody>
-          <a:bodyPr wrap="square" anchor="t" lIns="0" rIns="0" tIns="0" bIns="0">
+          <a:bodyPr wrap="square" lIns="0" tIns="0" rIns="0" bIns="0" anchor="t">
             <a:spAutoFit/>
           </a:bodyPr>
           <a:lstStyle/>
@@ -16786,7 +16497,7 @@
           <a:noFill/>
         </p:spPr>
         <p:txBody>
-          <a:bodyPr wrap="square" anchor="t" lIns="0" rIns="0" tIns="0" bIns="0">
+          <a:bodyPr wrap="square" lIns="0" tIns="0" rIns="0" bIns="0" anchor="t">
             <a:spAutoFit/>
           </a:bodyPr>
           <a:lstStyle/>
@@ -16825,7 +16536,7 @@
           <a:noFill/>
         </p:spPr>
         <p:txBody>
-          <a:bodyPr wrap="square" anchor="t" lIns="0" rIns="0" tIns="0" bIns="0">
+          <a:bodyPr wrap="square" lIns="0" tIns="0" rIns="0" bIns="0" anchor="t">
             <a:spAutoFit/>
           </a:bodyPr>
           <a:lstStyle/>
@@ -16864,7 +16575,7 @@
           <a:noFill/>
         </p:spPr>
         <p:txBody>
-          <a:bodyPr wrap="square" anchor="t" lIns="0" rIns="0" tIns="0" bIns="0">
+          <a:bodyPr wrap="square" lIns="0" tIns="0" rIns="0" bIns="0" anchor="t">
             <a:spAutoFit/>
           </a:bodyPr>
           <a:lstStyle/>
@@ -16903,7 +16614,7 @@
           <a:noFill/>
         </p:spPr>
         <p:txBody>
-          <a:bodyPr wrap="square" anchor="t" lIns="0" rIns="0" tIns="0" bIns="0">
+          <a:bodyPr wrap="square" lIns="0" tIns="0" rIns="0" bIns="0" anchor="t">
             <a:spAutoFit/>
           </a:bodyPr>
           <a:lstStyle/>
@@ -16942,7 +16653,7 @@
           <a:noFill/>
         </p:spPr>
         <p:txBody>
-          <a:bodyPr wrap="square" anchor="t" lIns="0" rIns="0" tIns="0" bIns="0">
+          <a:bodyPr wrap="square" lIns="0" tIns="0" rIns="0" bIns="0" anchor="t">
             <a:spAutoFit/>
           </a:bodyPr>
           <a:lstStyle/>
@@ -16981,7 +16692,7 @@
           <a:noFill/>
         </p:spPr>
         <p:txBody>
-          <a:bodyPr wrap="square" anchor="t" lIns="0" rIns="0" tIns="0" bIns="0">
+          <a:bodyPr wrap="square" lIns="0" tIns="0" rIns="0" bIns="0" anchor="t">
             <a:spAutoFit/>
           </a:bodyPr>
           <a:lstStyle/>
@@ -17020,7 +16731,7 @@
           <a:noFill/>
         </p:spPr>
         <p:txBody>
-          <a:bodyPr wrap="square" anchor="t" lIns="0" rIns="0" tIns="0" bIns="0">
+          <a:bodyPr wrap="square" lIns="0" tIns="0" rIns="0" bIns="0" anchor="t">
             <a:spAutoFit/>
           </a:bodyPr>
           <a:lstStyle/>
@@ -17059,7 +16770,7 @@
           <a:noFill/>
         </p:spPr>
         <p:txBody>
-          <a:bodyPr wrap="square" anchor="t" lIns="0" rIns="0" tIns="0" bIns="0">
+          <a:bodyPr wrap="square" lIns="0" tIns="0" rIns="0" bIns="0" anchor="t">
             <a:spAutoFit/>
           </a:bodyPr>
           <a:lstStyle/>
@@ -17098,7 +16809,7 @@
           <a:noFill/>
         </p:spPr>
         <p:txBody>
-          <a:bodyPr wrap="square" anchor="t" lIns="0" rIns="0" tIns="0" bIns="0">
+          <a:bodyPr wrap="square" lIns="0" tIns="0" rIns="0" bIns="0" anchor="t">
             <a:spAutoFit/>
           </a:bodyPr>
           <a:lstStyle/>
@@ -17161,6 +16872,7 @@
           <a:lstStyle/>
           <a:p>
             <a:pPr algn="ctr"/>
+            <a:endParaRPr/>
           </a:p>
         </p:txBody>
       </p:sp>
@@ -17181,7 +16893,7 @@
           <a:noFill/>
         </p:spPr>
         <p:txBody>
-          <a:bodyPr wrap="square" anchor="t" lIns="0" rIns="0" tIns="0" bIns="0">
+          <a:bodyPr wrap="square" lIns="0" tIns="0" rIns="0" bIns="0" anchor="t">
             <a:spAutoFit/>
           </a:bodyPr>
           <a:lstStyle/>
@@ -17244,6 +16956,7 @@
           <a:lstStyle/>
           <a:p>
             <a:pPr algn="ctr"/>
+            <a:endParaRPr/>
           </a:p>
         </p:txBody>
       </p:sp>
@@ -17264,7 +16977,7 @@
           <a:noFill/>
         </p:spPr>
         <p:txBody>
-          <a:bodyPr wrap="square" anchor="ctr" lIns="0" rIns="0" tIns="0" bIns="0">
+          <a:bodyPr wrap="square" lIns="0" tIns="0" rIns="0" bIns="0" anchor="ctr">
             <a:spAutoFit/>
           </a:bodyPr>
           <a:lstStyle/>
@@ -17303,7 +17016,7 @@
           <a:noFill/>
         </p:spPr>
         <p:txBody>
-          <a:bodyPr wrap="square" anchor="ctr" lIns="0" rIns="0" tIns="0" bIns="0">
+          <a:bodyPr wrap="square" lIns="0" tIns="0" rIns="0" bIns="0" anchor="ctr">
             <a:spAutoFit/>
           </a:bodyPr>
           <a:lstStyle/>
@@ -17334,7 +17047,7 @@
 </file>
 
 <file path=ppt/slides/slide20.xml><?xml version="1.0" encoding="utf-8"?>
-<p:sld xmlns:a="http://schemas.openxmlformats.org/drawingml/2006/main" xmlns:p="http://schemas.openxmlformats.org/presentationml/2006/main" xmlns:r="http://schemas.openxmlformats.org/officeDocument/2006/relationships" show="0">
+<p:sld xmlns:a="http://schemas.openxmlformats.org/drawingml/2006/main" xmlns:r="http://schemas.openxmlformats.org/officeDocument/2006/relationships" xmlns:p="http://schemas.openxmlformats.org/presentationml/2006/main" show="0">
   <p:cSld>
     <p:spTree>
       <p:nvGrpSpPr>
@@ -17342,7 +17055,14 @@
         <p:cNvGrpSpPr/>
         <p:nvPr/>
       </p:nvGrpSpPr>
-      <p:grpSpPr/>
+      <p:grpSpPr>
+        <a:xfrm>
+          <a:off x="0" y="0"/>
+          <a:ext cx="0" cy="0"/>
+          <a:chOff x="0" y="0"/>
+          <a:chExt cx="0" cy="0"/>
+        </a:xfrm>
+      </p:grpSpPr>
       <p:sp>
         <p:nvSpPr>
           <p:cNvPr id="2" name="Rectangle 1"/>
@@ -17384,6 +17104,7 @@
           <a:lstStyle/>
           <a:p>
             <a:pPr algn="ctr"/>
+            <a:endParaRPr/>
           </a:p>
         </p:txBody>
       </p:sp>
@@ -17428,6 +17149,7 @@
           <a:lstStyle/>
           <a:p>
             <a:pPr algn="ctr"/>
+            <a:endParaRPr/>
           </a:p>
         </p:txBody>
       </p:sp>
@@ -17448,7 +17170,7 @@
           <a:noFill/>
         </p:spPr>
         <p:txBody>
-          <a:bodyPr wrap="square" anchor="t" lIns="0" rIns="0" tIns="0" bIns="0">
+          <a:bodyPr wrap="square" lIns="0" tIns="0" rIns="0" bIns="0" anchor="t">
             <a:spAutoFit/>
           </a:bodyPr>
           <a:lstStyle/>
@@ -17487,7 +17209,7 @@
           <a:noFill/>
         </p:spPr>
         <p:txBody>
-          <a:bodyPr wrap="square" anchor="t" lIns="0" rIns="0" tIns="0" bIns="0">
+          <a:bodyPr wrap="square" lIns="0" tIns="0" rIns="0" bIns="0" anchor="t">
             <a:spAutoFit/>
           </a:bodyPr>
           <a:lstStyle/>
@@ -17550,6 +17272,7 @@
           <a:lstStyle/>
           <a:p>
             <a:pPr algn="ctr"/>
+            <a:endParaRPr/>
           </a:p>
         </p:txBody>
       </p:sp>
@@ -17572,14 +17295,32 @@
                 <a:tableStyleId>{5C22544A-7EE6-4342-B048-85BDC9FD1C3A}</a:tableStyleId>
               </a:tblPr>
               <a:tblGrid>
-                <a:gridCol w="1645920"/>
-                <a:gridCol w="3474720"/>
-                <a:gridCol w="6126480"/>
+                <a:gridCol w="1645920">
+                  <a:extLst>
+                    <a:ext uri="{9D8B030D-6E8A-4147-A177-3AD203B41FA5}">
+                      <a16:colId xmlns:a16="http://schemas.microsoft.com/office/drawing/2014/main" val="20000"/>
+                    </a:ext>
+                  </a:extLst>
+                </a:gridCol>
+                <a:gridCol w="3474720">
+                  <a:extLst>
+                    <a:ext uri="{9D8B030D-6E8A-4147-A177-3AD203B41FA5}">
+                      <a16:colId xmlns:a16="http://schemas.microsoft.com/office/drawing/2014/main" val="20001"/>
+                    </a:ext>
+                  </a:extLst>
+                </a:gridCol>
+                <a:gridCol w="6126480">
+                  <a:extLst>
+                    <a:ext uri="{9D8B030D-6E8A-4147-A177-3AD203B41FA5}">
+                      <a16:colId xmlns:a16="http://schemas.microsoft.com/office/drawing/2014/main" val="20002"/>
+                    </a:ext>
+                  </a:extLst>
+                </a:gridCol>
               </a:tblGrid>
               <a:tr h="508000">
                 <a:tc>
                   <a:txBody>
-                    <a:bodyPr wrap="square"/>
+                    <a:bodyPr/>
                     <a:lstStyle/>
                     <a:p>
                       <a:pPr algn="l"/>
@@ -17602,7 +17343,7 @@
                 </a:tc>
                 <a:tc>
                   <a:txBody>
-                    <a:bodyPr wrap="square"/>
+                    <a:bodyPr/>
                     <a:lstStyle/>
                     <a:p>
                       <a:pPr algn="l"/>
@@ -17625,7 +17366,7 @@
                 </a:tc>
                 <a:tc>
                   <a:txBody>
-                    <a:bodyPr wrap="square"/>
+                    <a:bodyPr/>
                     <a:lstStyle/>
                     <a:p>
                       <a:pPr algn="l"/>
@@ -17646,11 +17387,16 @@
                     </a:solidFill>
                   </a:tcPr>
                 </a:tc>
+                <a:extLst>
+                  <a:ext uri="{0D108BD9-81ED-4DB2-BD59-A6C34878D82A}">
+                    <a16:rowId xmlns:a16="http://schemas.microsoft.com/office/drawing/2014/main" val="10000"/>
+                  </a:ext>
+                </a:extLst>
               </a:tr>
               <a:tr h="508000">
                 <a:tc>
                   <a:txBody>
-                    <a:bodyPr wrap="square"/>
+                    <a:bodyPr/>
                     <a:lstStyle/>
                     <a:p>
                       <a:pPr algn="l"/>
@@ -17673,7 +17419,7 @@
                 </a:tc>
                 <a:tc>
                   <a:txBody>
-                    <a:bodyPr wrap="square"/>
+                    <a:bodyPr/>
                     <a:lstStyle/>
                     <a:p>
                       <a:pPr algn="l"/>
@@ -17696,7 +17442,7 @@
                 </a:tc>
                 <a:tc>
                   <a:txBody>
-                    <a:bodyPr wrap="square"/>
+                    <a:bodyPr/>
                     <a:lstStyle/>
                     <a:p>
                       <a:pPr algn="l"/>
@@ -17717,11 +17463,16 @@
                     </a:solidFill>
                   </a:tcPr>
                 </a:tc>
+                <a:extLst>
+                  <a:ext uri="{0D108BD9-81ED-4DB2-BD59-A6C34878D82A}">
+                    <a16:rowId xmlns:a16="http://schemas.microsoft.com/office/drawing/2014/main" val="10001"/>
+                  </a:ext>
+                </a:extLst>
               </a:tr>
               <a:tr h="508000">
                 <a:tc>
                   <a:txBody>
-                    <a:bodyPr wrap="square"/>
+                    <a:bodyPr/>
                     <a:lstStyle/>
                     <a:p>
                       <a:pPr algn="l"/>
@@ -17744,7 +17495,7 @@
                 </a:tc>
                 <a:tc>
                   <a:txBody>
-                    <a:bodyPr wrap="square"/>
+                    <a:bodyPr/>
                     <a:lstStyle/>
                     <a:p>
                       <a:pPr algn="l"/>
@@ -17767,7 +17518,7 @@
                 </a:tc>
                 <a:tc>
                   <a:txBody>
-                    <a:bodyPr wrap="square"/>
+                    <a:bodyPr/>
                     <a:lstStyle/>
                     <a:p>
                       <a:pPr algn="l"/>
@@ -17788,11 +17539,16 @@
                     </a:solidFill>
                   </a:tcPr>
                 </a:tc>
+                <a:extLst>
+                  <a:ext uri="{0D108BD9-81ED-4DB2-BD59-A6C34878D82A}">
+                    <a16:rowId xmlns:a16="http://schemas.microsoft.com/office/drawing/2014/main" val="10002"/>
+                  </a:ext>
+                </a:extLst>
               </a:tr>
               <a:tr h="508000">
                 <a:tc>
                   <a:txBody>
-                    <a:bodyPr wrap="square"/>
+                    <a:bodyPr/>
                     <a:lstStyle/>
                     <a:p>
                       <a:pPr algn="l"/>
@@ -17815,7 +17571,7 @@
                 </a:tc>
                 <a:tc>
                   <a:txBody>
-                    <a:bodyPr wrap="square"/>
+                    <a:bodyPr/>
                     <a:lstStyle/>
                     <a:p>
                       <a:pPr algn="l"/>
@@ -17838,7 +17594,7 @@
                 </a:tc>
                 <a:tc>
                   <a:txBody>
-                    <a:bodyPr wrap="square"/>
+                    <a:bodyPr/>
                     <a:lstStyle/>
                     <a:p>
                       <a:pPr algn="l"/>
@@ -17859,11 +17615,16 @@
                     </a:solidFill>
                   </a:tcPr>
                 </a:tc>
+                <a:extLst>
+                  <a:ext uri="{0D108BD9-81ED-4DB2-BD59-A6C34878D82A}">
+                    <a16:rowId xmlns:a16="http://schemas.microsoft.com/office/drawing/2014/main" val="10003"/>
+                  </a:ext>
+                </a:extLst>
               </a:tr>
               <a:tr h="508000">
                 <a:tc>
                   <a:txBody>
-                    <a:bodyPr wrap="square"/>
+                    <a:bodyPr/>
                     <a:lstStyle/>
                     <a:p>
                       <a:pPr algn="l"/>
@@ -17886,7 +17647,7 @@
                 </a:tc>
                 <a:tc>
                   <a:txBody>
-                    <a:bodyPr wrap="square"/>
+                    <a:bodyPr/>
                     <a:lstStyle/>
                     <a:p>
                       <a:pPr algn="l"/>
@@ -17909,7 +17670,7 @@
                 </a:tc>
                 <a:tc>
                   <a:txBody>
-                    <a:bodyPr wrap="square"/>
+                    <a:bodyPr/>
                     <a:lstStyle/>
                     <a:p>
                       <a:pPr algn="l"/>
@@ -17930,11 +17691,16 @@
                     </a:solidFill>
                   </a:tcPr>
                 </a:tc>
+                <a:extLst>
+                  <a:ext uri="{0D108BD9-81ED-4DB2-BD59-A6C34878D82A}">
+                    <a16:rowId xmlns:a16="http://schemas.microsoft.com/office/drawing/2014/main" val="10004"/>
+                  </a:ext>
+                </a:extLst>
               </a:tr>
               <a:tr h="508000">
                 <a:tc>
                   <a:txBody>
-                    <a:bodyPr wrap="square"/>
+                    <a:bodyPr/>
                     <a:lstStyle/>
                     <a:p>
                       <a:pPr algn="l"/>
@@ -17957,7 +17723,7 @@
                 </a:tc>
                 <a:tc>
                   <a:txBody>
-                    <a:bodyPr wrap="square"/>
+                    <a:bodyPr/>
                     <a:lstStyle/>
                     <a:p>
                       <a:pPr algn="l"/>
@@ -17980,7 +17746,7 @@
                 </a:tc>
                 <a:tc>
                   <a:txBody>
-                    <a:bodyPr wrap="square"/>
+                    <a:bodyPr/>
                     <a:lstStyle/>
                     <a:p>
                       <a:pPr algn="l"/>
@@ -18001,11 +17767,16 @@
                     </a:solidFill>
                   </a:tcPr>
                 </a:tc>
+                <a:extLst>
+                  <a:ext uri="{0D108BD9-81ED-4DB2-BD59-A6C34878D82A}">
+                    <a16:rowId xmlns:a16="http://schemas.microsoft.com/office/drawing/2014/main" val="10005"/>
+                  </a:ext>
+                </a:extLst>
               </a:tr>
               <a:tr h="508000">
                 <a:tc>
                   <a:txBody>
-                    <a:bodyPr wrap="square"/>
+                    <a:bodyPr/>
                     <a:lstStyle/>
                     <a:p>
                       <a:pPr algn="l"/>
@@ -18028,7 +17799,7 @@
                 </a:tc>
                 <a:tc>
                   <a:txBody>
-                    <a:bodyPr wrap="square"/>
+                    <a:bodyPr/>
                     <a:lstStyle/>
                     <a:p>
                       <a:pPr algn="l"/>
@@ -18051,7 +17822,7 @@
                 </a:tc>
                 <a:tc>
                   <a:txBody>
-                    <a:bodyPr wrap="square"/>
+                    <a:bodyPr/>
                     <a:lstStyle/>
                     <a:p>
                       <a:pPr algn="l"/>
@@ -18072,11 +17843,16 @@
                     </a:solidFill>
                   </a:tcPr>
                 </a:tc>
+                <a:extLst>
+                  <a:ext uri="{0D108BD9-81ED-4DB2-BD59-A6C34878D82A}">
+                    <a16:rowId xmlns:a16="http://schemas.microsoft.com/office/drawing/2014/main" val="10006"/>
+                  </a:ext>
+                </a:extLst>
               </a:tr>
               <a:tr h="508000">
                 <a:tc>
                   <a:txBody>
-                    <a:bodyPr wrap="square"/>
+                    <a:bodyPr/>
                     <a:lstStyle/>
                     <a:p>
                       <a:pPr algn="l"/>
@@ -18099,7 +17875,7 @@
                 </a:tc>
                 <a:tc>
                   <a:txBody>
-                    <a:bodyPr wrap="square"/>
+                    <a:bodyPr/>
                     <a:lstStyle/>
                     <a:p>
                       <a:pPr algn="l"/>
@@ -18122,7 +17898,7 @@
                 </a:tc>
                 <a:tc>
                   <a:txBody>
-                    <a:bodyPr wrap="square"/>
+                    <a:bodyPr/>
                     <a:lstStyle/>
                     <a:p>
                       <a:pPr algn="l"/>
@@ -18143,11 +17919,16 @@
                     </a:solidFill>
                   </a:tcPr>
                 </a:tc>
+                <a:extLst>
+                  <a:ext uri="{0D108BD9-81ED-4DB2-BD59-A6C34878D82A}">
+                    <a16:rowId xmlns:a16="http://schemas.microsoft.com/office/drawing/2014/main" val="10007"/>
+                  </a:ext>
+                </a:extLst>
               </a:tr>
               <a:tr h="508000">
                 <a:tc>
                   <a:txBody>
-                    <a:bodyPr wrap="square"/>
+                    <a:bodyPr/>
                     <a:lstStyle/>
                     <a:p>
                       <a:pPr algn="l"/>
@@ -18170,7 +17951,7 @@
                 </a:tc>
                 <a:tc>
                   <a:txBody>
-                    <a:bodyPr wrap="square"/>
+                    <a:bodyPr/>
                     <a:lstStyle/>
                     <a:p>
                       <a:pPr algn="l"/>
@@ -18193,7 +17974,7 @@
                 </a:tc>
                 <a:tc>
                   <a:txBody>
-                    <a:bodyPr wrap="square"/>
+                    <a:bodyPr/>
                     <a:lstStyle/>
                     <a:p>
                       <a:pPr algn="l"/>
@@ -18214,6 +17995,11 @@
                     </a:solidFill>
                   </a:tcPr>
                 </a:tc>
+                <a:extLst>
+                  <a:ext uri="{0D108BD9-81ED-4DB2-BD59-A6C34878D82A}">
+                    <a16:rowId xmlns:a16="http://schemas.microsoft.com/office/drawing/2014/main" val="10008"/>
+                  </a:ext>
+                </a:extLst>
               </a:tr>
             </a:tbl>
           </a:graphicData>
@@ -18260,6 +18046,7 @@
           <a:lstStyle/>
           <a:p>
             <a:pPr algn="ctr"/>
+            <a:endParaRPr/>
           </a:p>
         </p:txBody>
       </p:sp>
@@ -18280,7 +18067,7 @@
           <a:noFill/>
         </p:spPr>
         <p:txBody>
-          <a:bodyPr wrap="square" anchor="ctr" lIns="0" rIns="0" tIns="0" bIns="0">
+          <a:bodyPr wrap="square" lIns="0" tIns="0" rIns="0" bIns="0" anchor="ctr">
             <a:spAutoFit/>
           </a:bodyPr>
           <a:lstStyle/>
@@ -18319,7 +18106,7 @@
           <a:noFill/>
         </p:spPr>
         <p:txBody>
-          <a:bodyPr wrap="square" anchor="ctr" lIns="0" rIns="0" tIns="0" bIns="0">
+          <a:bodyPr wrap="square" lIns="0" tIns="0" rIns="0" bIns="0" anchor="ctr">
             <a:spAutoFit/>
           </a:bodyPr>
           <a:lstStyle/>
@@ -18350,7 +18137,7 @@
 </file>
 
 <file path=ppt/slides/slide21.xml><?xml version="1.0" encoding="utf-8"?>
-<p:sld xmlns:a="http://schemas.openxmlformats.org/drawingml/2006/main" xmlns:p="http://schemas.openxmlformats.org/presentationml/2006/main" xmlns:r="http://schemas.openxmlformats.org/officeDocument/2006/relationships" show="0">
+<p:sld xmlns:a="http://schemas.openxmlformats.org/drawingml/2006/main" xmlns:r="http://schemas.openxmlformats.org/officeDocument/2006/relationships" xmlns:p="http://schemas.openxmlformats.org/presentationml/2006/main" show="0">
   <p:cSld>
     <p:spTree>
       <p:nvGrpSpPr>
@@ -18358,7 +18145,14 @@
         <p:cNvGrpSpPr/>
         <p:nvPr/>
       </p:nvGrpSpPr>
-      <p:grpSpPr/>
+      <p:grpSpPr>
+        <a:xfrm>
+          <a:off x="0" y="0"/>
+          <a:ext cx="0" cy="0"/>
+          <a:chOff x="0" y="0"/>
+          <a:chExt cx="0" cy="0"/>
+        </a:xfrm>
+      </p:grpSpPr>
       <p:sp>
         <p:nvSpPr>
           <p:cNvPr id="2" name="Rectangle 1"/>
@@ -18400,6 +18194,7 @@
           <a:lstStyle/>
           <a:p>
             <a:pPr algn="ctr"/>
+            <a:endParaRPr/>
           </a:p>
         </p:txBody>
       </p:sp>
@@ -18444,6 +18239,7 @@
           <a:lstStyle/>
           <a:p>
             <a:pPr algn="ctr"/>
+            <a:endParaRPr/>
           </a:p>
         </p:txBody>
       </p:sp>
@@ -18464,7 +18260,7 @@
           <a:noFill/>
         </p:spPr>
         <p:txBody>
-          <a:bodyPr wrap="square" anchor="t" lIns="0" rIns="0" tIns="0" bIns="0">
+          <a:bodyPr wrap="square" lIns="0" tIns="0" rIns="0" bIns="0" anchor="t">
             <a:spAutoFit/>
           </a:bodyPr>
           <a:lstStyle/>
@@ -18503,7 +18299,7 @@
           <a:noFill/>
         </p:spPr>
         <p:txBody>
-          <a:bodyPr wrap="square" anchor="t" lIns="0" rIns="0" tIns="0" bIns="0">
+          <a:bodyPr wrap="square" lIns="0" tIns="0" rIns="0" bIns="0" anchor="t">
             <a:spAutoFit/>
           </a:bodyPr>
           <a:lstStyle/>
@@ -18566,6 +18362,7 @@
           <a:lstStyle/>
           <a:p>
             <a:pPr algn="ctr"/>
+            <a:endParaRPr/>
           </a:p>
         </p:txBody>
       </p:sp>
@@ -18588,13 +18385,25 @@
                 <a:tableStyleId>{5C22544A-7EE6-4342-B048-85BDC9FD1C3A}</a:tableStyleId>
               </a:tblPr>
               <a:tblGrid>
-                <a:gridCol w="4743450"/>
-                <a:gridCol w="2846070"/>
+                <a:gridCol w="4743450">
+                  <a:extLst>
+                    <a:ext uri="{9D8B030D-6E8A-4147-A177-3AD203B41FA5}">
+                      <a16:colId xmlns:a16="http://schemas.microsoft.com/office/drawing/2014/main" val="20000"/>
+                    </a:ext>
+                  </a:extLst>
+                </a:gridCol>
+                <a:gridCol w="2846070">
+                  <a:extLst>
+                    <a:ext uri="{9D8B030D-6E8A-4147-A177-3AD203B41FA5}">
+                      <a16:colId xmlns:a16="http://schemas.microsoft.com/office/drawing/2014/main" val="20001"/>
+                    </a:ext>
+                  </a:extLst>
+                </a:gridCol>
               </a:tblGrid>
               <a:tr h="429768">
                 <a:tc>
                   <a:txBody>
-                    <a:bodyPr wrap="square"/>
+                    <a:bodyPr/>
                     <a:lstStyle/>
                     <a:p>
                       <a:pPr algn="l"/>
@@ -18617,7 +18426,7 @@
                 </a:tc>
                 <a:tc>
                   <a:txBody>
-                    <a:bodyPr wrap="square"/>
+                    <a:bodyPr/>
                     <a:lstStyle/>
                     <a:p>
                       <a:pPr algn="l"/>
@@ -18638,11 +18447,16 @@
                     </a:solidFill>
                   </a:tcPr>
                 </a:tc>
+                <a:extLst>
+                  <a:ext uri="{0D108BD9-81ED-4DB2-BD59-A6C34878D82A}">
+                    <a16:rowId xmlns:a16="http://schemas.microsoft.com/office/drawing/2014/main" val="10000"/>
+                  </a:ext>
+                </a:extLst>
               </a:tr>
               <a:tr h="429768">
                 <a:tc>
                   <a:txBody>
-                    <a:bodyPr wrap="square"/>
+                    <a:bodyPr/>
                     <a:lstStyle/>
                     <a:p>
                       <a:pPr algn="l"/>
@@ -18665,7 +18479,7 @@
                 </a:tc>
                 <a:tc>
                   <a:txBody>
-                    <a:bodyPr wrap="square"/>
+                    <a:bodyPr/>
                     <a:lstStyle/>
                     <a:p>
                       <a:pPr algn="l"/>
@@ -18686,11 +18500,16 @@
                     </a:solidFill>
                   </a:tcPr>
                 </a:tc>
+                <a:extLst>
+                  <a:ext uri="{0D108BD9-81ED-4DB2-BD59-A6C34878D82A}">
+                    <a16:rowId xmlns:a16="http://schemas.microsoft.com/office/drawing/2014/main" val="10001"/>
+                  </a:ext>
+                </a:extLst>
               </a:tr>
               <a:tr h="429768">
                 <a:tc>
                   <a:txBody>
-                    <a:bodyPr wrap="square"/>
+                    <a:bodyPr/>
                     <a:lstStyle/>
                     <a:p>
                       <a:pPr algn="l"/>
@@ -18713,7 +18532,7 @@
                 </a:tc>
                 <a:tc>
                   <a:txBody>
-                    <a:bodyPr wrap="square"/>
+                    <a:bodyPr/>
                     <a:lstStyle/>
                     <a:p>
                       <a:pPr algn="l"/>
@@ -18734,11 +18553,16 @@
                     </a:solidFill>
                   </a:tcPr>
                 </a:tc>
+                <a:extLst>
+                  <a:ext uri="{0D108BD9-81ED-4DB2-BD59-A6C34878D82A}">
+                    <a16:rowId xmlns:a16="http://schemas.microsoft.com/office/drawing/2014/main" val="10002"/>
+                  </a:ext>
+                </a:extLst>
               </a:tr>
               <a:tr h="429768">
                 <a:tc>
                   <a:txBody>
-                    <a:bodyPr wrap="square"/>
+                    <a:bodyPr/>
                     <a:lstStyle/>
                     <a:p>
                       <a:pPr algn="l"/>
@@ -18761,7 +18585,7 @@
                 </a:tc>
                 <a:tc>
                   <a:txBody>
-                    <a:bodyPr wrap="square"/>
+                    <a:bodyPr/>
                     <a:lstStyle/>
                     <a:p>
                       <a:pPr algn="l"/>
@@ -18782,11 +18606,16 @@
                     </a:solidFill>
                   </a:tcPr>
                 </a:tc>
+                <a:extLst>
+                  <a:ext uri="{0D108BD9-81ED-4DB2-BD59-A6C34878D82A}">
+                    <a16:rowId xmlns:a16="http://schemas.microsoft.com/office/drawing/2014/main" val="10003"/>
+                  </a:ext>
+                </a:extLst>
               </a:tr>
               <a:tr h="429768">
                 <a:tc>
                   <a:txBody>
-                    <a:bodyPr wrap="square"/>
+                    <a:bodyPr/>
                     <a:lstStyle/>
                     <a:p>
                       <a:pPr algn="l"/>
@@ -18809,7 +18638,7 @@
                 </a:tc>
                 <a:tc>
                   <a:txBody>
-                    <a:bodyPr wrap="square"/>
+                    <a:bodyPr/>
                     <a:lstStyle/>
                     <a:p>
                       <a:pPr algn="l"/>
@@ -18830,11 +18659,16 @@
                     </a:solidFill>
                   </a:tcPr>
                 </a:tc>
+                <a:extLst>
+                  <a:ext uri="{0D108BD9-81ED-4DB2-BD59-A6C34878D82A}">
+                    <a16:rowId xmlns:a16="http://schemas.microsoft.com/office/drawing/2014/main" val="10004"/>
+                  </a:ext>
+                </a:extLst>
               </a:tr>
               <a:tr h="429768">
                 <a:tc>
                   <a:txBody>
-                    <a:bodyPr wrap="square"/>
+                    <a:bodyPr/>
                     <a:lstStyle/>
                     <a:p>
                       <a:pPr algn="l"/>
@@ -18857,7 +18691,7 @@
                 </a:tc>
                 <a:tc>
                   <a:txBody>
-                    <a:bodyPr wrap="square"/>
+                    <a:bodyPr/>
                     <a:lstStyle/>
                     <a:p>
                       <a:pPr algn="l"/>
@@ -18878,11 +18712,16 @@
                     </a:solidFill>
                   </a:tcPr>
                 </a:tc>
+                <a:extLst>
+                  <a:ext uri="{0D108BD9-81ED-4DB2-BD59-A6C34878D82A}">
+                    <a16:rowId xmlns:a16="http://schemas.microsoft.com/office/drawing/2014/main" val="10005"/>
+                  </a:ext>
+                </a:extLst>
               </a:tr>
               <a:tr h="429768">
                 <a:tc>
                   <a:txBody>
-                    <a:bodyPr wrap="square"/>
+                    <a:bodyPr/>
                     <a:lstStyle/>
                     <a:p>
                       <a:pPr algn="l"/>
@@ -18905,7 +18744,7 @@
                 </a:tc>
                 <a:tc>
                   <a:txBody>
-                    <a:bodyPr wrap="square"/>
+                    <a:bodyPr/>
                     <a:lstStyle/>
                     <a:p>
                       <a:pPr algn="l"/>
@@ -18926,11 +18765,16 @@
                     </a:solidFill>
                   </a:tcPr>
                 </a:tc>
+                <a:extLst>
+                  <a:ext uri="{0D108BD9-81ED-4DB2-BD59-A6C34878D82A}">
+                    <a16:rowId xmlns:a16="http://schemas.microsoft.com/office/drawing/2014/main" val="10006"/>
+                  </a:ext>
+                </a:extLst>
               </a:tr>
               <a:tr h="429768">
                 <a:tc>
                   <a:txBody>
-                    <a:bodyPr wrap="square"/>
+                    <a:bodyPr/>
                     <a:lstStyle/>
                     <a:p>
                       <a:pPr algn="l"/>
@@ -18953,7 +18797,7 @@
                 </a:tc>
                 <a:tc>
                   <a:txBody>
-                    <a:bodyPr wrap="square"/>
+                    <a:bodyPr/>
                     <a:lstStyle/>
                     <a:p>
                       <a:pPr algn="l"/>
@@ -18974,11 +18818,16 @@
                     </a:solidFill>
                   </a:tcPr>
                 </a:tc>
+                <a:extLst>
+                  <a:ext uri="{0D108BD9-81ED-4DB2-BD59-A6C34878D82A}">
+                    <a16:rowId xmlns:a16="http://schemas.microsoft.com/office/drawing/2014/main" val="10007"/>
+                  </a:ext>
+                </a:extLst>
               </a:tr>
               <a:tr h="429768">
                 <a:tc>
                   <a:txBody>
-                    <a:bodyPr wrap="square"/>
+                    <a:bodyPr/>
                     <a:lstStyle/>
                     <a:p>
                       <a:pPr algn="l"/>
@@ -19001,7 +18850,7 @@
                 </a:tc>
                 <a:tc>
                   <a:txBody>
-                    <a:bodyPr wrap="square"/>
+                    <a:bodyPr/>
                     <a:lstStyle/>
                     <a:p>
                       <a:pPr algn="l"/>
@@ -19022,11 +18871,16 @@
                     </a:solidFill>
                   </a:tcPr>
                 </a:tc>
+                <a:extLst>
+                  <a:ext uri="{0D108BD9-81ED-4DB2-BD59-A6C34878D82A}">
+                    <a16:rowId xmlns:a16="http://schemas.microsoft.com/office/drawing/2014/main" val="10008"/>
+                  </a:ext>
+                </a:extLst>
               </a:tr>
               <a:tr h="429768">
                 <a:tc>
                   <a:txBody>
-                    <a:bodyPr wrap="square"/>
+                    <a:bodyPr/>
                     <a:lstStyle/>
                     <a:p>
                       <a:pPr algn="l"/>
@@ -19049,7 +18903,7 @@
                 </a:tc>
                 <a:tc>
                   <a:txBody>
-                    <a:bodyPr wrap="square"/>
+                    <a:bodyPr/>
                     <a:lstStyle/>
                     <a:p>
                       <a:pPr algn="l"/>
@@ -19070,6 +18924,11 @@
                     </a:solidFill>
                   </a:tcPr>
                 </a:tc>
+                <a:extLst>
+                  <a:ext uri="{0D108BD9-81ED-4DB2-BD59-A6C34878D82A}">
+                    <a16:rowId xmlns:a16="http://schemas.microsoft.com/office/drawing/2014/main" val="10009"/>
+                  </a:ext>
+                </a:extLst>
               </a:tr>
             </a:tbl>
           </a:graphicData>
@@ -19116,6 +18975,7 @@
           <a:lstStyle/>
           <a:p>
             <a:pPr algn="ctr"/>
+            <a:endParaRPr/>
           </a:p>
         </p:txBody>
       </p:sp>
@@ -19136,7 +18996,7 @@
           <a:noFill/>
         </p:spPr>
         <p:txBody>
-          <a:bodyPr wrap="square" anchor="ctr" lIns="0" rIns="0" tIns="0" bIns="0">
+          <a:bodyPr wrap="square" lIns="0" tIns="0" rIns="0" bIns="0" anchor="ctr">
             <a:spAutoFit/>
           </a:bodyPr>
           <a:lstStyle/>
@@ -19175,7 +19035,7 @@
           <a:noFill/>
         </p:spPr>
         <p:txBody>
-          <a:bodyPr wrap="square" anchor="ctr" lIns="0" rIns="0" tIns="0" bIns="0">
+          <a:bodyPr wrap="square" lIns="0" tIns="0" rIns="0" bIns="0" anchor="ctr">
             <a:spAutoFit/>
           </a:bodyPr>
           <a:lstStyle/>
@@ -19206,7 +19066,7 @@
 </file>
 
 <file path=ppt/slides/slide3.xml><?xml version="1.0" encoding="utf-8"?>
-<p:sld xmlns:a="http://schemas.openxmlformats.org/drawingml/2006/main" xmlns:p="http://schemas.openxmlformats.org/presentationml/2006/main" xmlns:r="http://schemas.openxmlformats.org/officeDocument/2006/relationships">
+<p:sld xmlns:a="http://schemas.openxmlformats.org/drawingml/2006/main" xmlns:r="http://schemas.openxmlformats.org/officeDocument/2006/relationships" xmlns:p="http://schemas.openxmlformats.org/presentationml/2006/main">
   <p:cSld>
     <p:spTree>
       <p:nvGrpSpPr>
@@ -19214,7 +19074,14 @@
         <p:cNvGrpSpPr/>
         <p:nvPr/>
       </p:nvGrpSpPr>
-      <p:grpSpPr/>
+      <p:grpSpPr>
+        <a:xfrm>
+          <a:off x="0" y="0"/>
+          <a:ext cx="0" cy="0"/>
+          <a:chOff x="0" y="0"/>
+          <a:chExt cx="0" cy="0"/>
+        </a:xfrm>
+      </p:grpSpPr>
       <p:sp>
         <p:nvSpPr>
           <p:cNvPr id="2" name="Rectangle 1"/>
@@ -19256,6 +19123,7 @@
           <a:lstStyle/>
           <a:p>
             <a:pPr algn="ctr"/>
+            <a:endParaRPr/>
           </a:p>
         </p:txBody>
       </p:sp>
@@ -19300,6 +19168,7 @@
           <a:lstStyle/>
           <a:p>
             <a:pPr algn="ctr"/>
+            <a:endParaRPr/>
           </a:p>
         </p:txBody>
       </p:sp>
@@ -19320,7 +19189,7 @@
           <a:noFill/>
         </p:spPr>
         <p:txBody>
-          <a:bodyPr wrap="square" anchor="t" lIns="0" rIns="0" tIns="0" bIns="0">
+          <a:bodyPr wrap="square" lIns="0" tIns="0" rIns="0" bIns="0" anchor="t">
             <a:spAutoFit/>
           </a:bodyPr>
           <a:lstStyle/>
@@ -19359,7 +19228,7 @@
           <a:noFill/>
         </p:spPr>
         <p:txBody>
-          <a:bodyPr wrap="square" anchor="t" lIns="0" rIns="0" tIns="0" bIns="0">
+          <a:bodyPr wrap="square" lIns="0" tIns="0" rIns="0" bIns="0" anchor="t">
             <a:spAutoFit/>
           </a:bodyPr>
           <a:lstStyle/>
@@ -19422,6 +19291,7 @@
           <a:lstStyle/>
           <a:p>
             <a:pPr algn="ctr"/>
+            <a:endParaRPr/>
           </a:p>
         </p:txBody>
       </p:sp>
@@ -19442,7 +19312,7 @@
           <a:noFill/>
         </p:spPr>
         <p:txBody>
-          <a:bodyPr wrap="square" anchor="t" lIns="0" rIns="0" tIns="0" bIns="0">
+          <a:bodyPr wrap="square" lIns="0" tIns="0" rIns="0" bIns="0" anchor="t">
             <a:spAutoFit/>
           </a:bodyPr>
           <a:lstStyle/>
@@ -19481,7 +19351,7 @@
           <a:noFill/>
         </p:spPr>
         <p:txBody>
-          <a:bodyPr wrap="square" lIns="0" rIns="0" tIns="0" bIns="0">
+          <a:bodyPr wrap="square" lIns="0" tIns="0" rIns="0" bIns="0">
             <a:spAutoFit/>
           </a:bodyPr>
           <a:lstStyle/>
@@ -19652,7 +19522,7 @@
           <a:noFill/>
         </p:spPr>
         <p:txBody>
-          <a:bodyPr wrap="square" anchor="t" lIns="0" rIns="0" tIns="0" bIns="0">
+          <a:bodyPr wrap="square" lIns="0" tIns="0" rIns="0" bIns="0" anchor="t">
             <a:spAutoFit/>
           </a:bodyPr>
           <a:lstStyle/>
@@ -19731,6 +19601,7 @@
           <a:lstStyle/>
           <a:p>
             <a:pPr algn="ctr"/>
+            <a:endParaRPr/>
           </a:p>
         </p:txBody>
       </p:sp>
@@ -19751,7 +19622,7 @@
           <a:noFill/>
         </p:spPr>
         <p:txBody>
-          <a:bodyPr wrap="square" anchor="t" lIns="0" rIns="0" tIns="0" bIns="0">
+          <a:bodyPr wrap="square" lIns="0" tIns="0" rIns="0" bIns="0" anchor="t">
             <a:spAutoFit/>
           </a:bodyPr>
           <a:lstStyle/>
@@ -19790,7 +19661,7 @@
           <a:noFill/>
         </p:spPr>
         <p:txBody>
-          <a:bodyPr wrap="square" lIns="0" rIns="0" tIns="0" bIns="0">
+          <a:bodyPr wrap="square" lIns="0" tIns="0" rIns="0" bIns="0">
             <a:spAutoFit/>
           </a:bodyPr>
           <a:lstStyle/>
@@ -19895,6 +19766,7 @@
           <a:lstStyle/>
           <a:p>
             <a:pPr algn="ctr"/>
+            <a:endParaRPr/>
           </a:p>
         </p:txBody>
       </p:sp>
@@ -19915,7 +19787,7 @@
           <a:noFill/>
         </p:spPr>
         <p:txBody>
-          <a:bodyPr wrap="square" anchor="t" lIns="0" rIns="0" tIns="0" bIns="0">
+          <a:bodyPr wrap="square" lIns="0" tIns="0" rIns="0" bIns="0" anchor="t">
             <a:spAutoFit/>
           </a:bodyPr>
           <a:lstStyle/>
@@ -19978,6 +19850,7 @@
           <a:lstStyle/>
           <a:p>
             <a:pPr algn="ctr"/>
+            <a:endParaRPr/>
           </a:p>
         </p:txBody>
       </p:sp>
@@ -19998,7 +19871,7 @@
           <a:noFill/>
         </p:spPr>
         <p:txBody>
-          <a:bodyPr wrap="square" anchor="ctr" lIns="0" rIns="0" tIns="0" bIns="0">
+          <a:bodyPr wrap="square" lIns="0" tIns="0" rIns="0" bIns="0" anchor="ctr">
             <a:spAutoFit/>
           </a:bodyPr>
           <a:lstStyle/>
@@ -20037,7 +19910,7 @@
           <a:noFill/>
         </p:spPr>
         <p:txBody>
-          <a:bodyPr wrap="square" anchor="ctr" lIns="0" rIns="0" tIns="0" bIns="0">
+          <a:bodyPr wrap="square" lIns="0" tIns="0" rIns="0" bIns="0" anchor="ctr">
             <a:spAutoFit/>
           </a:bodyPr>
           <a:lstStyle/>
@@ -20068,7 +19941,7 @@
 </file>
 
 <file path=ppt/slides/slide4.xml><?xml version="1.0" encoding="utf-8"?>
-<p:sld xmlns:a="http://schemas.openxmlformats.org/drawingml/2006/main" xmlns:p="http://schemas.openxmlformats.org/presentationml/2006/main" xmlns:r="http://schemas.openxmlformats.org/officeDocument/2006/relationships">
+<p:sld xmlns:a="http://schemas.openxmlformats.org/drawingml/2006/main" xmlns:r="http://schemas.openxmlformats.org/officeDocument/2006/relationships" xmlns:p="http://schemas.openxmlformats.org/presentationml/2006/main">
   <p:cSld>
     <p:spTree>
       <p:nvGrpSpPr>
@@ -20076,7 +19949,14 @@
         <p:cNvGrpSpPr/>
         <p:nvPr/>
       </p:nvGrpSpPr>
-      <p:grpSpPr/>
+      <p:grpSpPr>
+        <a:xfrm>
+          <a:off x="0" y="0"/>
+          <a:ext cx="0" cy="0"/>
+          <a:chOff x="0" y="0"/>
+          <a:chExt cx="0" cy="0"/>
+        </a:xfrm>
+      </p:grpSpPr>
       <p:sp>
         <p:nvSpPr>
           <p:cNvPr id="2" name="Rectangle 1"/>
@@ -20118,6 +19998,7 @@
           <a:lstStyle/>
           <a:p>
             <a:pPr algn="ctr"/>
+            <a:endParaRPr/>
           </a:p>
         </p:txBody>
       </p:sp>
@@ -20162,6 +20043,7 @@
           <a:lstStyle/>
           <a:p>
             <a:pPr algn="ctr"/>
+            <a:endParaRPr/>
           </a:p>
         </p:txBody>
       </p:sp>
@@ -20182,7 +20064,7 @@
           <a:noFill/>
         </p:spPr>
         <p:txBody>
-          <a:bodyPr wrap="square" anchor="t" lIns="0" rIns="0" tIns="0" bIns="0">
+          <a:bodyPr wrap="square" lIns="0" tIns="0" rIns="0" bIns="0" anchor="t">
             <a:spAutoFit/>
           </a:bodyPr>
           <a:lstStyle/>
@@ -20221,7 +20103,7 @@
           <a:noFill/>
         </p:spPr>
         <p:txBody>
-          <a:bodyPr wrap="square" anchor="t" lIns="0" rIns="0" tIns="0" bIns="0">
+          <a:bodyPr wrap="square" lIns="0" tIns="0" rIns="0" bIns="0" anchor="t">
             <a:spAutoFit/>
           </a:bodyPr>
           <a:lstStyle/>
@@ -20284,6 +20166,7 @@
           <a:lstStyle/>
           <a:p>
             <a:pPr algn="ctr"/>
+            <a:endParaRPr/>
           </a:p>
         </p:txBody>
       </p:sp>
@@ -20306,13 +20189,25 @@
                 <a:tableStyleId>{5C22544A-7EE6-4342-B048-85BDC9FD1C3A}</a:tableStyleId>
               </a:tblPr>
               <a:tblGrid>
-                <a:gridCol w="4610100"/>
-                <a:gridCol w="6454140"/>
+                <a:gridCol w="4610100">
+                  <a:extLst>
+                    <a:ext uri="{9D8B030D-6E8A-4147-A177-3AD203B41FA5}">
+                      <a16:colId xmlns:a16="http://schemas.microsoft.com/office/drawing/2014/main" val="20000"/>
+                    </a:ext>
+                  </a:extLst>
+                </a:gridCol>
+                <a:gridCol w="6454140">
+                  <a:extLst>
+                    <a:ext uri="{9D8B030D-6E8A-4147-A177-3AD203B41FA5}">
+                      <a16:colId xmlns:a16="http://schemas.microsoft.com/office/drawing/2014/main" val="20001"/>
+                    </a:ext>
+                  </a:extLst>
+                </a:gridCol>
               </a:tblGrid>
               <a:tr h="502920">
                 <a:tc>
                   <a:txBody>
-                    <a:bodyPr wrap="square"/>
+                    <a:bodyPr/>
                     <a:lstStyle/>
                     <a:p>
                       <a:pPr algn="l"/>
@@ -20335,7 +20230,7 @@
                 </a:tc>
                 <a:tc>
                   <a:txBody>
-                    <a:bodyPr wrap="square"/>
+                    <a:bodyPr/>
                     <a:lstStyle/>
                     <a:p>
                       <a:pPr algn="l"/>
@@ -20356,11 +20251,16 @@
                     </a:solidFill>
                   </a:tcPr>
                 </a:tc>
+                <a:extLst>
+                  <a:ext uri="{0D108BD9-81ED-4DB2-BD59-A6C34878D82A}">
+                    <a16:rowId xmlns:a16="http://schemas.microsoft.com/office/drawing/2014/main" val="10000"/>
+                  </a:ext>
+                </a:extLst>
               </a:tr>
               <a:tr h="502920">
                 <a:tc>
                   <a:txBody>
-                    <a:bodyPr wrap="square"/>
+                    <a:bodyPr/>
                     <a:lstStyle/>
                     <a:p>
                       <a:pPr algn="l"/>
@@ -20383,7 +20283,7 @@
                 </a:tc>
                 <a:tc>
                   <a:txBody>
-                    <a:bodyPr wrap="square"/>
+                    <a:bodyPr/>
                     <a:lstStyle/>
                     <a:p>
                       <a:pPr algn="l"/>
@@ -20404,11 +20304,16 @@
                     </a:solidFill>
                   </a:tcPr>
                 </a:tc>
+                <a:extLst>
+                  <a:ext uri="{0D108BD9-81ED-4DB2-BD59-A6C34878D82A}">
+                    <a16:rowId xmlns:a16="http://schemas.microsoft.com/office/drawing/2014/main" val="10001"/>
+                  </a:ext>
+                </a:extLst>
               </a:tr>
               <a:tr h="502920">
                 <a:tc>
                   <a:txBody>
-                    <a:bodyPr wrap="square"/>
+                    <a:bodyPr/>
                     <a:lstStyle/>
                     <a:p>
                       <a:pPr algn="l"/>
@@ -20431,7 +20336,7 @@
                 </a:tc>
                 <a:tc>
                   <a:txBody>
-                    <a:bodyPr wrap="square"/>
+                    <a:bodyPr/>
                     <a:lstStyle/>
                     <a:p>
                       <a:pPr algn="l"/>
@@ -20452,11 +20357,16 @@
                     </a:solidFill>
                   </a:tcPr>
                 </a:tc>
+                <a:extLst>
+                  <a:ext uri="{0D108BD9-81ED-4DB2-BD59-A6C34878D82A}">
+                    <a16:rowId xmlns:a16="http://schemas.microsoft.com/office/drawing/2014/main" val="10002"/>
+                  </a:ext>
+                </a:extLst>
               </a:tr>
               <a:tr h="502920">
                 <a:tc>
                   <a:txBody>
-                    <a:bodyPr wrap="square"/>
+                    <a:bodyPr/>
                     <a:lstStyle/>
                     <a:p>
                       <a:pPr algn="l"/>
@@ -20479,7 +20389,7 @@
                 </a:tc>
                 <a:tc>
                   <a:txBody>
-                    <a:bodyPr wrap="square"/>
+                    <a:bodyPr/>
                     <a:lstStyle/>
                     <a:p>
                       <a:pPr algn="l"/>
@@ -20500,11 +20410,16 @@
                     </a:solidFill>
                   </a:tcPr>
                 </a:tc>
+                <a:extLst>
+                  <a:ext uri="{0D108BD9-81ED-4DB2-BD59-A6C34878D82A}">
+                    <a16:rowId xmlns:a16="http://schemas.microsoft.com/office/drawing/2014/main" val="10003"/>
+                  </a:ext>
+                </a:extLst>
               </a:tr>
               <a:tr h="502920">
                 <a:tc>
                   <a:txBody>
-                    <a:bodyPr wrap="square"/>
+                    <a:bodyPr/>
                     <a:lstStyle/>
                     <a:p>
                       <a:pPr algn="l"/>
@@ -20527,7 +20442,7 @@
                 </a:tc>
                 <a:tc>
                   <a:txBody>
-                    <a:bodyPr wrap="square"/>
+                    <a:bodyPr/>
                     <a:lstStyle/>
                     <a:p>
                       <a:pPr algn="l"/>
@@ -20548,11 +20463,16 @@
                     </a:solidFill>
                   </a:tcPr>
                 </a:tc>
+                <a:extLst>
+                  <a:ext uri="{0D108BD9-81ED-4DB2-BD59-A6C34878D82A}">
+                    <a16:rowId xmlns:a16="http://schemas.microsoft.com/office/drawing/2014/main" val="10004"/>
+                  </a:ext>
+                </a:extLst>
               </a:tr>
               <a:tr h="502920">
                 <a:tc>
                   <a:txBody>
-                    <a:bodyPr wrap="square"/>
+                    <a:bodyPr/>
                     <a:lstStyle/>
                     <a:p>
                       <a:pPr algn="l"/>
@@ -20575,7 +20495,7 @@
                 </a:tc>
                 <a:tc>
                   <a:txBody>
-                    <a:bodyPr wrap="square"/>
+                    <a:bodyPr/>
                     <a:lstStyle/>
                     <a:p>
                       <a:pPr algn="l"/>
@@ -20596,6 +20516,11 @@
                     </a:solidFill>
                   </a:tcPr>
                 </a:tc>
+                <a:extLst>
+                  <a:ext uri="{0D108BD9-81ED-4DB2-BD59-A6C34878D82A}">
+                    <a16:rowId xmlns:a16="http://schemas.microsoft.com/office/drawing/2014/main" val="10005"/>
+                  </a:ext>
+                </a:extLst>
               </a:tr>
             </a:tbl>
           </a:graphicData>
@@ -20618,7 +20543,7 @@
           <a:noFill/>
         </p:spPr>
         <p:txBody>
-          <a:bodyPr wrap="square" anchor="t" lIns="0" rIns="0" tIns="0" bIns="0">
+          <a:bodyPr wrap="square" lIns="0" tIns="0" rIns="0" bIns="0" anchor="t">
             <a:spAutoFit/>
           </a:bodyPr>
           <a:lstStyle/>
@@ -20681,6 +20606,7 @@
           <a:lstStyle/>
           <a:p>
             <a:pPr algn="ctr"/>
+            <a:endParaRPr/>
           </a:p>
         </p:txBody>
       </p:sp>
@@ -20701,7 +20627,7 @@
           <a:noFill/>
         </p:spPr>
         <p:txBody>
-          <a:bodyPr wrap="square" anchor="ctr" lIns="0" rIns="0" tIns="0" bIns="0">
+          <a:bodyPr wrap="square" lIns="0" tIns="0" rIns="0" bIns="0" anchor="ctr">
             <a:spAutoFit/>
           </a:bodyPr>
           <a:lstStyle/>
@@ -20740,7 +20666,7 @@
           <a:noFill/>
         </p:spPr>
         <p:txBody>
-          <a:bodyPr wrap="square" anchor="ctr" lIns="0" rIns="0" tIns="0" bIns="0">
+          <a:bodyPr wrap="square" lIns="0" tIns="0" rIns="0" bIns="0" anchor="ctr">
             <a:spAutoFit/>
           </a:bodyPr>
           <a:lstStyle/>
@@ -20771,7 +20697,7 @@
 </file>
 
 <file path=ppt/slides/slide5.xml><?xml version="1.0" encoding="utf-8"?>
-<p:sld xmlns:a="http://schemas.openxmlformats.org/drawingml/2006/main" xmlns:p="http://schemas.openxmlformats.org/presentationml/2006/main" xmlns:r="http://schemas.openxmlformats.org/officeDocument/2006/relationships">
+<p:sld xmlns:a="http://schemas.openxmlformats.org/drawingml/2006/main" xmlns:r="http://schemas.openxmlformats.org/officeDocument/2006/relationships" xmlns:p="http://schemas.openxmlformats.org/presentationml/2006/main">
   <p:cSld>
     <p:spTree>
       <p:nvGrpSpPr>
@@ -20779,7 +20705,14 @@
         <p:cNvGrpSpPr/>
         <p:nvPr/>
       </p:nvGrpSpPr>
-      <p:grpSpPr/>
+      <p:grpSpPr>
+        <a:xfrm>
+          <a:off x="0" y="0"/>
+          <a:ext cx="0" cy="0"/>
+          <a:chOff x="0" y="0"/>
+          <a:chExt cx="0" cy="0"/>
+        </a:xfrm>
+      </p:grpSpPr>
       <p:sp>
         <p:nvSpPr>
           <p:cNvPr id="2" name="Rectangle 1"/>
@@ -20821,6 +20754,7 @@
           <a:lstStyle/>
           <a:p>
             <a:pPr algn="ctr"/>
+            <a:endParaRPr/>
           </a:p>
         </p:txBody>
       </p:sp>
@@ -20865,6 +20799,7 @@
           <a:lstStyle/>
           <a:p>
             <a:pPr algn="ctr"/>
+            <a:endParaRPr/>
           </a:p>
         </p:txBody>
       </p:sp>
@@ -20885,7 +20820,7 @@
           <a:noFill/>
         </p:spPr>
         <p:txBody>
-          <a:bodyPr wrap="square" anchor="t" lIns="0" rIns="0" tIns="0" bIns="0">
+          <a:bodyPr wrap="square" lIns="0" tIns="0" rIns="0" bIns="0" anchor="t">
             <a:spAutoFit/>
           </a:bodyPr>
           <a:lstStyle/>
@@ -20924,7 +20859,7 @@
           <a:noFill/>
         </p:spPr>
         <p:txBody>
-          <a:bodyPr wrap="square" anchor="t" lIns="0" rIns="0" tIns="0" bIns="0">
+          <a:bodyPr wrap="square" lIns="0" tIns="0" rIns="0" bIns="0" anchor="t">
             <a:spAutoFit/>
           </a:bodyPr>
           <a:lstStyle/>
@@ -20987,6 +20922,7 @@
           <a:lstStyle/>
           <a:p>
             <a:pPr algn="ctr"/>
+            <a:endParaRPr/>
           </a:p>
         </p:txBody>
       </p:sp>
@@ -21033,6 +20969,7 @@
           <a:lstStyle/>
           <a:p>
             <a:pPr algn="ctr"/>
+            <a:endParaRPr/>
           </a:p>
         </p:txBody>
       </p:sp>
@@ -21077,6 +21014,7 @@
           <a:lstStyle/>
           <a:p>
             <a:pPr algn="ctr"/>
+            <a:endParaRPr/>
           </a:p>
         </p:txBody>
       </p:sp>
@@ -21097,7 +21035,7 @@
           <a:noFill/>
         </p:spPr>
         <p:txBody>
-          <a:bodyPr wrap="square" anchor="t" lIns="0" rIns="0" tIns="0" bIns="0">
+          <a:bodyPr wrap="square" lIns="0" tIns="0" rIns="0" bIns="0" anchor="t">
             <a:spAutoFit/>
           </a:bodyPr>
           <a:lstStyle/>
@@ -21136,7 +21074,7 @@
           <a:noFill/>
         </p:spPr>
         <p:txBody>
-          <a:bodyPr wrap="square" anchor="t" lIns="0" rIns="0" tIns="0" bIns="0">
+          <a:bodyPr wrap="square" lIns="0" tIns="0" rIns="0" bIns="0" anchor="t">
             <a:spAutoFit/>
           </a:bodyPr>
           <a:lstStyle/>
@@ -21217,6 +21155,7 @@
           <a:lstStyle/>
           <a:p>
             <a:pPr algn="ctr"/>
+            <a:endParaRPr/>
           </a:p>
         </p:txBody>
       </p:sp>
@@ -21261,6 +21200,7 @@
           <a:lstStyle/>
           <a:p>
             <a:pPr algn="ctr"/>
+            <a:endParaRPr/>
           </a:p>
         </p:txBody>
       </p:sp>
@@ -21281,7 +21221,7 @@
           <a:noFill/>
         </p:spPr>
         <p:txBody>
-          <a:bodyPr wrap="square" anchor="t" lIns="0" rIns="0" tIns="0" bIns="0">
+          <a:bodyPr wrap="square" lIns="0" tIns="0" rIns="0" bIns="0" anchor="t">
             <a:spAutoFit/>
           </a:bodyPr>
           <a:lstStyle/>
@@ -21320,7 +21260,7 @@
           <a:noFill/>
         </p:spPr>
         <p:txBody>
-          <a:bodyPr wrap="square" anchor="t" lIns="0" rIns="0" tIns="0" bIns="0">
+          <a:bodyPr wrap="square" lIns="0" tIns="0" rIns="0" bIns="0" anchor="t">
             <a:spAutoFit/>
           </a:bodyPr>
           <a:lstStyle/>
@@ -21401,6 +21341,7 @@
           <a:lstStyle/>
           <a:p>
             <a:pPr algn="ctr"/>
+            <a:endParaRPr/>
           </a:p>
         </p:txBody>
       </p:sp>
@@ -21445,6 +21386,7 @@
           <a:lstStyle/>
           <a:p>
             <a:pPr algn="ctr"/>
+            <a:endParaRPr/>
           </a:p>
         </p:txBody>
       </p:sp>
@@ -21465,7 +21407,7 @@
           <a:noFill/>
         </p:spPr>
         <p:txBody>
-          <a:bodyPr wrap="square" anchor="t" lIns="0" rIns="0" tIns="0" bIns="0">
+          <a:bodyPr wrap="square" lIns="0" tIns="0" rIns="0" bIns="0" anchor="t">
             <a:spAutoFit/>
           </a:bodyPr>
           <a:lstStyle/>
@@ -21504,7 +21446,7 @@
           <a:noFill/>
         </p:spPr>
         <p:txBody>
-          <a:bodyPr wrap="square" anchor="t" lIns="0" rIns="0" tIns="0" bIns="0">
+          <a:bodyPr wrap="square" lIns="0" tIns="0" rIns="0" bIns="0" anchor="t">
             <a:spAutoFit/>
           </a:bodyPr>
           <a:lstStyle/>
@@ -21559,7 +21501,7 @@
           <a:noFill/>
         </p:spPr>
         <p:txBody>
-          <a:bodyPr wrap="square" anchor="t" lIns="0" rIns="0" tIns="0" bIns="0">
+          <a:bodyPr wrap="square" lIns="0" tIns="0" rIns="0" bIns="0" anchor="t">
             <a:spAutoFit/>
           </a:bodyPr>
           <a:lstStyle/>
@@ -21622,6 +21564,7 @@
           <a:lstStyle/>
           <a:p>
             <a:pPr algn="ctr"/>
+            <a:endParaRPr/>
           </a:p>
         </p:txBody>
       </p:sp>
@@ -21642,7 +21585,7 @@
           <a:noFill/>
         </p:spPr>
         <p:txBody>
-          <a:bodyPr wrap="square" anchor="ctr" lIns="0" rIns="0" tIns="0" bIns="0">
+          <a:bodyPr wrap="square" lIns="0" tIns="0" rIns="0" bIns="0" anchor="ctr">
             <a:spAutoFit/>
           </a:bodyPr>
           <a:lstStyle/>
@@ -21681,7 +21624,7 @@
           <a:noFill/>
         </p:spPr>
         <p:txBody>
-          <a:bodyPr wrap="square" anchor="ctr" lIns="0" rIns="0" tIns="0" bIns="0">
+          <a:bodyPr wrap="square" lIns="0" tIns="0" rIns="0" bIns="0" anchor="ctr">
             <a:spAutoFit/>
           </a:bodyPr>
           <a:lstStyle/>
@@ -21712,7 +21655,7 @@
 </file>
 
 <file path=ppt/slides/slide6.xml><?xml version="1.0" encoding="utf-8"?>
-<p:sld xmlns:a="http://schemas.openxmlformats.org/drawingml/2006/main" xmlns:p="http://schemas.openxmlformats.org/presentationml/2006/main" xmlns:r="http://schemas.openxmlformats.org/officeDocument/2006/relationships">
+<p:sld xmlns:a="http://schemas.openxmlformats.org/drawingml/2006/main" xmlns:r="http://schemas.openxmlformats.org/officeDocument/2006/relationships" xmlns:p="http://schemas.openxmlformats.org/presentationml/2006/main">
   <p:cSld>
     <p:spTree>
       <p:nvGrpSpPr>
@@ -21720,7 +21663,14 @@
         <p:cNvGrpSpPr/>
         <p:nvPr/>
       </p:nvGrpSpPr>
-      <p:grpSpPr/>
+      <p:grpSpPr>
+        <a:xfrm>
+          <a:off x="0" y="0"/>
+          <a:ext cx="0" cy="0"/>
+          <a:chOff x="0" y="0"/>
+          <a:chExt cx="0" cy="0"/>
+        </a:xfrm>
+      </p:grpSpPr>
       <p:sp>
         <p:nvSpPr>
           <p:cNvPr id="2" name="Rectangle 1"/>
@@ -21762,6 +21712,7 @@
           <a:lstStyle/>
           <a:p>
             <a:pPr algn="ctr"/>
+            <a:endParaRPr/>
           </a:p>
         </p:txBody>
       </p:sp>
@@ -21806,6 +21757,7 @@
           <a:lstStyle/>
           <a:p>
             <a:pPr algn="ctr"/>
+            <a:endParaRPr/>
           </a:p>
         </p:txBody>
       </p:sp>
@@ -21826,7 +21778,7 @@
           <a:noFill/>
         </p:spPr>
         <p:txBody>
-          <a:bodyPr wrap="square" anchor="t" lIns="0" rIns="0" tIns="0" bIns="0">
+          <a:bodyPr wrap="square" lIns="0" tIns="0" rIns="0" bIns="0" anchor="t">
             <a:spAutoFit/>
           </a:bodyPr>
           <a:lstStyle/>
@@ -21865,7 +21817,7 @@
           <a:noFill/>
         </p:spPr>
         <p:txBody>
-          <a:bodyPr wrap="square" anchor="t" lIns="0" rIns="0" tIns="0" bIns="0">
+          <a:bodyPr wrap="square" lIns="0" tIns="0" rIns="0" bIns="0" anchor="t">
             <a:spAutoFit/>
           </a:bodyPr>
           <a:lstStyle/>
@@ -21928,6 +21880,7 @@
           <a:lstStyle/>
           <a:p>
             <a:pPr algn="ctr"/>
+            <a:endParaRPr/>
           </a:p>
         </p:txBody>
       </p:sp>
@@ -21974,6 +21927,7 @@
           <a:lstStyle/>
           <a:p>
             <a:pPr algn="ctr"/>
+            <a:endParaRPr/>
           </a:p>
         </p:txBody>
       </p:sp>
@@ -21994,7 +21948,7 @@
           <a:noFill/>
         </p:spPr>
         <p:txBody>
-          <a:bodyPr wrap="square" anchor="t" lIns="0" rIns="0" tIns="0" bIns="0">
+          <a:bodyPr wrap="square" lIns="0" tIns="0" rIns="0" bIns="0" anchor="t">
             <a:spAutoFit/>
           </a:bodyPr>
           <a:lstStyle/>
@@ -22075,6 +22029,7 @@
           <a:lstStyle/>
           <a:p>
             <a:pPr algn="ctr"/>
+            <a:endParaRPr/>
           </a:p>
         </p:txBody>
       </p:sp>
@@ -22095,7 +22050,7 @@
           <a:noFill/>
         </p:spPr>
         <p:txBody>
-          <a:bodyPr wrap="square" anchor="t" lIns="0" rIns="0" tIns="0" bIns="0">
+          <a:bodyPr wrap="square" lIns="0" tIns="0" rIns="0" bIns="0" anchor="t">
             <a:spAutoFit/>
           </a:bodyPr>
           <a:lstStyle/>
@@ -22134,7 +22089,7 @@
           <a:noFill/>
         </p:spPr>
         <p:txBody>
-          <a:bodyPr wrap="square" anchor="t" lIns="0" rIns="0" tIns="0" bIns="0">
+          <a:bodyPr wrap="square" lIns="0" tIns="0" rIns="0" bIns="0" anchor="t">
             <a:spAutoFit/>
           </a:bodyPr>
           <a:lstStyle/>
@@ -22199,6 +22154,7 @@
           <a:lstStyle/>
           <a:p>
             <a:pPr algn="ctr"/>
+            <a:endParaRPr/>
           </a:p>
         </p:txBody>
       </p:sp>
@@ -22219,7 +22175,7 @@
           <a:noFill/>
         </p:spPr>
         <p:txBody>
-          <a:bodyPr wrap="square" anchor="t" lIns="0" rIns="0" tIns="0" bIns="0">
+          <a:bodyPr wrap="square" lIns="0" tIns="0" rIns="0" bIns="0" anchor="t">
             <a:spAutoFit/>
           </a:bodyPr>
           <a:lstStyle/>
@@ -22258,7 +22214,7 @@
           <a:noFill/>
         </p:spPr>
         <p:txBody>
-          <a:bodyPr wrap="square" anchor="t" lIns="0" rIns="0" tIns="0" bIns="0">
+          <a:bodyPr wrap="square" lIns="0" tIns="0" rIns="0" bIns="0" anchor="t">
             <a:spAutoFit/>
           </a:bodyPr>
           <a:lstStyle/>
@@ -22323,6 +22279,7 @@
           <a:lstStyle/>
           <a:p>
             <a:pPr algn="ctr"/>
+            <a:endParaRPr/>
           </a:p>
         </p:txBody>
       </p:sp>
@@ -22343,7 +22300,7 @@
           <a:noFill/>
         </p:spPr>
         <p:txBody>
-          <a:bodyPr wrap="square" anchor="t" lIns="0" rIns="0" tIns="0" bIns="0">
+          <a:bodyPr wrap="square" lIns="0" tIns="0" rIns="0" bIns="0" anchor="t">
             <a:spAutoFit/>
           </a:bodyPr>
           <a:lstStyle/>
@@ -22382,7 +22339,7 @@
           <a:noFill/>
         </p:spPr>
         <p:txBody>
-          <a:bodyPr wrap="square" anchor="t" lIns="0" rIns="0" tIns="0" bIns="0">
+          <a:bodyPr wrap="square" lIns="0" tIns="0" rIns="0" bIns="0" anchor="t">
             <a:spAutoFit/>
           </a:bodyPr>
           <a:lstStyle/>
@@ -22421,7 +22378,7 @@
           <a:noFill/>
         </p:spPr>
         <p:txBody>
-          <a:bodyPr wrap="square" anchor="t" lIns="0" rIns="0" tIns="0" bIns="0">
+          <a:bodyPr wrap="square" lIns="0" tIns="0" rIns="0" bIns="0" anchor="t">
             <a:spAutoFit/>
           </a:bodyPr>
           <a:lstStyle/>
@@ -22460,7 +22417,7 @@
           <a:noFill/>
         </p:spPr>
         <p:txBody>
-          <a:bodyPr wrap="square" anchor="t" lIns="0" rIns="0" tIns="0" bIns="0">
+          <a:bodyPr wrap="square" lIns="0" tIns="0" rIns="0" bIns="0" anchor="t">
             <a:spAutoFit/>
           </a:bodyPr>
           <a:lstStyle/>
@@ -22499,7 +22456,7 @@
           <a:noFill/>
         </p:spPr>
         <p:txBody>
-          <a:bodyPr wrap="square" anchor="t" lIns="0" rIns="0" tIns="0" bIns="0">
+          <a:bodyPr wrap="square" lIns="0" tIns="0" rIns="0" bIns="0" anchor="t">
             <a:spAutoFit/>
           </a:bodyPr>
           <a:lstStyle/>
@@ -22562,6 +22519,7 @@
           <a:lstStyle/>
           <a:p>
             <a:pPr algn="ctr"/>
+            <a:endParaRPr/>
           </a:p>
         </p:txBody>
       </p:sp>
@@ -22582,7 +22540,7 @@
           <a:noFill/>
         </p:spPr>
         <p:txBody>
-          <a:bodyPr wrap="square" anchor="ctr" lIns="0" rIns="0" tIns="0" bIns="0">
+          <a:bodyPr wrap="square" lIns="0" tIns="0" rIns="0" bIns="0" anchor="ctr">
             <a:spAutoFit/>
           </a:bodyPr>
           <a:lstStyle/>
@@ -22621,7 +22579,7 @@
           <a:noFill/>
         </p:spPr>
         <p:txBody>
-          <a:bodyPr wrap="square" anchor="ctr" lIns="0" rIns="0" tIns="0" bIns="0">
+          <a:bodyPr wrap="square" lIns="0" tIns="0" rIns="0" bIns="0" anchor="ctr">
             <a:spAutoFit/>
           </a:bodyPr>
           <a:lstStyle/>
@@ -22652,7 +22610,7 @@
 </file>
 
 <file path=ppt/slides/slide7.xml><?xml version="1.0" encoding="utf-8"?>
-<p:sld xmlns:a="http://schemas.openxmlformats.org/drawingml/2006/main" xmlns:p="http://schemas.openxmlformats.org/presentationml/2006/main" xmlns:r="http://schemas.openxmlformats.org/officeDocument/2006/relationships">
+<p:sld xmlns:a="http://schemas.openxmlformats.org/drawingml/2006/main" xmlns:r="http://schemas.openxmlformats.org/officeDocument/2006/relationships" xmlns:p="http://schemas.openxmlformats.org/presentationml/2006/main">
   <p:cSld>
     <p:spTree>
       <p:nvGrpSpPr>
@@ -22660,7 +22618,14 @@
         <p:cNvGrpSpPr/>
         <p:nvPr/>
       </p:nvGrpSpPr>
-      <p:grpSpPr/>
+      <p:grpSpPr>
+        <a:xfrm>
+          <a:off x="0" y="0"/>
+          <a:ext cx="0" cy="0"/>
+          <a:chOff x="0" y="0"/>
+          <a:chExt cx="0" cy="0"/>
+        </a:xfrm>
+      </p:grpSpPr>
       <p:sp>
         <p:nvSpPr>
           <p:cNvPr id="2" name="Rectangle 1"/>
@@ -22702,6 +22667,7 @@
           <a:lstStyle/>
           <a:p>
             <a:pPr algn="ctr"/>
+            <a:endParaRPr/>
           </a:p>
         </p:txBody>
       </p:sp>
@@ -22746,6 +22712,7 @@
           <a:lstStyle/>
           <a:p>
             <a:pPr algn="ctr"/>
+            <a:endParaRPr/>
           </a:p>
         </p:txBody>
       </p:sp>
@@ -22766,7 +22733,7 @@
           <a:noFill/>
         </p:spPr>
         <p:txBody>
-          <a:bodyPr wrap="square" anchor="t" lIns="0" rIns="0" tIns="0" bIns="0">
+          <a:bodyPr wrap="square" lIns="0" tIns="0" rIns="0" bIns="0" anchor="t">
             <a:spAutoFit/>
           </a:bodyPr>
           <a:lstStyle/>
@@ -22805,7 +22772,7 @@
           <a:noFill/>
         </p:spPr>
         <p:txBody>
-          <a:bodyPr wrap="square" anchor="t" lIns="0" rIns="0" tIns="0" bIns="0">
+          <a:bodyPr wrap="square" lIns="0" tIns="0" rIns="0" bIns="0" anchor="t">
             <a:spAutoFit/>
           </a:bodyPr>
           <a:lstStyle/>
@@ -22868,6 +22835,7 @@
           <a:lstStyle/>
           <a:p>
             <a:pPr algn="ctr"/>
+            <a:endParaRPr/>
           </a:p>
         </p:txBody>
       </p:sp>
@@ -22888,7 +22856,7 @@
           <a:noFill/>
         </p:spPr>
         <p:txBody>
-          <a:bodyPr wrap="square" lIns="0" rIns="0" tIns="0" bIns="0">
+          <a:bodyPr wrap="square" lIns="0" tIns="0" rIns="0" bIns="0">
             <a:spAutoFit/>
           </a:bodyPr>
           <a:lstStyle/>
@@ -23085,6 +23053,7 @@
           <a:lstStyle/>
           <a:p>
             <a:pPr algn="ctr"/>
+            <a:endParaRPr/>
           </a:p>
         </p:txBody>
       </p:sp>
@@ -23105,7 +23074,7 @@
           <a:noFill/>
         </p:spPr>
         <p:txBody>
-          <a:bodyPr wrap="square" anchor="ctr" lIns="0" rIns="0" tIns="0" bIns="0">
+          <a:bodyPr wrap="square" lIns="0" tIns="0" rIns="0" bIns="0" anchor="ctr">
             <a:spAutoFit/>
           </a:bodyPr>
           <a:lstStyle/>
@@ -23170,6 +23139,7 @@
           <a:lstStyle/>
           <a:p>
             <a:pPr algn="ctr"/>
+            <a:endParaRPr/>
           </a:p>
         </p:txBody>
       </p:sp>
@@ -23190,7 +23160,7 @@
           <a:noFill/>
         </p:spPr>
         <p:txBody>
-          <a:bodyPr wrap="square" anchor="ctr" lIns="0" rIns="0" tIns="0" bIns="0">
+          <a:bodyPr wrap="square" lIns="0" tIns="0" rIns="0" bIns="0" anchor="ctr">
             <a:spAutoFit/>
           </a:bodyPr>
           <a:lstStyle/>
@@ -23255,6 +23225,7 @@
           <a:lstStyle/>
           <a:p>
             <a:pPr algn="ctr"/>
+            <a:endParaRPr/>
           </a:p>
         </p:txBody>
       </p:sp>
@@ -23275,7 +23246,7 @@
           <a:noFill/>
         </p:spPr>
         <p:txBody>
-          <a:bodyPr wrap="square" anchor="ctr" lIns="0" rIns="0" tIns="0" bIns="0">
+          <a:bodyPr wrap="square" lIns="0" tIns="0" rIns="0" bIns="0" anchor="ctr">
             <a:spAutoFit/>
           </a:bodyPr>
           <a:lstStyle/>
@@ -23340,6 +23311,7 @@
           <a:lstStyle/>
           <a:p>
             <a:pPr algn="ctr"/>
+            <a:endParaRPr/>
           </a:p>
         </p:txBody>
       </p:sp>
@@ -23360,7 +23332,7 @@
           <a:noFill/>
         </p:spPr>
         <p:txBody>
-          <a:bodyPr wrap="square" anchor="ctr" lIns="0" rIns="0" tIns="0" bIns="0">
+          <a:bodyPr wrap="square" lIns="0" tIns="0" rIns="0" bIns="0" anchor="ctr">
             <a:spAutoFit/>
           </a:bodyPr>
           <a:lstStyle/>
@@ -23399,7 +23371,7 @@
           <a:noFill/>
         </p:spPr>
         <p:txBody>
-          <a:bodyPr wrap="square" anchor="t" lIns="0" rIns="0" tIns="0" bIns="0">
+          <a:bodyPr wrap="square" lIns="0" tIns="0" rIns="0" bIns="0" anchor="t">
             <a:spAutoFit/>
           </a:bodyPr>
           <a:lstStyle/>
@@ -23454,7 +23426,7 @@
           <a:noFill/>
         </p:spPr>
         <p:txBody>
-          <a:bodyPr wrap="square" anchor="t" lIns="0" rIns="0" tIns="0" bIns="0">
+          <a:bodyPr wrap="square" lIns="0" tIns="0" rIns="0" bIns="0" anchor="t">
             <a:spAutoFit/>
           </a:bodyPr>
           <a:lstStyle/>
@@ -23533,6 +23505,7 @@
           <a:lstStyle/>
           <a:p>
             <a:pPr algn="ctr"/>
+            <a:endParaRPr/>
           </a:p>
         </p:txBody>
       </p:sp>
@@ -23553,7 +23526,7 @@
           <a:noFill/>
         </p:spPr>
         <p:txBody>
-          <a:bodyPr wrap="square" anchor="ctr" lIns="0" rIns="0" tIns="0" bIns="0">
+          <a:bodyPr wrap="square" lIns="0" tIns="0" rIns="0" bIns="0" anchor="ctr">
             <a:spAutoFit/>
           </a:bodyPr>
           <a:lstStyle/>
@@ -23592,7 +23565,7 @@
           <a:noFill/>
         </p:spPr>
         <p:txBody>
-          <a:bodyPr wrap="square" anchor="ctr" lIns="0" rIns="0" tIns="0" bIns="0">
+          <a:bodyPr wrap="square" lIns="0" tIns="0" rIns="0" bIns="0" anchor="ctr">
             <a:spAutoFit/>
           </a:bodyPr>
           <a:lstStyle/>
@@ -23623,7 +23596,7 @@
 </file>
 
 <file path=ppt/slides/slide8.xml><?xml version="1.0" encoding="utf-8"?>
-<p:sld xmlns:a="http://schemas.openxmlformats.org/drawingml/2006/main" xmlns:p="http://schemas.openxmlformats.org/presentationml/2006/main" xmlns:r="http://schemas.openxmlformats.org/officeDocument/2006/relationships">
+<p:sld xmlns:a="http://schemas.openxmlformats.org/drawingml/2006/main" xmlns:r="http://schemas.openxmlformats.org/officeDocument/2006/relationships" xmlns:p="http://schemas.openxmlformats.org/presentationml/2006/main">
   <p:cSld>
     <p:spTree>
       <p:nvGrpSpPr>
@@ -23631,7 +23604,14 @@
         <p:cNvGrpSpPr/>
         <p:nvPr/>
       </p:nvGrpSpPr>
-      <p:grpSpPr/>
+      <p:grpSpPr>
+        <a:xfrm>
+          <a:off x="0" y="0"/>
+          <a:ext cx="0" cy="0"/>
+          <a:chOff x="0" y="0"/>
+          <a:chExt cx="0" cy="0"/>
+        </a:xfrm>
+      </p:grpSpPr>
       <p:sp>
         <p:nvSpPr>
           <p:cNvPr id="2" name="Rectangle 1"/>
@@ -23673,6 +23653,7 @@
           <a:lstStyle/>
           <a:p>
             <a:pPr algn="ctr"/>
+            <a:endParaRPr/>
           </a:p>
         </p:txBody>
       </p:sp>
@@ -23717,6 +23698,7 @@
           <a:lstStyle/>
           <a:p>
             <a:pPr algn="ctr"/>
+            <a:endParaRPr/>
           </a:p>
         </p:txBody>
       </p:sp>
@@ -23737,7 +23719,7 @@
           <a:noFill/>
         </p:spPr>
         <p:txBody>
-          <a:bodyPr wrap="square" anchor="t" lIns="0" rIns="0" tIns="0" bIns="0">
+          <a:bodyPr wrap="square" lIns="0" tIns="0" rIns="0" bIns="0" anchor="t">
             <a:spAutoFit/>
           </a:bodyPr>
           <a:lstStyle/>
@@ -23776,7 +23758,7 @@
           <a:noFill/>
         </p:spPr>
         <p:txBody>
-          <a:bodyPr wrap="square" anchor="t" lIns="0" rIns="0" tIns="0" bIns="0">
+          <a:bodyPr wrap="square" lIns="0" tIns="0" rIns="0" bIns="0" anchor="t">
             <a:spAutoFit/>
           </a:bodyPr>
           <a:lstStyle/>
@@ -23839,6 +23821,7 @@
           <a:lstStyle/>
           <a:p>
             <a:pPr algn="ctr"/>
+            <a:endParaRPr/>
           </a:p>
         </p:txBody>
       </p:sp>
@@ -23861,15 +23844,39 @@
                 <a:tableStyleId>{5C22544A-7EE6-4342-B048-85BDC9FD1C3A}</a:tableStyleId>
               </a:tblPr>
               <a:tblGrid>
-                <a:gridCol w="2440641"/>
-                <a:gridCol w="1301675"/>
-                <a:gridCol w="4393154"/>
-                <a:gridCol w="2928769"/>
+                <a:gridCol w="2440641">
+                  <a:extLst>
+                    <a:ext uri="{9D8B030D-6E8A-4147-A177-3AD203B41FA5}">
+                      <a16:colId xmlns:a16="http://schemas.microsoft.com/office/drawing/2014/main" val="20000"/>
+                    </a:ext>
+                  </a:extLst>
+                </a:gridCol>
+                <a:gridCol w="1301675">
+                  <a:extLst>
+                    <a:ext uri="{9D8B030D-6E8A-4147-A177-3AD203B41FA5}">
+                      <a16:colId xmlns:a16="http://schemas.microsoft.com/office/drawing/2014/main" val="20001"/>
+                    </a:ext>
+                  </a:extLst>
+                </a:gridCol>
+                <a:gridCol w="4393154">
+                  <a:extLst>
+                    <a:ext uri="{9D8B030D-6E8A-4147-A177-3AD203B41FA5}">
+                      <a16:colId xmlns:a16="http://schemas.microsoft.com/office/drawing/2014/main" val="20002"/>
+                    </a:ext>
+                  </a:extLst>
+                </a:gridCol>
+                <a:gridCol w="2928769">
+                  <a:extLst>
+                    <a:ext uri="{9D8B030D-6E8A-4147-A177-3AD203B41FA5}">
+                      <a16:colId xmlns:a16="http://schemas.microsoft.com/office/drawing/2014/main" val="20003"/>
+                    </a:ext>
+                  </a:extLst>
+                </a:gridCol>
               </a:tblGrid>
               <a:tr h="434340">
                 <a:tc>
                   <a:txBody>
-                    <a:bodyPr wrap="square"/>
+                    <a:bodyPr/>
                     <a:lstStyle/>
                     <a:p>
                       <a:pPr algn="l"/>
@@ -23892,7 +23899,7 @@
                 </a:tc>
                 <a:tc>
                   <a:txBody>
-                    <a:bodyPr wrap="square"/>
+                    <a:bodyPr/>
                     <a:lstStyle/>
                     <a:p>
                       <a:pPr algn="ctr"/>
@@ -23915,7 +23922,7 @@
                 </a:tc>
                 <a:tc>
                   <a:txBody>
-                    <a:bodyPr wrap="square"/>
+                    <a:bodyPr/>
                     <a:lstStyle/>
                     <a:p>
                       <a:pPr algn="l"/>
@@ -23938,7 +23945,7 @@
                 </a:tc>
                 <a:tc>
                   <a:txBody>
-                    <a:bodyPr wrap="square"/>
+                    <a:bodyPr/>
                     <a:lstStyle/>
                     <a:p>
                       <a:pPr algn="l"/>
@@ -23959,11 +23966,16 @@
                     </a:solidFill>
                   </a:tcPr>
                 </a:tc>
+                <a:extLst>
+                  <a:ext uri="{0D108BD9-81ED-4DB2-BD59-A6C34878D82A}">
+                    <a16:rowId xmlns:a16="http://schemas.microsoft.com/office/drawing/2014/main" val="10000"/>
+                  </a:ext>
+                </a:extLst>
               </a:tr>
               <a:tr h="434340">
                 <a:tc>
                   <a:txBody>
-                    <a:bodyPr wrap="square"/>
+                    <a:bodyPr/>
                     <a:lstStyle/>
                     <a:p>
                       <a:pPr algn="l"/>
@@ -23986,7 +23998,7 @@
                 </a:tc>
                 <a:tc>
                   <a:txBody>
-                    <a:bodyPr wrap="square"/>
+                    <a:bodyPr/>
                     <a:lstStyle/>
                     <a:p>
                       <a:pPr algn="ctr"/>
@@ -24009,7 +24021,7 @@
                 </a:tc>
                 <a:tc>
                   <a:txBody>
-                    <a:bodyPr wrap="square"/>
+                    <a:bodyPr/>
                     <a:lstStyle/>
                     <a:p>
                       <a:pPr algn="l"/>
@@ -24032,7 +24044,7 @@
                 </a:tc>
                 <a:tc>
                   <a:txBody>
-                    <a:bodyPr wrap="square"/>
+                    <a:bodyPr/>
                     <a:lstStyle/>
                     <a:p>
                       <a:pPr algn="l"/>
@@ -24053,11 +24065,16 @@
                     </a:solidFill>
                   </a:tcPr>
                 </a:tc>
+                <a:extLst>
+                  <a:ext uri="{0D108BD9-81ED-4DB2-BD59-A6C34878D82A}">
+                    <a16:rowId xmlns:a16="http://schemas.microsoft.com/office/drawing/2014/main" val="10001"/>
+                  </a:ext>
+                </a:extLst>
               </a:tr>
               <a:tr h="434340">
                 <a:tc>
                   <a:txBody>
-                    <a:bodyPr wrap="square"/>
+                    <a:bodyPr/>
                     <a:lstStyle/>
                     <a:p>
                       <a:pPr algn="l"/>
@@ -24080,7 +24097,7 @@
                 </a:tc>
                 <a:tc>
                   <a:txBody>
-                    <a:bodyPr wrap="square"/>
+                    <a:bodyPr/>
                     <a:lstStyle/>
                     <a:p>
                       <a:pPr algn="ctr"/>
@@ -24103,7 +24120,7 @@
                 </a:tc>
                 <a:tc>
                   <a:txBody>
-                    <a:bodyPr wrap="square"/>
+                    <a:bodyPr/>
                     <a:lstStyle/>
                     <a:p>
                       <a:pPr algn="l"/>
@@ -24126,7 +24143,7 @@
                 </a:tc>
                 <a:tc>
                   <a:txBody>
-                    <a:bodyPr wrap="square"/>
+                    <a:bodyPr/>
                     <a:lstStyle/>
                     <a:p>
                       <a:pPr algn="l"/>
@@ -24147,11 +24164,16 @@
                     </a:solidFill>
                   </a:tcPr>
                 </a:tc>
+                <a:extLst>
+                  <a:ext uri="{0D108BD9-81ED-4DB2-BD59-A6C34878D82A}">
+                    <a16:rowId xmlns:a16="http://schemas.microsoft.com/office/drawing/2014/main" val="10002"/>
+                  </a:ext>
+                </a:extLst>
               </a:tr>
               <a:tr h="434340">
                 <a:tc>
                   <a:txBody>
-                    <a:bodyPr wrap="square"/>
+                    <a:bodyPr/>
                     <a:lstStyle/>
                     <a:p>
                       <a:pPr algn="l"/>
@@ -24174,7 +24196,7 @@
                 </a:tc>
                 <a:tc>
                   <a:txBody>
-                    <a:bodyPr wrap="square"/>
+                    <a:bodyPr/>
                     <a:lstStyle/>
                     <a:p>
                       <a:pPr algn="ctr"/>
@@ -24197,7 +24219,7 @@
                 </a:tc>
                 <a:tc>
                   <a:txBody>
-                    <a:bodyPr wrap="square"/>
+                    <a:bodyPr/>
                     <a:lstStyle/>
                     <a:p>
                       <a:pPr algn="l"/>
@@ -24220,7 +24242,7 @@
                 </a:tc>
                 <a:tc>
                   <a:txBody>
-                    <a:bodyPr wrap="square"/>
+                    <a:bodyPr/>
                     <a:lstStyle/>
                     <a:p>
                       <a:pPr algn="l"/>
@@ -24241,6 +24263,11 @@
                     </a:solidFill>
                   </a:tcPr>
                 </a:tc>
+                <a:extLst>
+                  <a:ext uri="{0D108BD9-81ED-4DB2-BD59-A6C34878D82A}">
+                    <a16:rowId xmlns:a16="http://schemas.microsoft.com/office/drawing/2014/main" val="10003"/>
+                  </a:ext>
+                </a:extLst>
               </a:tr>
             </a:tbl>
           </a:graphicData>
@@ -24263,7 +24290,7 @@
           <a:noFill/>
         </p:spPr>
         <p:txBody>
-          <a:bodyPr wrap="square" anchor="t" lIns="0" rIns="0" tIns="0" bIns="0">
+          <a:bodyPr wrap="square" lIns="0" tIns="0" rIns="0" bIns="0" anchor="t">
             <a:spAutoFit/>
           </a:bodyPr>
           <a:lstStyle/>
@@ -24328,6 +24355,7 @@
           <a:lstStyle/>
           <a:p>
             <a:pPr algn="ctr"/>
+            <a:endParaRPr/>
           </a:p>
         </p:txBody>
       </p:sp>
@@ -24348,7 +24376,7 @@
           <a:noFill/>
         </p:spPr>
         <p:txBody>
-          <a:bodyPr wrap="square" anchor="ctr" lIns="0" rIns="0" tIns="0" bIns="0">
+          <a:bodyPr wrap="square" lIns="0" tIns="0" rIns="0" bIns="0" anchor="ctr">
             <a:spAutoFit/>
           </a:bodyPr>
           <a:lstStyle/>
@@ -24413,6 +24441,7 @@
           <a:lstStyle/>
           <a:p>
             <a:pPr algn="ctr"/>
+            <a:endParaRPr/>
           </a:p>
         </p:txBody>
       </p:sp>
@@ -24433,7 +24462,7 @@
           <a:noFill/>
         </p:spPr>
         <p:txBody>
-          <a:bodyPr wrap="square" anchor="ctr" lIns="0" rIns="0" tIns="0" bIns="0">
+          <a:bodyPr wrap="square" lIns="0" tIns="0" rIns="0" bIns="0" anchor="ctr">
             <a:spAutoFit/>
           </a:bodyPr>
           <a:lstStyle/>
@@ -24498,6 +24527,7 @@
           <a:lstStyle/>
           <a:p>
             <a:pPr algn="ctr"/>
+            <a:endParaRPr/>
           </a:p>
         </p:txBody>
       </p:sp>
@@ -24518,7 +24548,7 @@
           <a:noFill/>
         </p:spPr>
         <p:txBody>
-          <a:bodyPr wrap="square" anchor="ctr" lIns="0" rIns="0" tIns="0" bIns="0">
+          <a:bodyPr wrap="square" lIns="0" tIns="0" rIns="0" bIns="0" anchor="ctr">
             <a:spAutoFit/>
           </a:bodyPr>
           <a:lstStyle/>
@@ -24583,6 +24613,7 @@
           <a:lstStyle/>
           <a:p>
             <a:pPr algn="ctr"/>
+            <a:endParaRPr/>
           </a:p>
         </p:txBody>
       </p:sp>
@@ -24603,7 +24634,7 @@
           <a:noFill/>
         </p:spPr>
         <p:txBody>
-          <a:bodyPr wrap="square" anchor="ctr" lIns="0" rIns="0" tIns="0" bIns="0">
+          <a:bodyPr wrap="square" lIns="0" tIns="0" rIns="0" bIns="0" anchor="ctr">
             <a:spAutoFit/>
           </a:bodyPr>
           <a:lstStyle/>
@@ -24668,6 +24699,7 @@
           <a:lstStyle/>
           <a:p>
             <a:pPr algn="ctr"/>
+            <a:endParaRPr/>
           </a:p>
         </p:txBody>
       </p:sp>
@@ -24688,7 +24720,7 @@
           <a:noFill/>
         </p:spPr>
         <p:txBody>
-          <a:bodyPr wrap="square" anchor="ctr" lIns="0" rIns="0" tIns="0" bIns="0">
+          <a:bodyPr wrap="square" lIns="0" tIns="0" rIns="0" bIns="0" anchor="ctr">
             <a:spAutoFit/>
           </a:bodyPr>
           <a:lstStyle/>
@@ -24753,6 +24785,7 @@
           <a:lstStyle/>
           <a:p>
             <a:pPr algn="ctr"/>
+            <a:endParaRPr/>
           </a:p>
         </p:txBody>
       </p:sp>
@@ -24773,7 +24806,7 @@
           <a:noFill/>
         </p:spPr>
         <p:txBody>
-          <a:bodyPr wrap="square" anchor="ctr" lIns="0" rIns="0" tIns="0" bIns="0">
+          <a:bodyPr wrap="square" lIns="0" tIns="0" rIns="0" bIns="0" anchor="ctr">
             <a:spAutoFit/>
           </a:bodyPr>
           <a:lstStyle/>
@@ -24838,6 +24871,7 @@
           <a:lstStyle/>
           <a:p>
             <a:pPr algn="ctr"/>
+            <a:endParaRPr/>
           </a:p>
         </p:txBody>
       </p:sp>
@@ -24858,7 +24892,7 @@
           <a:noFill/>
         </p:spPr>
         <p:txBody>
-          <a:bodyPr wrap="square" anchor="ctr" lIns="0" rIns="0" tIns="0" bIns="0">
+          <a:bodyPr wrap="square" lIns="0" tIns="0" rIns="0" bIns="0" anchor="ctr">
             <a:spAutoFit/>
           </a:bodyPr>
           <a:lstStyle/>
@@ -24923,6 +24957,7 @@
           <a:lstStyle/>
           <a:p>
             <a:pPr algn="ctr"/>
+            <a:endParaRPr/>
           </a:p>
         </p:txBody>
       </p:sp>
@@ -24943,7 +24978,7 @@
           <a:noFill/>
         </p:spPr>
         <p:txBody>
-          <a:bodyPr wrap="square" anchor="ctr" lIns="0" rIns="0" tIns="0" bIns="0">
+          <a:bodyPr wrap="square" lIns="0" tIns="0" rIns="0" bIns="0" anchor="ctr">
             <a:spAutoFit/>
           </a:bodyPr>
           <a:lstStyle/>
@@ -25008,6 +25043,7 @@
           <a:lstStyle/>
           <a:p>
             <a:pPr algn="ctr"/>
+            <a:endParaRPr/>
           </a:p>
         </p:txBody>
       </p:sp>
@@ -25028,7 +25064,7 @@
           <a:noFill/>
         </p:spPr>
         <p:txBody>
-          <a:bodyPr wrap="square" anchor="t" lIns="0" rIns="0" tIns="0" bIns="0">
+          <a:bodyPr wrap="square" lIns="0" tIns="0" rIns="0" bIns="0" anchor="t">
             <a:spAutoFit/>
           </a:bodyPr>
           <a:lstStyle/>
@@ -25091,6 +25127,7 @@
           <a:lstStyle/>
           <a:p>
             <a:pPr algn="ctr"/>
+            <a:endParaRPr/>
           </a:p>
         </p:txBody>
       </p:sp>
@@ -25111,7 +25148,7 @@
           <a:noFill/>
         </p:spPr>
         <p:txBody>
-          <a:bodyPr wrap="square" anchor="ctr" lIns="0" rIns="0" tIns="0" bIns="0">
+          <a:bodyPr wrap="square" lIns="0" tIns="0" rIns="0" bIns="0" anchor="ctr">
             <a:spAutoFit/>
           </a:bodyPr>
           <a:lstStyle/>
@@ -25150,7 +25187,7 @@
           <a:noFill/>
         </p:spPr>
         <p:txBody>
-          <a:bodyPr wrap="square" anchor="ctr" lIns="0" rIns="0" tIns="0" bIns="0">
+          <a:bodyPr wrap="square" lIns="0" tIns="0" rIns="0" bIns="0" anchor="ctr">
             <a:spAutoFit/>
           </a:bodyPr>
           <a:lstStyle/>
@@ -25181,7 +25218,7 @@
 </file>
 
 <file path=ppt/slides/slide9.xml><?xml version="1.0" encoding="utf-8"?>
-<p:sld xmlns:a="http://schemas.openxmlformats.org/drawingml/2006/main" xmlns:p="http://schemas.openxmlformats.org/presentationml/2006/main" xmlns:r="http://schemas.openxmlformats.org/officeDocument/2006/relationships">
+<p:sld xmlns:a="http://schemas.openxmlformats.org/drawingml/2006/main" xmlns:r="http://schemas.openxmlformats.org/officeDocument/2006/relationships" xmlns:p="http://schemas.openxmlformats.org/presentationml/2006/main">
   <p:cSld>
     <p:spTree>
       <p:nvGrpSpPr>
@@ -25189,7 +25226,14 @@
         <p:cNvGrpSpPr/>
         <p:nvPr/>
       </p:nvGrpSpPr>
-      <p:grpSpPr/>
+      <p:grpSpPr>
+        <a:xfrm>
+          <a:off x="0" y="0"/>
+          <a:ext cx="0" cy="0"/>
+          <a:chOff x="0" y="0"/>
+          <a:chExt cx="0" cy="0"/>
+        </a:xfrm>
+      </p:grpSpPr>
       <p:sp>
         <p:nvSpPr>
           <p:cNvPr id="2" name="Rectangle 1"/>
@@ -25231,6 +25275,7 @@
           <a:lstStyle/>
           <a:p>
             <a:pPr algn="ctr"/>
+            <a:endParaRPr/>
           </a:p>
         </p:txBody>
       </p:sp>
@@ -25275,6 +25320,7 @@
           <a:lstStyle/>
           <a:p>
             <a:pPr algn="ctr"/>
+            <a:endParaRPr/>
           </a:p>
         </p:txBody>
       </p:sp>
@@ -25295,7 +25341,7 @@
           <a:noFill/>
         </p:spPr>
         <p:txBody>
-          <a:bodyPr wrap="square" anchor="t" lIns="0" rIns="0" tIns="0" bIns="0">
+          <a:bodyPr wrap="square" lIns="0" tIns="0" rIns="0" bIns="0" anchor="t">
             <a:spAutoFit/>
           </a:bodyPr>
           <a:lstStyle/>
@@ -25334,7 +25380,7 @@
           <a:noFill/>
         </p:spPr>
         <p:txBody>
-          <a:bodyPr wrap="square" anchor="t" lIns="0" rIns="0" tIns="0" bIns="0">
+          <a:bodyPr wrap="square" lIns="0" tIns="0" rIns="0" bIns="0" anchor="t">
             <a:spAutoFit/>
           </a:bodyPr>
           <a:lstStyle/>
@@ -25397,6 +25443,7 @@
           <a:lstStyle/>
           <a:p>
             <a:pPr algn="ctr"/>
+            <a:endParaRPr/>
           </a:p>
         </p:txBody>
       </p:sp>
@@ -25419,14 +25466,32 @@
                 <a:tableStyleId>{5C22544A-7EE6-4342-B048-85BDC9FD1C3A}</a:tableStyleId>
               </a:tblPr>
               <a:tblGrid>
-                <a:gridCol w="3200400"/>
-                <a:gridCol w="4114800"/>
-                <a:gridCol w="3749039"/>
+                <a:gridCol w="3200400">
+                  <a:extLst>
+                    <a:ext uri="{9D8B030D-6E8A-4147-A177-3AD203B41FA5}">
+                      <a16:colId xmlns:a16="http://schemas.microsoft.com/office/drawing/2014/main" val="20000"/>
+                    </a:ext>
+                  </a:extLst>
+                </a:gridCol>
+                <a:gridCol w="4114800">
+                  <a:extLst>
+                    <a:ext uri="{9D8B030D-6E8A-4147-A177-3AD203B41FA5}">
+                      <a16:colId xmlns:a16="http://schemas.microsoft.com/office/drawing/2014/main" val="20001"/>
+                    </a:ext>
+                  </a:extLst>
+                </a:gridCol>
+                <a:gridCol w="3749039">
+                  <a:extLst>
+                    <a:ext uri="{9D8B030D-6E8A-4147-A177-3AD203B41FA5}">
+                      <a16:colId xmlns:a16="http://schemas.microsoft.com/office/drawing/2014/main" val="20002"/>
+                    </a:ext>
+                  </a:extLst>
+                </a:gridCol>
               </a:tblGrid>
               <a:tr h="466344">
                 <a:tc>
                   <a:txBody>
-                    <a:bodyPr wrap="square"/>
+                    <a:bodyPr/>
                     <a:lstStyle/>
                     <a:p>
                       <a:pPr algn="l"/>
@@ -25449,7 +25514,7 @@
                 </a:tc>
                 <a:tc>
                   <a:txBody>
-                    <a:bodyPr wrap="square"/>
+                    <a:bodyPr/>
                     <a:lstStyle/>
                     <a:p>
                       <a:pPr algn="l"/>
@@ -25472,7 +25537,7 @@
                 </a:tc>
                 <a:tc>
                   <a:txBody>
-                    <a:bodyPr wrap="square"/>
+                    <a:bodyPr/>
                     <a:lstStyle/>
                     <a:p>
                       <a:pPr algn="ctr"/>
@@ -25493,11 +25558,16 @@
                     </a:solidFill>
                   </a:tcPr>
                 </a:tc>
+                <a:extLst>
+                  <a:ext uri="{0D108BD9-81ED-4DB2-BD59-A6C34878D82A}">
+                    <a16:rowId xmlns:a16="http://schemas.microsoft.com/office/drawing/2014/main" val="10000"/>
+                  </a:ext>
+                </a:extLst>
               </a:tr>
               <a:tr h="466344">
                 <a:tc>
                   <a:txBody>
-                    <a:bodyPr wrap="square"/>
+                    <a:bodyPr/>
                     <a:lstStyle/>
                     <a:p>
                       <a:pPr algn="l"/>
@@ -25520,7 +25590,7 @@
                 </a:tc>
                 <a:tc>
                   <a:txBody>
-                    <a:bodyPr wrap="square"/>
+                    <a:bodyPr/>
                     <a:lstStyle/>
                     <a:p>
                       <a:pPr algn="l"/>
@@ -25543,7 +25613,7 @@
                 </a:tc>
                 <a:tc>
                   <a:txBody>
-                    <a:bodyPr wrap="square"/>
+                    <a:bodyPr/>
                     <a:lstStyle/>
                     <a:p>
                       <a:pPr algn="ctr"/>
@@ -25564,11 +25634,16 @@
                     </a:solidFill>
                   </a:tcPr>
                 </a:tc>
+                <a:extLst>
+                  <a:ext uri="{0D108BD9-81ED-4DB2-BD59-A6C34878D82A}">
+                    <a16:rowId xmlns:a16="http://schemas.microsoft.com/office/drawing/2014/main" val="10001"/>
+                  </a:ext>
+                </a:extLst>
               </a:tr>
               <a:tr h="466344">
                 <a:tc>
                   <a:txBody>
-                    <a:bodyPr wrap="square"/>
+                    <a:bodyPr/>
                     <a:lstStyle/>
                     <a:p>
                       <a:pPr algn="l"/>
@@ -25591,7 +25666,7 @@
                 </a:tc>
                 <a:tc>
                   <a:txBody>
-                    <a:bodyPr wrap="square"/>
+                    <a:bodyPr/>
                     <a:lstStyle/>
                     <a:p>
                       <a:pPr algn="l"/>
@@ -25614,7 +25689,7 @@
                 </a:tc>
                 <a:tc>
                   <a:txBody>
-                    <a:bodyPr wrap="square"/>
+                    <a:bodyPr/>
                     <a:lstStyle/>
                     <a:p>
                       <a:pPr algn="ctr"/>
@@ -25635,11 +25710,16 @@
                     </a:solidFill>
                   </a:tcPr>
                 </a:tc>
+                <a:extLst>
+                  <a:ext uri="{0D108BD9-81ED-4DB2-BD59-A6C34878D82A}">
+                    <a16:rowId xmlns:a16="http://schemas.microsoft.com/office/drawing/2014/main" val="10002"/>
+                  </a:ext>
+                </a:extLst>
               </a:tr>
               <a:tr h="466344">
                 <a:tc>
                   <a:txBody>
-                    <a:bodyPr wrap="square"/>
+                    <a:bodyPr/>
                     <a:lstStyle/>
                     <a:p>
                       <a:pPr algn="l"/>
@@ -25662,7 +25742,7 @@
                 </a:tc>
                 <a:tc>
                   <a:txBody>
-                    <a:bodyPr wrap="square"/>
+                    <a:bodyPr/>
                     <a:lstStyle/>
                     <a:p>
                       <a:pPr algn="l"/>
@@ -25685,7 +25765,7 @@
                 </a:tc>
                 <a:tc>
                   <a:txBody>
-                    <a:bodyPr wrap="square"/>
+                    <a:bodyPr/>
                     <a:lstStyle/>
                     <a:p>
                       <a:pPr algn="ctr"/>
@@ -25706,11 +25786,16 @@
                     </a:solidFill>
                   </a:tcPr>
                 </a:tc>
+                <a:extLst>
+                  <a:ext uri="{0D108BD9-81ED-4DB2-BD59-A6C34878D82A}">
+                    <a16:rowId xmlns:a16="http://schemas.microsoft.com/office/drawing/2014/main" val="10003"/>
+                  </a:ext>
+                </a:extLst>
               </a:tr>
               <a:tr h="466344">
                 <a:tc>
                   <a:txBody>
-                    <a:bodyPr wrap="square"/>
+                    <a:bodyPr/>
                     <a:lstStyle/>
                     <a:p>
                       <a:pPr algn="l"/>
@@ -25733,7 +25818,7 @@
                 </a:tc>
                 <a:tc>
                   <a:txBody>
-                    <a:bodyPr wrap="square"/>
+                    <a:bodyPr/>
                     <a:lstStyle/>
                     <a:p>
                       <a:pPr algn="l"/>
@@ -25756,7 +25841,7 @@
                 </a:tc>
                 <a:tc>
                   <a:txBody>
-                    <a:bodyPr wrap="square"/>
+                    <a:bodyPr/>
                     <a:lstStyle/>
                     <a:p>
                       <a:pPr algn="ctr"/>
@@ -25777,6 +25862,11 @@
                     </a:solidFill>
                   </a:tcPr>
                 </a:tc>
+                <a:extLst>
+                  <a:ext uri="{0D108BD9-81ED-4DB2-BD59-A6C34878D82A}">
+                    <a16:rowId xmlns:a16="http://schemas.microsoft.com/office/drawing/2014/main" val="10004"/>
+                  </a:ext>
+                </a:extLst>
               </a:tr>
             </a:tbl>
           </a:graphicData>
@@ -25799,7 +25889,7 @@
           <a:noFill/>
         </p:spPr>
         <p:txBody>
-          <a:bodyPr wrap="square" lIns="0" rIns="0" tIns="0" bIns="0">
+          <a:bodyPr wrap="square" lIns="0" tIns="0" rIns="0" bIns="0">
             <a:spAutoFit/>
           </a:bodyPr>
           <a:lstStyle/>
@@ -25920,6 +26010,7 @@
           <a:lstStyle/>
           <a:p>
             <a:pPr algn="ctr"/>
+            <a:endParaRPr/>
           </a:p>
         </p:txBody>
       </p:sp>
@@ -25940,7 +26031,7 @@
           <a:noFill/>
         </p:spPr>
         <p:txBody>
-          <a:bodyPr wrap="square" anchor="ctr" lIns="0" rIns="0" tIns="0" bIns="0">
+          <a:bodyPr wrap="square" lIns="0" tIns="0" rIns="0" bIns="0" anchor="ctr">
             <a:spAutoFit/>
           </a:bodyPr>
           <a:lstStyle/>
@@ -25979,7 +26070,7 @@
           <a:noFill/>
         </p:spPr>
         <p:txBody>
-          <a:bodyPr wrap="square" anchor="ctr" lIns="0" rIns="0" tIns="0" bIns="0">
+          <a:bodyPr wrap="square" lIns="0" tIns="0" rIns="0" bIns="0" anchor="ctr">
             <a:spAutoFit/>
           </a:bodyPr>
           <a:lstStyle/>
@@ -26330,7 +26421,7 @@
 </file>
 
 <file path=ppt/theme/theme2.xml><?xml version="1.0" encoding="utf-8"?>
-<a:theme xmlns:a="http://schemas.openxmlformats.org/drawingml/2006/main" name="Office Theme">
+<a:theme xmlns:a="http://schemas.openxmlformats.org/drawingml/2006/main" name="Tema de Office">
   <a:themeElements>
     <a:clrScheme name="Office">
       <a:dk1>
@@ -26340,44 +26431,44 @@
         <a:sysClr val="window" lastClr="FFFFFF"/>
       </a:lt1>
       <a:dk2>
-        <a:srgbClr val="1F497D"/>
+        <a:srgbClr val="44546A"/>
       </a:dk2>
       <a:lt2>
-        <a:srgbClr val="EEECE1"/>
+        <a:srgbClr val="E7E6E6"/>
       </a:lt2>
       <a:accent1>
-        <a:srgbClr val="4F81BD"/>
+        <a:srgbClr val="4472C4"/>
       </a:accent1>
       <a:accent2>
-        <a:srgbClr val="C0504D"/>
+        <a:srgbClr val="ED7D31"/>
       </a:accent2>
       <a:accent3>
-        <a:srgbClr val="9BBB59"/>
+        <a:srgbClr val="A5A5A5"/>
       </a:accent3>
       <a:accent4>
-        <a:srgbClr val="8064A2"/>
+        <a:srgbClr val="FFC000"/>
       </a:accent4>
       <a:accent5>
-        <a:srgbClr val="4BACC6"/>
+        <a:srgbClr val="5B9BD5"/>
       </a:accent5>
       <a:accent6>
-        <a:srgbClr val="F79646"/>
+        <a:srgbClr val="70AD47"/>
       </a:accent6>
       <a:hlink>
-        <a:srgbClr val="0000FF"/>
+        <a:srgbClr val="0563C1"/>
       </a:hlink>
       <a:folHlink>
-        <a:srgbClr val="800080"/>
+        <a:srgbClr val="954F72"/>
       </a:folHlink>
     </a:clrScheme>
     <a:fontScheme name="Office">
       <a:majorFont>
-        <a:latin typeface="Calibri"/>
+        <a:latin typeface="Calibri Light" panose="020F0302020204030204"/>
         <a:ea typeface=""/>
         <a:cs typeface=""/>
-        <a:font script="Jpan" typeface="ＭＳ Ｐゴシック"/>
+        <a:font script="Jpan" typeface="游ゴシック Light"/>
         <a:font script="Hang" typeface="맑은 고딕"/>
-        <a:font script="Hans" typeface="宋体"/>
+        <a:font script="Hans" typeface="等线 Light"/>
         <a:font script="Hant" typeface="新細明體"/>
         <a:font script="Arab" typeface="Times New Roman"/>
         <a:font script="Hebr" typeface="Times New Roman"/>
@@ -26405,14 +26496,31 @@
         <a:font script="Viet" typeface="Times New Roman"/>
         <a:font script="Uigh" typeface="Microsoft Uighur"/>
         <a:font script="Geor" typeface="Sylfaen"/>
+        <a:font script="Armn" typeface="Arial"/>
+        <a:font script="Bugi" typeface="Leelawadee UI"/>
+        <a:font script="Bopo" typeface="Microsoft JhengHei"/>
+        <a:font script="Java" typeface="Javanese Text"/>
+        <a:font script="Lisu" typeface="Segoe UI"/>
+        <a:font script="Mymr" typeface="Myanmar Text"/>
+        <a:font script="Nkoo" typeface="Ebrima"/>
+        <a:font script="Olck" typeface="Nirmala UI"/>
+        <a:font script="Osma" typeface="Ebrima"/>
+        <a:font script="Phag" typeface="Phagspa"/>
+        <a:font script="Syrn" typeface="Estrangelo Edessa"/>
+        <a:font script="Syrj" typeface="Estrangelo Edessa"/>
+        <a:font script="Syre" typeface="Estrangelo Edessa"/>
+        <a:font script="Sora" typeface="Nirmala UI"/>
+        <a:font script="Tale" typeface="Microsoft Tai Le"/>
+        <a:font script="Talu" typeface="Microsoft New Tai Lue"/>
+        <a:font script="Tfng" typeface="Ebrima"/>
       </a:majorFont>
       <a:minorFont>
-        <a:latin typeface="Calibri"/>
+        <a:latin typeface="Calibri" panose="020F0502020204030204"/>
         <a:ea typeface=""/>
         <a:cs typeface=""/>
-        <a:font script="Jpan" typeface="ＭＳ Ｐゴシック"/>
+        <a:font script="Jpan" typeface="游ゴシック"/>
         <a:font script="Hang" typeface="맑은 고딕"/>
-        <a:font script="Hans" typeface="宋体"/>
+        <a:font script="Hans" typeface="等线"/>
         <a:font script="Hant" typeface="新細明體"/>
         <a:font script="Arab" typeface="Arial"/>
         <a:font script="Hebr" typeface="Arial"/>
@@ -26440,6 +26548,23 @@
         <a:font script="Viet" typeface="Arial"/>
         <a:font script="Uigh" typeface="Microsoft Uighur"/>
         <a:font script="Geor" typeface="Sylfaen"/>
+        <a:font script="Armn" typeface="Arial"/>
+        <a:font script="Bugi" typeface="Leelawadee UI"/>
+        <a:font script="Bopo" typeface="Microsoft JhengHei"/>
+        <a:font script="Java" typeface="Javanese Text"/>
+        <a:font script="Lisu" typeface="Segoe UI"/>
+        <a:font script="Mymr" typeface="Myanmar Text"/>
+        <a:font script="Nkoo" typeface="Ebrima"/>
+        <a:font script="Olck" typeface="Nirmala UI"/>
+        <a:font script="Osma" typeface="Ebrima"/>
+        <a:font script="Phag" typeface="Phagspa"/>
+        <a:font script="Syrn" typeface="Estrangelo Edessa"/>
+        <a:font script="Syrj" typeface="Estrangelo Edessa"/>
+        <a:font script="Syre" typeface="Estrangelo Edessa"/>
+        <a:font script="Sora" typeface="Nirmala UI"/>
+        <a:font script="Tale" typeface="Microsoft Tai Le"/>
+        <a:font script="Talu" typeface="Microsoft New Tai Lue"/>
+        <a:font script="Tfng" typeface="Ebrima"/>
       </a:minorFont>
     </a:fontScheme>
     <a:fmtScheme name="Office">
@@ -26451,200 +26576,141 @@
           <a:gsLst>
             <a:gs pos="0">
               <a:schemeClr val="phClr">
-                <a:tint val="50000"/>
-                <a:satMod val="300000"/>
+                <a:lumMod val="110000"/>
+                <a:satMod val="105000"/>
+                <a:tint val="67000"/>
               </a:schemeClr>
             </a:gs>
-            <a:gs pos="35000">
+            <a:gs pos="50000">
               <a:schemeClr val="phClr">
-                <a:tint val="37000"/>
-                <a:satMod val="300000"/>
+                <a:lumMod val="105000"/>
+                <a:satMod val="103000"/>
+                <a:tint val="73000"/>
               </a:schemeClr>
             </a:gs>
             <a:gs pos="100000">
               <a:schemeClr val="phClr">
-                <a:tint val="15000"/>
-                <a:satMod val="350000"/>
+                <a:lumMod val="105000"/>
+                <a:satMod val="109000"/>
+                <a:tint val="81000"/>
               </a:schemeClr>
             </a:gs>
           </a:gsLst>
-          <a:lin ang="16200000" scaled="1"/>
+          <a:lin ang="5400000" scaled="0"/>
         </a:gradFill>
         <a:gradFill rotWithShape="1">
           <a:gsLst>
             <a:gs pos="0">
               <a:schemeClr val="phClr">
-                <a:tint val="100000"/>
+                <a:satMod val="103000"/>
+                <a:lumMod val="102000"/>
+                <a:tint val="94000"/>
+              </a:schemeClr>
+            </a:gs>
+            <a:gs pos="50000">
+              <a:schemeClr val="phClr">
+                <a:satMod val="110000"/>
+                <a:lumMod val="100000"/>
                 <a:shade val="100000"/>
-                <a:satMod val="130000"/>
               </a:schemeClr>
             </a:gs>
             <a:gs pos="100000">
               <a:schemeClr val="phClr">
-                <a:tint val="50000"/>
-                <a:shade val="100000"/>
-                <a:satMod val="350000"/>
+                <a:lumMod val="99000"/>
+                <a:satMod val="120000"/>
+                <a:shade val="78000"/>
               </a:schemeClr>
             </a:gs>
           </a:gsLst>
-          <a:lin ang="16200000" scaled="0"/>
+          <a:lin ang="5400000" scaled="0"/>
         </a:gradFill>
       </a:fillStyleLst>
       <a:lnStyleLst>
-        <a:ln w="9525" cap="flat" cmpd="sng" algn="ctr">
-          <a:solidFill>
-            <a:schemeClr val="phClr">
-              <a:shade val="95000"/>
-              <a:satMod val="105000"/>
-            </a:schemeClr>
-          </a:solidFill>
-          <a:prstDash val="solid"/>
-        </a:ln>
-        <a:ln w="25400" cap="flat" cmpd="sng" algn="ctr">
+        <a:ln w="6350" cap="flat" cmpd="sng" algn="ctr">
           <a:solidFill>
             <a:schemeClr val="phClr"/>
           </a:solidFill>
           <a:prstDash val="solid"/>
+          <a:miter lim="800000"/>
         </a:ln>
-        <a:ln w="38100" cap="flat" cmpd="sng" algn="ctr">
+        <a:ln w="12700" cap="flat" cmpd="sng" algn="ctr">
           <a:solidFill>
             <a:schemeClr val="phClr"/>
           </a:solidFill>
           <a:prstDash val="solid"/>
+          <a:miter lim="800000"/>
+        </a:ln>
+        <a:ln w="19050" cap="flat" cmpd="sng" algn="ctr">
+          <a:solidFill>
+            <a:schemeClr val="phClr"/>
+          </a:solidFill>
+          <a:prstDash val="solid"/>
+          <a:miter lim="800000"/>
         </a:ln>
       </a:lnStyleLst>
       <a:effectStyleLst>
         <a:effectStyle>
+          <a:effectLst/>
+        </a:effectStyle>
+        <a:effectStyle>
+          <a:effectLst/>
+        </a:effectStyle>
+        <a:effectStyle>
           <a:effectLst>
-            <a:outerShdw blurRad="40000" dist="20000" dir="5400000" rotWithShape="0">
+            <a:outerShdw blurRad="57150" dist="19050" dir="5400000" algn="ctr" rotWithShape="0">
               <a:srgbClr val="000000">
-                <a:alpha val="38000"/>
+                <a:alpha val="63000"/>
               </a:srgbClr>
             </a:outerShdw>
           </a:effectLst>
-        </a:effectStyle>
-        <a:effectStyle>
-          <a:effectLst>
-            <a:outerShdw blurRad="40000" dist="23000" dir="5400000" rotWithShape="0">
-              <a:srgbClr val="000000">
-                <a:alpha val="35000"/>
-              </a:srgbClr>
-            </a:outerShdw>
-          </a:effectLst>
-        </a:effectStyle>
-        <a:effectStyle>
-          <a:effectLst>
-            <a:outerShdw blurRad="40000" dist="23000" dir="5400000" rotWithShape="0">
-              <a:srgbClr val="000000">
-                <a:alpha val="35000"/>
-              </a:srgbClr>
-            </a:outerShdw>
-          </a:effectLst>
-          <a:scene3d>
-            <a:camera prst="orthographicFront">
-              <a:rot lat="0" lon="0" rev="0"/>
-            </a:camera>
-            <a:lightRig rig="threePt" dir="t">
-              <a:rot lat="0" lon="0" rev="1200000"/>
-            </a:lightRig>
-          </a:scene3d>
-          <a:sp3d>
-            <a:bevelT w="63500" h="25400"/>
-          </a:sp3d>
         </a:effectStyle>
       </a:effectStyleLst>
       <a:bgFillStyleLst>
         <a:solidFill>
           <a:schemeClr val="phClr"/>
         </a:solidFill>
+        <a:solidFill>
+          <a:schemeClr val="phClr">
+            <a:tint val="95000"/>
+            <a:satMod val="170000"/>
+          </a:schemeClr>
+        </a:solidFill>
         <a:gradFill rotWithShape="1">
           <a:gsLst>
             <a:gs pos="0">
               <a:schemeClr val="phClr">
-                <a:tint val="40000"/>
-                <a:satMod val="350000"/>
+                <a:tint val="93000"/>
+                <a:satMod val="150000"/>
+                <a:shade val="98000"/>
+                <a:lumMod val="102000"/>
               </a:schemeClr>
             </a:gs>
-            <a:gs pos="40000">
+            <a:gs pos="50000">
               <a:schemeClr val="phClr">
-                <a:tint val="45000"/>
-                <a:shade val="99000"/>
-                <a:satMod val="350000"/>
+                <a:tint val="98000"/>
+                <a:satMod val="130000"/>
+                <a:shade val="90000"/>
+                <a:lumMod val="103000"/>
               </a:schemeClr>
             </a:gs>
             <a:gs pos="100000">
               <a:schemeClr val="phClr">
-                <a:shade val="20000"/>
-                <a:satMod val="255000"/>
+                <a:shade val="63000"/>
+                <a:satMod val="120000"/>
               </a:schemeClr>
             </a:gs>
           </a:gsLst>
-          <a:path path="circle">
-            <a:fillToRect l="50000" t="-80000" r="50000" b="180000"/>
-          </a:path>
-        </a:gradFill>
-        <a:gradFill rotWithShape="1">
-          <a:gsLst>
-            <a:gs pos="0">
-              <a:schemeClr val="phClr">
-                <a:tint val="80000"/>
-                <a:satMod val="300000"/>
-              </a:schemeClr>
-            </a:gs>
-            <a:gs pos="100000">
-              <a:schemeClr val="phClr">
-                <a:shade val="30000"/>
-                <a:satMod val="200000"/>
-              </a:schemeClr>
-            </a:gs>
-          </a:gsLst>
-          <a:path path="circle">
-            <a:fillToRect l="50000" t="50000" r="50000" b="50000"/>
-          </a:path>
+          <a:lin ang="5400000" scaled="0"/>
         </a:gradFill>
       </a:bgFillStyleLst>
     </a:fmtScheme>
   </a:themeElements>
-  <a:objectDefaults>
-    <a:spDef>
-      <a:spPr/>
-      <a:bodyPr/>
-      <a:lstStyle/>
-      <a:style>
-        <a:lnRef idx="1">
-          <a:schemeClr val="accent1"/>
-        </a:lnRef>
-        <a:fillRef idx="3">
-          <a:schemeClr val="accent1"/>
-        </a:fillRef>
-        <a:effectRef idx="2">
-          <a:schemeClr val="accent1"/>
-        </a:effectRef>
-        <a:fontRef idx="minor">
-          <a:schemeClr val="lt1"/>
-        </a:fontRef>
-      </a:style>
-    </a:spDef>
-    <a:lnDef>
-      <a:spPr/>
-      <a:bodyPr/>
-      <a:lstStyle/>
-      <a:style>
-        <a:lnRef idx="2">
-          <a:schemeClr val="accent1"/>
-        </a:lnRef>
-        <a:fillRef idx="0">
-          <a:schemeClr val="accent1"/>
-        </a:fillRef>
-        <a:effectRef idx="1">
-          <a:schemeClr val="accent1"/>
-        </a:effectRef>
-        <a:fontRef idx="minor">
-          <a:schemeClr val="tx1"/>
-        </a:fontRef>
-      </a:style>
-    </a:lnDef>
-  </a:objectDefaults>
+  <a:objectDefaults/>
   <a:extraClrSchemeLst/>
+  <a:extLst>
+    <a:ext uri="{05A4C25C-085E-4340-85A3-A5531E510DB2}">
+      <thm15:themeFamily xmlns:thm15="http://schemas.microsoft.com/office/thememl/2012/main" name="Office Theme" id="{62F939B6-93AF-4DB8-9C6B-D6C7DFDC589F}" vid="{4A3C46E8-61CC-4603-A589-7422A47A8E4A}"/>
+    </a:ext>
+  </a:extLst>
 </a:theme>
 </file>